--- a/slides/PedaForge_Proposal.pptx
+++ b/slides/PedaForge_Proposal.pptx
@@ -3095,7 +3095,7 @@
     <p:bg>
       <p:bgPr>
         <a:solidFill>
-          <a:srgbClr val="1A365D"/>
+          <a:srgbClr val="2D2A5E"/>
         </a:solidFill>
         <a:effectLst/>
       </p:bgPr>
@@ -3122,7 +3122,7 @@
             <a:avLst/>
           </a:prstGeom>
           <a:solidFill>
-            <a:srgbClr val="152A4A"/>
+            <a:srgbClr val="1A1535"/>
           </a:solidFill>
           <a:ln>
             <a:noFill/>
@@ -3165,7 +3165,7 @@
             <a:avLst/>
           </a:prstGeom>
           <a:solidFill>
-            <a:srgbClr val="0E7C6B"/>
+            <a:srgbClr val="01ABAA"/>
           </a:solidFill>
           <a:ln>
             <a:noFill/>
@@ -3218,13 +3218,13 @@
             <a:pPr algn="l">
               <a:defRPr sz="1400" b="0">
                 <a:solidFill>
-                  <a:srgbClr val="8BAACC"/>
-                </a:solidFill>
-                <a:latin typeface="Calibri"/>
-              </a:defRPr>
-            </a:pPr>
-            <a:r>
-              <a:t>ECDA Innovation Seed Fund Proposal</a:t>
+                  <a:srgbClr val="B8A0D0"/>
+                </a:solidFill>
+                <a:latin typeface="Arial"/>
+              </a:defRPr>
+            </a:pPr>
+            <a:r>
+              <a:t>ECDA Early Childhood Innovation Sandbox Proposal</a:t>
             </a:r>
           </a:p>
         </p:txBody>
@@ -3256,7 +3256,7 @@
                 <a:solidFill>
                   <a:srgbClr val="FFFFFF"/>
                 </a:solidFill>
-                <a:latin typeface="Calibri"/>
+                <a:latin typeface="Arial"/>
               </a:defRPr>
             </a:pPr>
             <a:r>
@@ -3290,9 +3290,9 @@
             <a:pPr algn="l">
               <a:defRPr sz="2000" b="0">
                 <a:solidFill>
-                  <a:srgbClr val="AACCDD"/>
-                </a:solidFill>
-                <a:latin typeface="Calibri"/>
+                  <a:srgbClr val="C8B8E0"/>
+                </a:solidFill>
+                <a:latin typeface="Arial"/>
               </a:defRPr>
             </a:pPr>
             <a:r>
@@ -3330,9 +3330,9 @@
             <a:pPr algn="l">
               <a:defRPr sz="1300" b="0">
                 <a:solidFill>
-                  <a:srgbClr val="8BAACC"/>
-                </a:solidFill>
-                <a:latin typeface="Calibri"/>
+                  <a:srgbClr val="B8A0D0"/>
+                </a:solidFill>
+                <a:latin typeface="Arial"/>
               </a:defRPr>
             </a:pPr>
             <a:r>
@@ -3366,13 +3366,13 @@
             <a:pPr algn="l">
               <a:defRPr sz="1200" b="0">
                 <a:solidFill>
-                  <a:srgbClr val="6B8AAA"/>
-                </a:solidFill>
-                <a:latin typeface="Calibri"/>
-              </a:defRPr>
-            </a:pPr>
-            <a:r>
-              <a:t>Duration: 12 Months  |  Budget: SGD $125,000</a:t>
+                  <a:srgbClr val="8B80A8"/>
+                </a:solidFill>
+                <a:latin typeface="Arial"/>
+              </a:defRPr>
+            </a:pPr>
+            <a:r>
+              <a:t>Duration: 6 Months  |  Budget: SGD $20,000</a:t>
             </a:r>
           </a:p>
         </p:txBody>
@@ -3402,9 +3402,9 @@
             <a:pPr algn="r">
               <a:defRPr sz="1200" b="0">
                 <a:solidFill>
-                  <a:srgbClr val="6B8AAA"/>
-                </a:solidFill>
-                <a:latin typeface="Calibri"/>
+                  <a:srgbClr val="8B80A8"/>
+                </a:solidFill>
+                <a:latin typeface="Arial"/>
               </a:defRPr>
             </a:pPr>
             <a:r>
@@ -3454,7 +3454,7 @@
             <a:avLst/>
           </a:prstGeom>
           <a:solidFill>
-            <a:srgbClr val="0E7C6B"/>
+            <a:srgbClr val="01ABAA"/>
           </a:solidFill>
           <a:ln>
             <a:noFill/>
@@ -3507,9 +3507,9 @@
             <a:pPr algn="l">
               <a:defRPr sz="1000" b="1">
                 <a:solidFill>
-                  <a:srgbClr val="0E7C6B"/>
-                </a:solidFill>
-                <a:latin typeface="Calibri"/>
+                  <a:srgbClr val="01ABAA"/>
+                </a:solidFill>
+                <a:latin typeface="Arial"/>
               </a:defRPr>
             </a:pPr>
             <a:r>
@@ -3543,9 +3543,9 @@
             <a:pPr algn="l">
               <a:defRPr sz="2600" b="1">
                 <a:solidFill>
-                  <a:srgbClr val="1A365D"/>
-                </a:solidFill>
-                <a:latin typeface="Calibri"/>
+                  <a:srgbClr val="2D2A5E"/>
+                </a:solidFill>
+                <a:latin typeface="Arial"/>
               </a:defRPr>
             </a:pPr>
             <a:r>
@@ -3569,7 +3569,7 @@
             <a:avLst/>
           </a:prstGeom>
           <a:solidFill>
-            <a:srgbClr val="F7F9FC"/>
+            <a:srgbClr val="FAF6F0"/>
           </a:solidFill>
           <a:ln>
             <a:noFill/>
@@ -3599,20 +3599,20 @@
       </p:sp>
       <p:sp>
         <p:nvSpPr>
-          <p:cNvPr id="6" name="Rectangle 5"/>
+          <p:cNvPr id="6" name="Oval 5"/>
           <p:cNvSpPr/>
           <p:nvPr/>
         </p:nvSpPr>
         <p:spPr>
           <a:xfrm>
-            <a:off x="548640" y="1097280"/>
-            <a:ext cx="2560320" cy="54864"/>
-          </a:xfrm>
-          <a:prstGeom prst="rect">
+            <a:off x="1508760" y="1234440"/>
+            <a:ext cx="640080" cy="640080"/>
+          </a:xfrm>
+          <a:prstGeom prst="ellipse">
             <a:avLst/>
           </a:prstGeom>
           <a:solidFill>
-            <a:srgbClr val="0E7C6B"/>
+            <a:srgbClr val="01ABAA"/>
           </a:solidFill>
           <a:ln>
             <a:noFill/>
@@ -3642,20 +3642,132 @@
       </p:sp>
       <p:sp>
         <p:nvSpPr>
-          <p:cNvPr id="7" name="Oval 6"/>
+          <p:cNvPr id="7" name="TextBox 6"/>
+          <p:cNvSpPr txBox="1"/>
+          <p:nvPr/>
+        </p:nvSpPr>
+        <p:spPr>
+          <a:xfrm>
+            <a:off x="548640" y="1920240"/>
+            <a:ext cx="2560320" cy="274320"/>
+          </a:xfrm>
+          <a:prstGeom prst="rect">
+            <a:avLst/>
+          </a:prstGeom>
+          <a:noFill/>
+        </p:spPr>
+        <p:txBody>
+          <a:bodyPr wrap="square">
+            <a:spAutoFit/>
+          </a:bodyPr>
+          <a:lstStyle/>
+          <a:p>
+            <a:pPr algn="ctr">
+              <a:defRPr sz="1200" b="1">
+                <a:solidFill>
+                  <a:srgbClr val="2D2A5E"/>
+                </a:solidFill>
+                <a:latin typeface="Arial"/>
+              </a:defRPr>
+            </a:pPr>
+            <a:r>
+              <a:t>Project Lead</a:t>
+            </a:r>
+          </a:p>
+        </p:txBody>
+      </p:sp>
+      <p:sp>
+        <p:nvSpPr>
+          <p:cNvPr id="8" name="TextBox 7"/>
+          <p:cNvSpPr txBox="1"/>
+          <p:nvPr/>
+        </p:nvSpPr>
+        <p:spPr>
+          <a:xfrm>
+            <a:off x="548640" y="2148840"/>
+            <a:ext cx="2560320" cy="182880"/>
+          </a:xfrm>
+          <a:prstGeom prst="rect">
+            <a:avLst/>
+          </a:prstGeom>
+          <a:noFill/>
+        </p:spPr>
+        <p:txBody>
+          <a:bodyPr wrap="square">
+            <a:spAutoFit/>
+          </a:bodyPr>
+          <a:lstStyle/>
+          <a:p>
+            <a:pPr algn="ctr">
+              <a:defRPr sz="900" b="0">
+                <a:solidFill>
+                  <a:srgbClr val="01ABAA"/>
+                </a:solidFill>
+                <a:latin typeface="Arial"/>
+              </a:defRPr>
+            </a:pPr>
+            <a:r>
+              <a:t>0.3 FTE</a:t>
+            </a:r>
+          </a:p>
+        </p:txBody>
+      </p:sp>
+      <p:sp>
+        <p:nvSpPr>
+          <p:cNvPr id="9" name="TextBox 8"/>
+          <p:cNvSpPr txBox="1"/>
+          <p:nvPr/>
+        </p:nvSpPr>
+        <p:spPr>
+          <a:xfrm>
+            <a:off x="685800" y="2331720"/>
+            <a:ext cx="2286000" cy="365760"/>
+          </a:xfrm>
+          <a:prstGeom prst="rect">
+            <a:avLst/>
+          </a:prstGeom>
+          <a:noFill/>
+        </p:spPr>
+        <p:txBody>
+          <a:bodyPr wrap="square">
+            <a:spAutoFit/>
+          </a:bodyPr>
+          <a:lstStyle/>
+          <a:p>
+            <a:pPr algn="ctr">
+              <a:defRPr sz="800" b="0">
+                <a:solidFill>
+                  <a:srgbClr val="6B7280"/>
+                </a:solidFill>
+                <a:latin typeface="Arial"/>
+              </a:defRPr>
+            </a:pPr>
+            <a:r>
+              <a:t>Timeline, budget, stakeholder liaison,</a:t>
+            </a:r>
+            <a:br/>
+            <a:r>
+              <a:t>ECDA comms, evaluation &amp; reporting</a:t>
+            </a:r>
+          </a:p>
+        </p:txBody>
+      </p:sp>
+      <p:sp>
+        <p:nvSpPr>
+          <p:cNvPr id="10" name="Rectangle 9"/>
           <p:cNvSpPr/>
           <p:nvPr/>
         </p:nvSpPr>
         <p:spPr>
           <a:xfrm>
-            <a:off x="1508760" y="1234440"/>
-            <a:ext cx="640080" cy="640080"/>
-          </a:xfrm>
-          <a:prstGeom prst="ellipse">
+            <a:off x="3383280" y="1097280"/>
+            <a:ext cx="2560320" cy="1645920"/>
+          </a:xfrm>
+          <a:prstGeom prst="rect">
             <a:avLst/>
           </a:prstGeom>
           <a:solidFill>
-            <a:srgbClr val="0E7C6B"/>
+            <a:srgbClr val="FAF6F0"/>
           </a:solidFill>
           <a:ln>
             <a:noFill/>
@@ -3685,171 +3797,16 @@
       </p:sp>
       <p:sp>
         <p:nvSpPr>
-          <p:cNvPr id="8" name="TextBox 7"/>
-          <p:cNvSpPr txBox="1"/>
-          <p:nvPr/>
-        </p:nvSpPr>
-        <p:spPr>
-          <a:xfrm>
-            <a:off x="548640" y="1920240"/>
-            <a:ext cx="2560320" cy="274320"/>
-          </a:xfrm>
-          <a:prstGeom prst="rect">
-            <a:avLst/>
-          </a:prstGeom>
-          <a:noFill/>
-        </p:spPr>
-        <p:txBody>
-          <a:bodyPr wrap="square">
-            <a:spAutoFit/>
-          </a:bodyPr>
-          <a:lstStyle/>
-          <a:p>
-            <a:pPr algn="ctr">
-              <a:defRPr sz="1200" b="1">
-                <a:solidFill>
-                  <a:srgbClr val="1A365D"/>
-                </a:solidFill>
-                <a:latin typeface="Calibri"/>
-              </a:defRPr>
-            </a:pPr>
-            <a:r>
-              <a:t>Project Lead</a:t>
-            </a:r>
-          </a:p>
-        </p:txBody>
-      </p:sp>
-      <p:sp>
-        <p:nvSpPr>
-          <p:cNvPr id="9" name="TextBox 8"/>
-          <p:cNvSpPr txBox="1"/>
-          <p:nvPr/>
-        </p:nvSpPr>
-        <p:spPr>
-          <a:xfrm>
-            <a:off x="548640" y="2148840"/>
-            <a:ext cx="2560320" cy="182880"/>
-          </a:xfrm>
-          <a:prstGeom prst="rect">
-            <a:avLst/>
-          </a:prstGeom>
-          <a:noFill/>
-        </p:spPr>
-        <p:txBody>
-          <a:bodyPr wrap="square">
-            <a:spAutoFit/>
-          </a:bodyPr>
-          <a:lstStyle/>
-          <a:p>
-            <a:pPr algn="ctr">
-              <a:defRPr sz="900" b="0">
-                <a:solidFill>
-                  <a:srgbClr val="0E7C6B"/>
-                </a:solidFill>
-                <a:latin typeface="Calibri"/>
-              </a:defRPr>
-            </a:pPr>
-            <a:r>
-              <a:t>1.0 FTE</a:t>
-            </a:r>
-          </a:p>
-        </p:txBody>
-      </p:sp>
-      <p:sp>
-        <p:nvSpPr>
-          <p:cNvPr id="10" name="TextBox 9"/>
-          <p:cNvSpPr txBox="1"/>
-          <p:nvPr/>
-        </p:nvSpPr>
-        <p:spPr>
-          <a:xfrm>
-            <a:off x="685800" y="2331720"/>
-            <a:ext cx="2286000" cy="365760"/>
-          </a:xfrm>
-          <a:prstGeom prst="rect">
-            <a:avLst/>
-          </a:prstGeom>
-          <a:noFill/>
-        </p:spPr>
-        <p:txBody>
-          <a:bodyPr wrap="square">
-            <a:spAutoFit/>
-          </a:bodyPr>
-          <a:lstStyle/>
-          <a:p>
-            <a:pPr algn="ctr">
-              <a:defRPr sz="800" b="0">
-                <a:solidFill>
-                  <a:srgbClr val="64748B"/>
-                </a:solidFill>
-                <a:latin typeface="Calibri"/>
-              </a:defRPr>
-            </a:pPr>
-            <a:r>
-              <a:t>Oversees timeline, budget, stakeholder</a:t>
-            </a:r>
-            <a:br/>
-            <a:r>
-              <a:t>relationships, ECDA liaison</a:t>
-            </a:r>
-          </a:p>
-        </p:txBody>
-      </p:sp>
-      <p:sp>
-        <p:nvSpPr>
-          <p:cNvPr id="11" name="Rectangle 10"/>
+          <p:cNvPr id="11" name="Oval 10"/>
           <p:cNvSpPr/>
           <p:nvPr/>
         </p:nvSpPr>
         <p:spPr>
           <a:xfrm>
-            <a:off x="3383280" y="1097280"/>
-            <a:ext cx="2560320" cy="1645920"/>
-          </a:xfrm>
-          <a:prstGeom prst="rect">
-            <a:avLst/>
-          </a:prstGeom>
-          <a:solidFill>
-            <a:srgbClr val="F7F9FC"/>
-          </a:solidFill>
-          <a:ln>
-            <a:noFill/>
-          </a:ln>
-        </p:spPr>
-        <p:style>
-          <a:lnRef idx="1">
-            <a:schemeClr val="accent1"/>
-          </a:lnRef>
-          <a:fillRef idx="3">
-            <a:schemeClr val="accent1"/>
-          </a:fillRef>
-          <a:effectRef idx="2">
-            <a:schemeClr val="accent1"/>
-          </a:effectRef>
-          <a:fontRef idx="minor">
-            <a:schemeClr val="lt1"/>
-          </a:fontRef>
-        </p:style>
-        <p:txBody>
-          <a:bodyPr rtlCol="0" anchor="ctr"/>
-          <a:lstStyle/>
-          <a:p>
-            <a:pPr algn="ctr"/>
-          </a:p>
-        </p:txBody>
-      </p:sp>
-      <p:sp>
-        <p:nvSpPr>
-          <p:cNvPr id="12" name="Rectangle 11"/>
-          <p:cNvSpPr/>
-          <p:nvPr/>
-        </p:nvSpPr>
-        <p:spPr>
-          <a:xfrm>
-            <a:off x="3383280" y="1097280"/>
-            <a:ext cx="2560320" cy="54864"/>
-          </a:xfrm>
-          <a:prstGeom prst="rect">
+            <a:off x="4343400" y="1234440"/>
+            <a:ext cx="640080" cy="640080"/>
+          </a:xfrm>
+          <a:prstGeom prst="ellipse">
             <a:avLst/>
           </a:prstGeom>
           <a:solidFill>
@@ -3883,20 +3840,132 @@
       </p:sp>
       <p:sp>
         <p:nvSpPr>
-          <p:cNvPr id="13" name="Oval 12"/>
+          <p:cNvPr id="12" name="TextBox 11"/>
+          <p:cNvSpPr txBox="1"/>
+          <p:nvPr/>
+        </p:nvSpPr>
+        <p:spPr>
+          <a:xfrm>
+            <a:off x="3383280" y="1920240"/>
+            <a:ext cx="2560320" cy="274320"/>
+          </a:xfrm>
+          <a:prstGeom prst="rect">
+            <a:avLst/>
+          </a:prstGeom>
+          <a:noFill/>
+        </p:spPr>
+        <p:txBody>
+          <a:bodyPr wrap="square">
+            <a:spAutoFit/>
+          </a:bodyPr>
+          <a:lstStyle/>
+          <a:p>
+            <a:pPr algn="ctr">
+              <a:defRPr sz="1200" b="1">
+                <a:solidFill>
+                  <a:srgbClr val="2D2A5E"/>
+                </a:solidFill>
+                <a:latin typeface="Arial"/>
+              </a:defRPr>
+            </a:pPr>
+            <a:r>
+              <a:t>Technical Lead</a:t>
+            </a:r>
+          </a:p>
+        </p:txBody>
+      </p:sp>
+      <p:sp>
+        <p:nvSpPr>
+          <p:cNvPr id="13" name="TextBox 12"/>
+          <p:cNvSpPr txBox="1"/>
+          <p:nvPr/>
+        </p:nvSpPr>
+        <p:spPr>
+          <a:xfrm>
+            <a:off x="3383280" y="2148840"/>
+            <a:ext cx="2560320" cy="182880"/>
+          </a:xfrm>
+          <a:prstGeom prst="rect">
+            <a:avLst/>
+          </a:prstGeom>
+          <a:noFill/>
+        </p:spPr>
+        <p:txBody>
+          <a:bodyPr wrap="square">
+            <a:spAutoFit/>
+          </a:bodyPr>
+          <a:lstStyle/>
+          <a:p>
+            <a:pPr algn="ctr">
+              <a:defRPr sz="900" b="0">
+                <a:solidFill>
+                  <a:srgbClr val="3B82F6"/>
+                </a:solidFill>
+                <a:latin typeface="Arial"/>
+              </a:defRPr>
+            </a:pPr>
+            <a:r>
+              <a:t>1.0 FTE</a:t>
+            </a:r>
+          </a:p>
+        </p:txBody>
+      </p:sp>
+      <p:sp>
+        <p:nvSpPr>
+          <p:cNvPr id="14" name="TextBox 13"/>
+          <p:cNvSpPr txBox="1"/>
+          <p:nvPr/>
+        </p:nvSpPr>
+        <p:spPr>
+          <a:xfrm>
+            <a:off x="3520440" y="2331720"/>
+            <a:ext cx="2286000" cy="365760"/>
+          </a:xfrm>
+          <a:prstGeom prst="rect">
+            <a:avLst/>
+          </a:prstGeom>
+          <a:noFill/>
+        </p:spPr>
+        <p:txBody>
+          <a:bodyPr wrap="square">
+            <a:spAutoFit/>
+          </a:bodyPr>
+          <a:lstStyle/>
+          <a:p>
+            <a:pPr algn="ctr">
+              <a:defRPr sz="800" b="0">
+                <a:solidFill>
+                  <a:srgbClr val="6B7280"/>
+                </a:solidFill>
+                <a:latin typeface="Arial"/>
+              </a:defRPr>
+            </a:pPr>
+            <a:r>
+              <a:t>Full-stack development, AI integration</a:t>
+            </a:r>
+            <a:br/>
+            <a:r>
+              <a:t>via Azure AI Foundry, deployment</a:t>
+            </a:r>
+          </a:p>
+        </p:txBody>
+      </p:sp>
+      <p:sp>
+        <p:nvSpPr>
+          <p:cNvPr id="15" name="Rectangle 14"/>
           <p:cNvSpPr/>
           <p:nvPr/>
         </p:nvSpPr>
         <p:spPr>
           <a:xfrm>
-            <a:off x="4343400" y="1234440"/>
-            <a:ext cx="640080" cy="640080"/>
-          </a:xfrm>
-          <a:prstGeom prst="ellipse">
+            <a:off x="6217920" y="1097280"/>
+            <a:ext cx="2560320" cy="1645920"/>
+          </a:xfrm>
+          <a:prstGeom prst="rect">
             <a:avLst/>
           </a:prstGeom>
           <a:solidFill>
-            <a:srgbClr val="3B82F6"/>
+            <a:srgbClr val="FAF6F0"/>
           </a:solidFill>
           <a:ln>
             <a:noFill/>
@@ -3926,132 +3995,20 @@
       </p:sp>
       <p:sp>
         <p:nvSpPr>
-          <p:cNvPr id="14" name="TextBox 13"/>
-          <p:cNvSpPr txBox="1"/>
-          <p:nvPr/>
-        </p:nvSpPr>
-        <p:spPr>
-          <a:xfrm>
-            <a:off x="3383280" y="1920240"/>
-            <a:ext cx="2560320" cy="274320"/>
-          </a:xfrm>
-          <a:prstGeom prst="rect">
-            <a:avLst/>
-          </a:prstGeom>
-          <a:noFill/>
-        </p:spPr>
-        <p:txBody>
-          <a:bodyPr wrap="square">
-            <a:spAutoFit/>
-          </a:bodyPr>
-          <a:lstStyle/>
-          <a:p>
-            <a:pPr algn="ctr">
-              <a:defRPr sz="1200" b="1">
-                <a:solidFill>
-                  <a:srgbClr val="1A365D"/>
-                </a:solidFill>
-                <a:latin typeface="Calibri"/>
-              </a:defRPr>
-            </a:pPr>
-            <a:r>
-              <a:t>Technical Architect</a:t>
-            </a:r>
-          </a:p>
-        </p:txBody>
-      </p:sp>
-      <p:sp>
-        <p:nvSpPr>
-          <p:cNvPr id="15" name="TextBox 14"/>
-          <p:cNvSpPr txBox="1"/>
-          <p:nvPr/>
-        </p:nvSpPr>
-        <p:spPr>
-          <a:xfrm>
-            <a:off x="3383280" y="2148840"/>
-            <a:ext cx="2560320" cy="182880"/>
-          </a:xfrm>
-          <a:prstGeom prst="rect">
-            <a:avLst/>
-          </a:prstGeom>
-          <a:noFill/>
-        </p:spPr>
-        <p:txBody>
-          <a:bodyPr wrap="square">
-            <a:spAutoFit/>
-          </a:bodyPr>
-          <a:lstStyle/>
-          <a:p>
-            <a:pPr algn="ctr">
-              <a:defRPr sz="900" b="0">
-                <a:solidFill>
-                  <a:srgbClr val="3B82F6"/>
-                </a:solidFill>
-                <a:latin typeface="Calibri"/>
-              </a:defRPr>
-            </a:pPr>
-            <a:r>
-              <a:t>1.0 FTE</a:t>
-            </a:r>
-          </a:p>
-        </p:txBody>
-      </p:sp>
-      <p:sp>
-        <p:nvSpPr>
-          <p:cNvPr id="16" name="TextBox 15"/>
-          <p:cNvSpPr txBox="1"/>
-          <p:nvPr/>
-        </p:nvSpPr>
-        <p:spPr>
-          <a:xfrm>
-            <a:off x="3520440" y="2331720"/>
-            <a:ext cx="2286000" cy="365760"/>
-          </a:xfrm>
-          <a:prstGeom prst="rect">
-            <a:avLst/>
-          </a:prstGeom>
-          <a:noFill/>
-        </p:spPr>
-        <p:txBody>
-          <a:bodyPr wrap="square">
-            <a:spAutoFit/>
-          </a:bodyPr>
-          <a:lstStyle/>
-          <a:p>
-            <a:pPr algn="ctr">
-              <a:defRPr sz="800" b="0">
-                <a:solidFill>
-                  <a:srgbClr val="64748B"/>
-                </a:solidFill>
-                <a:latin typeface="Calibri"/>
-              </a:defRPr>
-            </a:pPr>
-            <a:r>
-              <a:t>Full-stack development, AI integration,</a:t>
-            </a:r>
-            <a:br/>
-            <a:r>
-              <a:t>system security, infrastructure</a:t>
-            </a:r>
-          </a:p>
-        </p:txBody>
-      </p:sp>
-      <p:sp>
-        <p:nvSpPr>
-          <p:cNvPr id="17" name="Rectangle 16"/>
+          <p:cNvPr id="16" name="Oval 15"/>
           <p:cNvSpPr/>
           <p:nvPr/>
         </p:nvSpPr>
         <p:spPr>
           <a:xfrm>
-            <a:off x="6217920" y="1097280"/>
-            <a:ext cx="2560320" cy="1645920"/>
-          </a:xfrm>
-          <a:prstGeom prst="rect">
+            <a:off x="7178040" y="1234440"/>
+            <a:ext cx="640080" cy="640080"/>
+          </a:xfrm>
+          <a:prstGeom prst="ellipse">
             <a:avLst/>
           </a:prstGeom>
           <a:solidFill>
-            <a:srgbClr val="F7F9FC"/>
+            <a:srgbClr val="FECD1B"/>
           </a:solidFill>
           <a:ln>
             <a:noFill/>
@@ -4081,93 +4038,7 @@
       </p:sp>
       <p:sp>
         <p:nvSpPr>
-          <p:cNvPr id="18" name="Rectangle 17"/>
-          <p:cNvSpPr/>
-          <p:nvPr/>
-        </p:nvSpPr>
-        <p:spPr>
-          <a:xfrm>
-            <a:off x="6217920" y="1097280"/>
-            <a:ext cx="2560320" cy="54864"/>
-          </a:xfrm>
-          <a:prstGeom prst="rect">
-            <a:avLst/>
-          </a:prstGeom>
-          <a:solidFill>
-            <a:srgbClr val="F0A500"/>
-          </a:solidFill>
-          <a:ln>
-            <a:noFill/>
-          </a:ln>
-        </p:spPr>
-        <p:style>
-          <a:lnRef idx="1">
-            <a:schemeClr val="accent1"/>
-          </a:lnRef>
-          <a:fillRef idx="3">
-            <a:schemeClr val="accent1"/>
-          </a:fillRef>
-          <a:effectRef idx="2">
-            <a:schemeClr val="accent1"/>
-          </a:effectRef>
-          <a:fontRef idx="minor">
-            <a:schemeClr val="lt1"/>
-          </a:fontRef>
-        </p:style>
-        <p:txBody>
-          <a:bodyPr rtlCol="0" anchor="ctr"/>
-          <a:lstStyle/>
-          <a:p>
-            <a:pPr algn="ctr"/>
-          </a:p>
-        </p:txBody>
-      </p:sp>
-      <p:sp>
-        <p:nvSpPr>
-          <p:cNvPr id="19" name="Oval 18"/>
-          <p:cNvSpPr/>
-          <p:nvPr/>
-        </p:nvSpPr>
-        <p:spPr>
-          <a:xfrm>
-            <a:off x="7178040" y="1234440"/>
-            <a:ext cx="640080" cy="640080"/>
-          </a:xfrm>
-          <a:prstGeom prst="ellipse">
-            <a:avLst/>
-          </a:prstGeom>
-          <a:solidFill>
-            <a:srgbClr val="F0A500"/>
-          </a:solidFill>
-          <a:ln>
-            <a:noFill/>
-          </a:ln>
-        </p:spPr>
-        <p:style>
-          <a:lnRef idx="1">
-            <a:schemeClr val="accent1"/>
-          </a:lnRef>
-          <a:fillRef idx="3">
-            <a:schemeClr val="accent1"/>
-          </a:fillRef>
-          <a:effectRef idx="2">
-            <a:schemeClr val="accent1"/>
-          </a:effectRef>
-          <a:fontRef idx="minor">
-            <a:schemeClr val="lt1"/>
-          </a:fontRef>
-        </p:style>
-        <p:txBody>
-          <a:bodyPr rtlCol="0" anchor="ctr"/>
-          <a:lstStyle/>
-          <a:p>
-            <a:pPr algn="ctr"/>
-          </a:p>
-        </p:txBody>
-      </p:sp>
-      <p:sp>
-        <p:nvSpPr>
-          <p:cNvPr id="20" name="TextBox 19"/>
+          <p:cNvPr id="17" name="TextBox 16"/>
           <p:cNvSpPr txBox="1"/>
           <p:nvPr/>
         </p:nvSpPr>
@@ -4190,20 +4061,20 @@
             <a:pPr algn="ctr">
               <a:defRPr sz="1200" b="1">
                 <a:solidFill>
-                  <a:srgbClr val="1A365D"/>
-                </a:solidFill>
-                <a:latin typeface="Calibri"/>
-              </a:defRPr>
-            </a:pPr>
-            <a:r>
-              <a:t>AI Engineer</a:t>
-            </a:r>
-          </a:p>
-        </p:txBody>
-      </p:sp>
-      <p:sp>
-        <p:nvSpPr>
-          <p:cNvPr id="21" name="TextBox 20"/>
+                  <a:srgbClr val="2D2A5E"/>
+                </a:solidFill>
+                <a:latin typeface="Arial"/>
+              </a:defRPr>
+            </a:pPr>
+            <a:r>
+              <a:t>Pedagogical Specialist</a:t>
+            </a:r>
+          </a:p>
+        </p:txBody>
+      </p:sp>
+      <p:sp>
+        <p:nvSpPr>
+          <p:cNvPr id="18" name="TextBox 17"/>
           <p:cNvSpPr txBox="1"/>
           <p:nvPr/>
         </p:nvSpPr>
@@ -4226,20 +4097,20 @@
             <a:pPr algn="ctr">
               <a:defRPr sz="900" b="0">
                 <a:solidFill>
-                  <a:srgbClr val="F0A500"/>
-                </a:solidFill>
-                <a:latin typeface="Calibri"/>
-              </a:defRPr>
-            </a:pPr>
-            <a:r>
-              <a:t>1.0 FTE</a:t>
-            </a:r>
-          </a:p>
-        </p:txBody>
-      </p:sp>
-      <p:sp>
-        <p:nvSpPr>
-          <p:cNvPr id="22" name="TextBox 21"/>
+                  <a:srgbClr val="FECD1B"/>
+                </a:solidFill>
+                <a:latin typeface="Arial"/>
+              </a:defRPr>
+            </a:pPr>
+            <a:r>
+              <a:t>0.2 FTE</a:t>
+            </a:r>
+          </a:p>
+        </p:txBody>
+      </p:sp>
+      <p:sp>
+        <p:nvSpPr>
+          <p:cNvPr id="19" name="TextBox 18"/>
           <p:cNvSpPr txBox="1"/>
           <p:nvPr/>
         </p:nvSpPr>
@@ -4262,740 +4133,17 @@
             <a:pPr algn="ctr">
               <a:defRPr sz="800" b="0">
                 <a:solidFill>
-                  <a:srgbClr val="64748B"/>
-                </a:solidFill>
-                <a:latin typeface="Calibri"/>
-              </a:defRPr>
-            </a:pPr>
-            <a:r>
-              <a:t>Prompt engineering, QTT alignment,</a:t>
+                  <a:srgbClr val="6B7280"/>
+                </a:solidFill>
+                <a:latin typeface="Arial"/>
+              </a:defRPr>
+            </a:pPr>
+            <a:r>
+              <a:t>EYDF, NEL, QTT, SFw validation,</a:t>
             </a:r>
             <a:br/>
             <a:r>
-              <a:t>coaching engine, SFw mapping</a:t>
-            </a:r>
-          </a:p>
-        </p:txBody>
-      </p:sp>
-      <p:sp>
-        <p:nvSpPr>
-          <p:cNvPr id="23" name="Rectangle 22"/>
-          <p:cNvSpPr/>
-          <p:nvPr/>
-        </p:nvSpPr>
-        <p:spPr>
-          <a:xfrm>
-            <a:off x="548640" y="2926080"/>
-            <a:ext cx="2560320" cy="1645920"/>
-          </a:xfrm>
-          <a:prstGeom prst="rect">
-            <a:avLst/>
-          </a:prstGeom>
-          <a:solidFill>
-            <a:srgbClr val="F7F9FC"/>
-          </a:solidFill>
-          <a:ln>
-            <a:noFill/>
-          </a:ln>
-        </p:spPr>
-        <p:style>
-          <a:lnRef idx="1">
-            <a:schemeClr val="accent1"/>
-          </a:lnRef>
-          <a:fillRef idx="3">
-            <a:schemeClr val="accent1"/>
-          </a:fillRef>
-          <a:effectRef idx="2">
-            <a:schemeClr val="accent1"/>
-          </a:effectRef>
-          <a:fontRef idx="minor">
-            <a:schemeClr val="lt1"/>
-          </a:fontRef>
-        </p:style>
-        <p:txBody>
-          <a:bodyPr rtlCol="0" anchor="ctr"/>
-          <a:lstStyle/>
-          <a:p>
-            <a:pPr algn="ctr"/>
-          </a:p>
-        </p:txBody>
-      </p:sp>
-      <p:sp>
-        <p:nvSpPr>
-          <p:cNvPr id="24" name="Rectangle 23"/>
-          <p:cNvSpPr/>
-          <p:nvPr/>
-        </p:nvSpPr>
-        <p:spPr>
-          <a:xfrm>
-            <a:off x="548640" y="2926080"/>
-            <a:ext cx="2560320" cy="54864"/>
-          </a:xfrm>
-          <a:prstGeom prst="rect">
-            <a:avLst/>
-          </a:prstGeom>
-          <a:solidFill>
-            <a:srgbClr val="8B5CF6"/>
-          </a:solidFill>
-          <a:ln>
-            <a:noFill/>
-          </a:ln>
-        </p:spPr>
-        <p:style>
-          <a:lnRef idx="1">
-            <a:schemeClr val="accent1"/>
-          </a:lnRef>
-          <a:fillRef idx="3">
-            <a:schemeClr val="accent1"/>
-          </a:fillRef>
-          <a:effectRef idx="2">
-            <a:schemeClr val="accent1"/>
-          </a:effectRef>
-          <a:fontRef idx="minor">
-            <a:schemeClr val="lt1"/>
-          </a:fontRef>
-        </p:style>
-        <p:txBody>
-          <a:bodyPr rtlCol="0" anchor="ctr"/>
-          <a:lstStyle/>
-          <a:p>
-            <a:pPr algn="ctr"/>
-          </a:p>
-        </p:txBody>
-      </p:sp>
-      <p:sp>
-        <p:nvSpPr>
-          <p:cNvPr id="25" name="Oval 24"/>
-          <p:cNvSpPr/>
-          <p:nvPr/>
-        </p:nvSpPr>
-        <p:spPr>
-          <a:xfrm>
-            <a:off x="1508760" y="3063240"/>
-            <a:ext cx="640080" cy="640080"/>
-          </a:xfrm>
-          <a:prstGeom prst="ellipse">
-            <a:avLst/>
-          </a:prstGeom>
-          <a:solidFill>
-            <a:srgbClr val="8B5CF6"/>
-          </a:solidFill>
-          <a:ln>
-            <a:noFill/>
-          </a:ln>
-        </p:spPr>
-        <p:style>
-          <a:lnRef idx="1">
-            <a:schemeClr val="accent1"/>
-          </a:lnRef>
-          <a:fillRef idx="3">
-            <a:schemeClr val="accent1"/>
-          </a:fillRef>
-          <a:effectRef idx="2">
-            <a:schemeClr val="accent1"/>
-          </a:effectRef>
-          <a:fontRef idx="minor">
-            <a:schemeClr val="lt1"/>
-          </a:fontRef>
-        </p:style>
-        <p:txBody>
-          <a:bodyPr rtlCol="0" anchor="ctr"/>
-          <a:lstStyle/>
-          <a:p>
-            <a:pPr algn="ctr"/>
-          </a:p>
-        </p:txBody>
-      </p:sp>
-      <p:sp>
-        <p:nvSpPr>
-          <p:cNvPr id="26" name="TextBox 25"/>
-          <p:cNvSpPr txBox="1"/>
-          <p:nvPr/>
-        </p:nvSpPr>
-        <p:spPr>
-          <a:xfrm>
-            <a:off x="548640" y="3749040"/>
-            <a:ext cx="2560320" cy="274320"/>
-          </a:xfrm>
-          <a:prstGeom prst="rect">
-            <a:avLst/>
-          </a:prstGeom>
-          <a:noFill/>
-        </p:spPr>
-        <p:txBody>
-          <a:bodyPr wrap="square">
-            <a:spAutoFit/>
-          </a:bodyPr>
-          <a:lstStyle/>
-          <a:p>
-            <a:pPr algn="ctr">
-              <a:defRPr sz="1200" b="1">
-                <a:solidFill>
-                  <a:srgbClr val="1A365D"/>
-                </a:solidFill>
-                <a:latin typeface="Calibri"/>
-              </a:defRPr>
-            </a:pPr>
-            <a:r>
-              <a:t>Pedagogical Lead</a:t>
-            </a:r>
-          </a:p>
-        </p:txBody>
-      </p:sp>
-      <p:sp>
-        <p:nvSpPr>
-          <p:cNvPr id="27" name="TextBox 26"/>
-          <p:cNvSpPr txBox="1"/>
-          <p:nvPr/>
-        </p:nvSpPr>
-        <p:spPr>
-          <a:xfrm>
-            <a:off x="548640" y="3977640"/>
-            <a:ext cx="2560320" cy="182880"/>
-          </a:xfrm>
-          <a:prstGeom prst="rect">
-            <a:avLst/>
-          </a:prstGeom>
-          <a:noFill/>
-        </p:spPr>
-        <p:txBody>
-          <a:bodyPr wrap="square">
-            <a:spAutoFit/>
-          </a:bodyPr>
-          <a:lstStyle/>
-          <a:p>
-            <a:pPr algn="ctr">
-              <a:defRPr sz="900" b="0">
-                <a:solidFill>
-                  <a:srgbClr val="8B5CF6"/>
-                </a:solidFill>
-                <a:latin typeface="Calibri"/>
-              </a:defRPr>
-            </a:pPr>
-            <a:r>
-              <a:t>0.5 FTE</a:t>
-            </a:r>
-          </a:p>
-        </p:txBody>
-      </p:sp>
-      <p:sp>
-        <p:nvSpPr>
-          <p:cNvPr id="28" name="TextBox 27"/>
-          <p:cNvSpPr txBox="1"/>
-          <p:nvPr/>
-        </p:nvSpPr>
-        <p:spPr>
-          <a:xfrm>
-            <a:off x="685800" y="4160520"/>
-            <a:ext cx="2286000" cy="365760"/>
-          </a:xfrm>
-          <a:prstGeom prst="rect">
-            <a:avLst/>
-          </a:prstGeom>
-          <a:noFill/>
-        </p:spPr>
-        <p:txBody>
-          <a:bodyPr wrap="square">
-            <a:spAutoFit/>
-          </a:bodyPr>
-          <a:lstStyle/>
-          <a:p>
-            <a:pPr algn="ctr">
-              <a:defRPr sz="800" b="0">
-                <a:solidFill>
-                  <a:srgbClr val="64748B"/>
-                </a:solidFill>
-                <a:latin typeface="Calibri"/>
-              </a:defRPr>
-            </a:pPr>
-            <a:r>
-              <a:t>EYDF, NEL, QTT, SFw validation,</a:t>
-            </a:r>
-            <a:br/>
-            <a:r>
-              <a:t>curriculum alignment review</a:t>
-            </a:r>
-          </a:p>
-        </p:txBody>
-      </p:sp>
-      <p:sp>
-        <p:nvSpPr>
-          <p:cNvPr id="29" name="Rectangle 28"/>
-          <p:cNvSpPr/>
-          <p:nvPr/>
-        </p:nvSpPr>
-        <p:spPr>
-          <a:xfrm>
-            <a:off x="3383280" y="2926080"/>
-            <a:ext cx="2560320" cy="1645920"/>
-          </a:xfrm>
-          <a:prstGeom prst="rect">
-            <a:avLst/>
-          </a:prstGeom>
-          <a:solidFill>
-            <a:srgbClr val="F7F9FC"/>
-          </a:solidFill>
-          <a:ln>
-            <a:noFill/>
-          </a:ln>
-        </p:spPr>
-        <p:style>
-          <a:lnRef idx="1">
-            <a:schemeClr val="accent1"/>
-          </a:lnRef>
-          <a:fillRef idx="3">
-            <a:schemeClr val="accent1"/>
-          </a:fillRef>
-          <a:effectRef idx="2">
-            <a:schemeClr val="accent1"/>
-          </a:effectRef>
-          <a:fontRef idx="minor">
-            <a:schemeClr val="lt1"/>
-          </a:fontRef>
-        </p:style>
-        <p:txBody>
-          <a:bodyPr rtlCol="0" anchor="ctr"/>
-          <a:lstStyle/>
-          <a:p>
-            <a:pPr algn="ctr"/>
-          </a:p>
-        </p:txBody>
-      </p:sp>
-      <p:sp>
-        <p:nvSpPr>
-          <p:cNvPr id="30" name="Rectangle 29"/>
-          <p:cNvSpPr/>
-          <p:nvPr/>
-        </p:nvSpPr>
-        <p:spPr>
-          <a:xfrm>
-            <a:off x="3383280" y="2926080"/>
-            <a:ext cx="2560320" cy="54864"/>
-          </a:xfrm>
-          <a:prstGeom prst="rect">
-            <a:avLst/>
-          </a:prstGeom>
-          <a:solidFill>
-            <a:srgbClr val="10B981"/>
-          </a:solidFill>
-          <a:ln>
-            <a:noFill/>
-          </a:ln>
-        </p:spPr>
-        <p:style>
-          <a:lnRef idx="1">
-            <a:schemeClr val="accent1"/>
-          </a:lnRef>
-          <a:fillRef idx="3">
-            <a:schemeClr val="accent1"/>
-          </a:fillRef>
-          <a:effectRef idx="2">
-            <a:schemeClr val="accent1"/>
-          </a:effectRef>
-          <a:fontRef idx="minor">
-            <a:schemeClr val="lt1"/>
-          </a:fontRef>
-        </p:style>
-        <p:txBody>
-          <a:bodyPr rtlCol="0" anchor="ctr"/>
-          <a:lstStyle/>
-          <a:p>
-            <a:pPr algn="ctr"/>
-          </a:p>
-        </p:txBody>
-      </p:sp>
-      <p:sp>
-        <p:nvSpPr>
-          <p:cNvPr id="31" name="Oval 30"/>
-          <p:cNvSpPr/>
-          <p:nvPr/>
-        </p:nvSpPr>
-        <p:spPr>
-          <a:xfrm>
-            <a:off x="4343400" y="3063240"/>
-            <a:ext cx="640080" cy="640080"/>
-          </a:xfrm>
-          <a:prstGeom prst="ellipse">
-            <a:avLst/>
-          </a:prstGeom>
-          <a:solidFill>
-            <a:srgbClr val="10B981"/>
-          </a:solidFill>
-          <a:ln>
-            <a:noFill/>
-          </a:ln>
-        </p:spPr>
-        <p:style>
-          <a:lnRef idx="1">
-            <a:schemeClr val="accent1"/>
-          </a:lnRef>
-          <a:fillRef idx="3">
-            <a:schemeClr val="accent1"/>
-          </a:fillRef>
-          <a:effectRef idx="2">
-            <a:schemeClr val="accent1"/>
-          </a:effectRef>
-          <a:fontRef idx="minor">
-            <a:schemeClr val="lt1"/>
-          </a:fontRef>
-        </p:style>
-        <p:txBody>
-          <a:bodyPr rtlCol="0" anchor="ctr"/>
-          <a:lstStyle/>
-          <a:p>
-            <a:pPr algn="ctr"/>
-          </a:p>
-        </p:txBody>
-      </p:sp>
-      <p:sp>
-        <p:nvSpPr>
-          <p:cNvPr id="32" name="TextBox 31"/>
-          <p:cNvSpPr txBox="1"/>
-          <p:nvPr/>
-        </p:nvSpPr>
-        <p:spPr>
-          <a:xfrm>
-            <a:off x="3383280" y="3749040"/>
-            <a:ext cx="2560320" cy="274320"/>
-          </a:xfrm>
-          <a:prstGeom prst="rect">
-            <a:avLst/>
-          </a:prstGeom>
-          <a:noFill/>
-        </p:spPr>
-        <p:txBody>
-          <a:bodyPr wrap="square">
-            <a:spAutoFit/>
-          </a:bodyPr>
-          <a:lstStyle/>
-          <a:p>
-            <a:pPr algn="ctr">
-              <a:defRPr sz="1200" b="1">
-                <a:solidFill>
-                  <a:srgbClr val="1A365D"/>
-                </a:solidFill>
-                <a:latin typeface="Calibri"/>
-              </a:defRPr>
-            </a:pPr>
-            <a:r>
-              <a:t>UI/UX Designer</a:t>
-            </a:r>
-          </a:p>
-        </p:txBody>
-      </p:sp>
-      <p:sp>
-        <p:nvSpPr>
-          <p:cNvPr id="33" name="TextBox 32"/>
-          <p:cNvSpPr txBox="1"/>
-          <p:nvPr/>
-        </p:nvSpPr>
-        <p:spPr>
-          <a:xfrm>
-            <a:off x="3383280" y="3977640"/>
-            <a:ext cx="2560320" cy="182880"/>
-          </a:xfrm>
-          <a:prstGeom prst="rect">
-            <a:avLst/>
-          </a:prstGeom>
-          <a:noFill/>
-        </p:spPr>
-        <p:txBody>
-          <a:bodyPr wrap="square">
-            <a:spAutoFit/>
-          </a:bodyPr>
-          <a:lstStyle/>
-          <a:p>
-            <a:pPr algn="ctr">
-              <a:defRPr sz="900" b="0">
-                <a:solidFill>
-                  <a:srgbClr val="10B981"/>
-                </a:solidFill>
-                <a:latin typeface="Calibri"/>
-              </a:defRPr>
-            </a:pPr>
-            <a:r>
-              <a:t>0.5 FTE</a:t>
-            </a:r>
-          </a:p>
-        </p:txBody>
-      </p:sp>
-      <p:sp>
-        <p:nvSpPr>
-          <p:cNvPr id="34" name="TextBox 33"/>
-          <p:cNvSpPr txBox="1"/>
-          <p:nvPr/>
-        </p:nvSpPr>
-        <p:spPr>
-          <a:xfrm>
-            <a:off x="3520440" y="4160520"/>
-            <a:ext cx="2286000" cy="365760"/>
-          </a:xfrm>
-          <a:prstGeom prst="rect">
-            <a:avLst/>
-          </a:prstGeom>
-          <a:noFill/>
-        </p:spPr>
-        <p:txBody>
-          <a:bodyPr wrap="square">
-            <a:spAutoFit/>
-          </a:bodyPr>
-          <a:lstStyle/>
-          <a:p>
-            <a:pPr algn="ctr">
-              <a:defRPr sz="800" b="0">
-                <a:solidFill>
-                  <a:srgbClr val="64748B"/>
-                </a:solidFill>
-                <a:latin typeface="Calibri"/>
-              </a:defRPr>
-            </a:pPr>
-            <a:r>
-              <a:t>Interface design, educator usability</a:t>
-            </a:r>
-            <a:br/>
-            <a:r>
-              <a:t>testing, accessibility</a:t>
-            </a:r>
-          </a:p>
-        </p:txBody>
-      </p:sp>
-      <p:sp>
-        <p:nvSpPr>
-          <p:cNvPr id="35" name="Rectangle 34"/>
-          <p:cNvSpPr/>
-          <p:nvPr/>
-        </p:nvSpPr>
-        <p:spPr>
-          <a:xfrm>
-            <a:off x="6217920" y="2926080"/>
-            <a:ext cx="2560320" cy="1645920"/>
-          </a:xfrm>
-          <a:prstGeom prst="rect">
-            <a:avLst/>
-          </a:prstGeom>
-          <a:solidFill>
-            <a:srgbClr val="F7F9FC"/>
-          </a:solidFill>
-          <a:ln>
-            <a:noFill/>
-          </a:ln>
-        </p:spPr>
-        <p:style>
-          <a:lnRef idx="1">
-            <a:schemeClr val="accent1"/>
-          </a:lnRef>
-          <a:fillRef idx="3">
-            <a:schemeClr val="accent1"/>
-          </a:fillRef>
-          <a:effectRef idx="2">
-            <a:schemeClr val="accent1"/>
-          </a:effectRef>
-          <a:fontRef idx="minor">
-            <a:schemeClr val="lt1"/>
-          </a:fontRef>
-        </p:style>
-        <p:txBody>
-          <a:bodyPr rtlCol="0" anchor="ctr"/>
-          <a:lstStyle/>
-          <a:p>
-            <a:pPr algn="ctr"/>
-          </a:p>
-        </p:txBody>
-      </p:sp>
-      <p:sp>
-        <p:nvSpPr>
-          <p:cNvPr id="36" name="Rectangle 35"/>
-          <p:cNvSpPr/>
-          <p:nvPr/>
-        </p:nvSpPr>
-        <p:spPr>
-          <a:xfrm>
-            <a:off x="6217920" y="2926080"/>
-            <a:ext cx="2560320" cy="54864"/>
-          </a:xfrm>
-          <a:prstGeom prst="rect">
-            <a:avLst/>
-          </a:prstGeom>
-          <a:solidFill>
-            <a:srgbClr val="EF4444"/>
-          </a:solidFill>
-          <a:ln>
-            <a:noFill/>
-          </a:ln>
-        </p:spPr>
-        <p:style>
-          <a:lnRef idx="1">
-            <a:schemeClr val="accent1"/>
-          </a:lnRef>
-          <a:fillRef idx="3">
-            <a:schemeClr val="accent1"/>
-          </a:fillRef>
-          <a:effectRef idx="2">
-            <a:schemeClr val="accent1"/>
-          </a:effectRef>
-          <a:fontRef idx="minor">
-            <a:schemeClr val="lt1"/>
-          </a:fontRef>
-        </p:style>
-        <p:txBody>
-          <a:bodyPr rtlCol="0" anchor="ctr"/>
-          <a:lstStyle/>
-          <a:p>
-            <a:pPr algn="ctr"/>
-          </a:p>
-        </p:txBody>
-      </p:sp>
-      <p:sp>
-        <p:nvSpPr>
-          <p:cNvPr id="37" name="Oval 36"/>
-          <p:cNvSpPr/>
-          <p:nvPr/>
-        </p:nvSpPr>
-        <p:spPr>
-          <a:xfrm>
-            <a:off x="7178040" y="3063240"/>
-            <a:ext cx="640080" cy="640080"/>
-          </a:xfrm>
-          <a:prstGeom prst="ellipse">
-            <a:avLst/>
-          </a:prstGeom>
-          <a:solidFill>
-            <a:srgbClr val="EF4444"/>
-          </a:solidFill>
-          <a:ln>
-            <a:noFill/>
-          </a:ln>
-        </p:spPr>
-        <p:style>
-          <a:lnRef idx="1">
-            <a:schemeClr val="accent1"/>
-          </a:lnRef>
-          <a:fillRef idx="3">
-            <a:schemeClr val="accent1"/>
-          </a:fillRef>
-          <a:effectRef idx="2">
-            <a:schemeClr val="accent1"/>
-          </a:effectRef>
-          <a:fontRef idx="minor">
-            <a:schemeClr val="lt1"/>
-          </a:fontRef>
-        </p:style>
-        <p:txBody>
-          <a:bodyPr rtlCol="0" anchor="ctr"/>
-          <a:lstStyle/>
-          <a:p>
-            <a:pPr algn="ctr"/>
-          </a:p>
-        </p:txBody>
-      </p:sp>
-      <p:sp>
-        <p:nvSpPr>
-          <p:cNvPr id="38" name="TextBox 37"/>
-          <p:cNvSpPr txBox="1"/>
-          <p:nvPr/>
-        </p:nvSpPr>
-        <p:spPr>
-          <a:xfrm>
-            <a:off x="6217920" y="3749040"/>
-            <a:ext cx="2560320" cy="274320"/>
-          </a:xfrm>
-          <a:prstGeom prst="rect">
-            <a:avLst/>
-          </a:prstGeom>
-          <a:noFill/>
-        </p:spPr>
-        <p:txBody>
-          <a:bodyPr wrap="square">
-            <a:spAutoFit/>
-          </a:bodyPr>
-          <a:lstStyle/>
-          <a:p>
-            <a:pPr algn="ctr">
-              <a:defRPr sz="1200" b="1">
-                <a:solidFill>
-                  <a:srgbClr val="1A365D"/>
-                </a:solidFill>
-                <a:latin typeface="Calibri"/>
-              </a:defRPr>
-            </a:pPr>
-            <a:r>
-              <a:t>Impact Evaluator</a:t>
-            </a:r>
-          </a:p>
-        </p:txBody>
-      </p:sp>
-      <p:sp>
-        <p:nvSpPr>
-          <p:cNvPr id="39" name="TextBox 38"/>
-          <p:cNvSpPr txBox="1"/>
-          <p:nvPr/>
-        </p:nvSpPr>
-        <p:spPr>
-          <a:xfrm>
-            <a:off x="6217920" y="3977640"/>
-            <a:ext cx="2560320" cy="182880"/>
-          </a:xfrm>
-          <a:prstGeom prst="rect">
-            <a:avLst/>
-          </a:prstGeom>
-          <a:noFill/>
-        </p:spPr>
-        <p:txBody>
-          <a:bodyPr wrap="square">
-            <a:spAutoFit/>
-          </a:bodyPr>
-          <a:lstStyle/>
-          <a:p>
-            <a:pPr algn="ctr">
-              <a:defRPr sz="900" b="0">
-                <a:solidFill>
-                  <a:srgbClr val="EF4444"/>
-                </a:solidFill>
-                <a:latin typeface="Calibri"/>
-              </a:defRPr>
-            </a:pPr>
-            <a:r>
-              <a:t>0.3 FTE</a:t>
-            </a:r>
-          </a:p>
-        </p:txBody>
-      </p:sp>
-      <p:sp>
-        <p:nvSpPr>
-          <p:cNvPr id="40" name="TextBox 39"/>
-          <p:cNvSpPr txBox="1"/>
-          <p:nvPr/>
-        </p:nvSpPr>
-        <p:spPr>
-          <a:xfrm>
-            <a:off x="6355080" y="4160520"/>
-            <a:ext cx="2286000" cy="365760"/>
-          </a:xfrm>
-          <a:prstGeom prst="rect">
-            <a:avLst/>
-          </a:prstGeom>
-          <a:noFill/>
-        </p:spPr>
-        <p:txBody>
-          <a:bodyPr wrap="square">
-            <a:spAutoFit/>
-          </a:bodyPr>
-          <a:lstStyle/>
-          <a:p>
-            <a:pPr algn="ctr">
-              <a:defRPr sz="800" b="0">
-                <a:solidFill>
-                  <a:srgbClr val="64748B"/>
-                </a:solidFill>
-                <a:latin typeface="Calibri"/>
-              </a:defRPr>
-            </a:pPr>
-            <a:r>
-              <a:t>Assessment design, data analysis,</a:t>
-            </a:r>
-            <a:br/>
-            <a:r>
-              <a:t>final impact reporting</a:t>
+              <a:t>educator training facilitation</a:t>
             </a:r>
           </a:p>
         </p:txBody>
@@ -5041,7 +4189,7 @@
             <a:avLst/>
           </a:prstGeom>
           <a:solidFill>
-            <a:srgbClr val="0E7C6B"/>
+            <a:srgbClr val="01ABAA"/>
           </a:solidFill>
           <a:ln>
             <a:noFill/>
@@ -5094,9 +4242,9 @@
             <a:pPr algn="l">
               <a:defRPr sz="1000" b="1">
                 <a:solidFill>
-                  <a:srgbClr val="0E7C6B"/>
-                </a:solidFill>
-                <a:latin typeface="Calibri"/>
+                  <a:srgbClr val="01ABAA"/>
+                </a:solidFill>
+                <a:latin typeface="Arial"/>
               </a:defRPr>
             </a:pPr>
             <a:r>
@@ -5130,9 +4278,9 @@
             <a:pPr algn="l">
               <a:defRPr sz="2600" b="1">
                 <a:solidFill>
-                  <a:srgbClr val="1A365D"/>
-                </a:solidFill>
-                <a:latin typeface="Calibri"/>
+                  <a:srgbClr val="2D2A5E"/>
+                </a:solidFill>
+                <a:latin typeface="Arial"/>
               </a:defRPr>
             </a:pPr>
             <a:r>
@@ -5156,7 +4304,7 @@
             <a:avLst/>
           </a:prstGeom>
           <a:solidFill>
-            <a:srgbClr val="F7F9FC"/>
+            <a:srgbClr val="FAF6F0"/>
           </a:solidFill>
           <a:ln>
             <a:noFill/>
@@ -5186,20 +4334,128 @@
       </p:sp>
       <p:sp>
         <p:nvSpPr>
-          <p:cNvPr id="6" name="Rectangle 5"/>
+          <p:cNvPr id="6" name="TextBox 5"/>
+          <p:cNvSpPr txBox="1"/>
+          <p:nvPr/>
+        </p:nvSpPr>
+        <p:spPr>
+          <a:xfrm>
+            <a:off x="731520" y="1188720"/>
+            <a:ext cx="2194560" cy="274320"/>
+          </a:xfrm>
+          <a:prstGeom prst="rect">
+            <a:avLst/>
+          </a:prstGeom>
+          <a:noFill/>
+        </p:spPr>
+        <p:txBody>
+          <a:bodyPr wrap="square">
+            <a:spAutoFit/>
+          </a:bodyPr>
+          <a:lstStyle/>
+          <a:p>
+            <a:pPr algn="l">
+              <a:defRPr sz="1400" b="1">
+                <a:solidFill>
+                  <a:srgbClr val="2D2A5E"/>
+                </a:solidFill>
+                <a:latin typeface="Arial"/>
+              </a:defRPr>
+            </a:pPr>
+            <a:r>
+              <a:t>ECDA IDP 2.0</a:t>
+            </a:r>
+          </a:p>
+        </p:txBody>
+      </p:sp>
+      <p:sp>
+        <p:nvSpPr>
+          <p:cNvPr id="7" name="TextBox 6"/>
+          <p:cNvSpPr txBox="1"/>
+          <p:nvPr/>
+        </p:nvSpPr>
+        <p:spPr>
+          <a:xfrm>
+            <a:off x="731520" y="1508760"/>
+            <a:ext cx="2194560" cy="274320"/>
+          </a:xfrm>
+          <a:prstGeom prst="rect">
+            <a:avLst/>
+          </a:prstGeom>
+          <a:noFill/>
+        </p:spPr>
+        <p:txBody>
+          <a:bodyPr wrap="square">
+            <a:spAutoFit/>
+          </a:bodyPr>
+          <a:lstStyle/>
+          <a:p>
+            <a:pPr algn="l">
+              <a:defRPr sz="900" b="1">
+                <a:solidFill>
+                  <a:srgbClr val="01ABAA"/>
+                </a:solidFill>
+                <a:latin typeface="Arial"/>
+              </a:defRPr>
+            </a:pPr>
+            <a:r>
+              <a:t>Strategic Fit</a:t>
+            </a:r>
+          </a:p>
+        </p:txBody>
+      </p:sp>
+      <p:sp>
+        <p:nvSpPr>
+          <p:cNvPr id="8" name="TextBox 7"/>
+          <p:cNvSpPr txBox="1"/>
+          <p:nvPr/>
+        </p:nvSpPr>
+        <p:spPr>
+          <a:xfrm>
+            <a:off x="731520" y="1783080"/>
+            <a:ext cx="2194560" cy="822960"/>
+          </a:xfrm>
+          <a:prstGeom prst="rect">
+            <a:avLst/>
+          </a:prstGeom>
+          <a:noFill/>
+        </p:spPr>
+        <p:txBody>
+          <a:bodyPr wrap="square">
+            <a:spAutoFit/>
+          </a:bodyPr>
+          <a:lstStyle/>
+          <a:p>
+            <a:pPr algn="l">
+              <a:defRPr sz="900" b="0">
+                <a:solidFill>
+                  <a:srgbClr val="6B7280"/>
+                </a:solidFill>
+                <a:latin typeface="Arial"/>
+              </a:defRPr>
+            </a:pPr>
+            <a:r>
+              <a:t>Direct alignment with Early Childhood Innovation Sandbox objectives. AI-enabled solution for sector-wide transformation.</a:t>
+            </a:r>
+          </a:p>
+        </p:txBody>
+      </p:sp>
+      <p:sp>
+        <p:nvSpPr>
+          <p:cNvPr id="9" name="Rectangle 8"/>
           <p:cNvSpPr/>
           <p:nvPr/>
         </p:nvSpPr>
         <p:spPr>
           <a:xfrm>
-            <a:off x="548640" y="1097280"/>
-            <a:ext cx="54864" cy="1645920"/>
+            <a:off x="3383280" y="1097280"/>
+            <a:ext cx="2560320" cy="1645920"/>
           </a:xfrm>
           <a:prstGeom prst="rect">
             <a:avLst/>
           </a:prstGeom>
           <a:solidFill>
-            <a:srgbClr val="0E7C6B"/>
+            <a:srgbClr val="FAF6F0"/>
           </a:solidFill>
           <a:ln>
             <a:noFill/>
@@ -5229,13 +4485,13 @@
       </p:sp>
       <p:sp>
         <p:nvSpPr>
-          <p:cNvPr id="7" name="TextBox 6"/>
-          <p:cNvSpPr txBox="1"/>
-          <p:nvPr/>
-        </p:nvSpPr>
-        <p:spPr>
-          <a:xfrm>
-            <a:off x="731520" y="1188720"/>
+          <p:cNvPr id="10" name="TextBox 9"/>
+          <p:cNvSpPr txBox="1"/>
+          <p:nvPr/>
+        </p:nvSpPr>
+        <p:spPr>
+          <a:xfrm>
+            <a:off x="3566160" y="1188720"/>
             <a:ext cx="2194560" cy="274320"/>
           </a:xfrm>
           <a:prstGeom prst="rect">
@@ -5252,26 +4508,26 @@
             <a:pPr algn="l">
               <a:defRPr sz="1400" b="1">
                 <a:solidFill>
-                  <a:srgbClr val="1A365D"/>
-                </a:solidFill>
-                <a:latin typeface="Calibri"/>
-              </a:defRPr>
-            </a:pPr>
-            <a:r>
-              <a:t>ECDA IDP 2.0</a:t>
-            </a:r>
-          </a:p>
-        </p:txBody>
-      </p:sp>
-      <p:sp>
-        <p:nvSpPr>
-          <p:cNvPr id="8" name="TextBox 7"/>
-          <p:cNvSpPr txBox="1"/>
-          <p:nvPr/>
-        </p:nvSpPr>
-        <p:spPr>
-          <a:xfrm>
-            <a:off x="731520" y="1508760"/>
+                  <a:srgbClr val="2D2A5E"/>
+                </a:solidFill>
+                <a:latin typeface="Arial"/>
+              </a:defRPr>
+            </a:pPr>
+            <a:r>
+              <a:t>EYDF</a:t>
+            </a:r>
+          </a:p>
+        </p:txBody>
+      </p:sp>
+      <p:sp>
+        <p:nvSpPr>
+          <p:cNvPr id="11" name="TextBox 10"/>
+          <p:cNvSpPr txBox="1"/>
+          <p:nvPr/>
+        </p:nvSpPr>
+        <p:spPr>
+          <a:xfrm>
+            <a:off x="3566160" y="1508760"/>
             <a:ext cx="2194560" cy="274320"/>
           </a:xfrm>
           <a:prstGeom prst="rect">
@@ -5288,26 +4544,26 @@
             <a:pPr algn="l">
               <a:defRPr sz="900" b="1">
                 <a:solidFill>
-                  <a:srgbClr val="0E7C6B"/>
-                </a:solidFill>
-                <a:latin typeface="Calibri"/>
-              </a:defRPr>
-            </a:pPr>
-            <a:r>
-              <a:t>Strategic Fit</a:t>
-            </a:r>
-          </a:p>
-        </p:txBody>
-      </p:sp>
-      <p:sp>
-        <p:nvSpPr>
-          <p:cNvPr id="9" name="TextBox 8"/>
-          <p:cNvSpPr txBox="1"/>
-          <p:nvPr/>
-        </p:nvSpPr>
-        <p:spPr>
-          <a:xfrm>
-            <a:off x="731520" y="1783080"/>
+                  <a:srgbClr val="3B82F6"/>
+                </a:solidFill>
+                <a:latin typeface="Arial"/>
+              </a:defRPr>
+            </a:pPr>
+            <a:r>
+              <a:t>Curriculum</a:t>
+            </a:r>
+          </a:p>
+        </p:txBody>
+      </p:sp>
+      <p:sp>
+        <p:nvSpPr>
+          <p:cNvPr id="12" name="TextBox 11"/>
+          <p:cNvSpPr txBox="1"/>
+          <p:nvPr/>
+        </p:nvSpPr>
+        <p:spPr>
+          <a:xfrm>
+            <a:off x="3566160" y="1783080"/>
             <a:ext cx="2194560" cy="822960"/>
           </a:xfrm>
           <a:prstGeom prst="rect">
@@ -5324,33 +4580,33 @@
             <a:pPr algn="l">
               <a:defRPr sz="900" b="0">
                 <a:solidFill>
-                  <a:srgbClr val="64748B"/>
-                </a:solidFill>
-                <a:latin typeface="Calibri"/>
-              </a:defRPr>
-            </a:pPr>
-            <a:r>
-              <a:t>Direct alignment with Innovation Seed Fund objectives. AI-enabled solution for sector-wide transformation.</a:t>
-            </a:r>
-          </a:p>
-        </p:txBody>
-      </p:sp>
-      <p:sp>
-        <p:nvSpPr>
-          <p:cNvPr id="10" name="Rectangle 9"/>
+                  <a:srgbClr val="6B7280"/>
+                </a:solidFill>
+                <a:latin typeface="Arial"/>
+              </a:defRPr>
+            </a:pPr>
+            <a:r>
+              <a:t>Early Years Development Framework. All learning outcomes mapped and tagged in lesson plans and portfolios.</a:t>
+            </a:r>
+          </a:p>
+        </p:txBody>
+      </p:sp>
+      <p:sp>
+        <p:nvSpPr>
+          <p:cNvPr id="13" name="Rectangle 12"/>
           <p:cNvSpPr/>
           <p:nvPr/>
         </p:nvSpPr>
         <p:spPr>
           <a:xfrm>
-            <a:off x="3383280" y="1097280"/>
+            <a:off x="6217920" y="1097280"/>
             <a:ext cx="2560320" cy="1645920"/>
           </a:xfrm>
           <a:prstGeom prst="rect">
             <a:avLst/>
           </a:prstGeom>
           <a:solidFill>
-            <a:srgbClr val="F7F9FC"/>
+            <a:srgbClr val="FAF6F0"/>
           </a:solidFill>
           <a:ln>
             <a:noFill/>
@@ -5380,20 +4636,128 @@
       </p:sp>
       <p:sp>
         <p:nvSpPr>
-          <p:cNvPr id="11" name="Rectangle 10"/>
+          <p:cNvPr id="14" name="TextBox 13"/>
+          <p:cNvSpPr txBox="1"/>
+          <p:nvPr/>
+        </p:nvSpPr>
+        <p:spPr>
+          <a:xfrm>
+            <a:off x="6400800" y="1188720"/>
+            <a:ext cx="2194560" cy="274320"/>
+          </a:xfrm>
+          <a:prstGeom prst="rect">
+            <a:avLst/>
+          </a:prstGeom>
+          <a:noFill/>
+        </p:spPr>
+        <p:txBody>
+          <a:bodyPr wrap="square">
+            <a:spAutoFit/>
+          </a:bodyPr>
+          <a:lstStyle/>
+          <a:p>
+            <a:pPr algn="l">
+              <a:defRPr sz="1400" b="1">
+                <a:solidFill>
+                  <a:srgbClr val="2D2A5E"/>
+                </a:solidFill>
+                <a:latin typeface="Arial"/>
+              </a:defRPr>
+            </a:pPr>
+            <a:r>
+              <a:t>NEL</a:t>
+            </a:r>
+          </a:p>
+        </p:txBody>
+      </p:sp>
+      <p:sp>
+        <p:nvSpPr>
+          <p:cNvPr id="15" name="TextBox 14"/>
+          <p:cNvSpPr txBox="1"/>
+          <p:nvPr/>
+        </p:nvSpPr>
+        <p:spPr>
+          <a:xfrm>
+            <a:off x="6400800" y="1508760"/>
+            <a:ext cx="2194560" cy="274320"/>
+          </a:xfrm>
+          <a:prstGeom prst="rect">
+            <a:avLst/>
+          </a:prstGeom>
+          <a:noFill/>
+        </p:spPr>
+        <p:txBody>
+          <a:bodyPr wrap="square">
+            <a:spAutoFit/>
+          </a:bodyPr>
+          <a:lstStyle/>
+          <a:p>
+            <a:pPr algn="l">
+              <a:defRPr sz="900" b="1">
+                <a:solidFill>
+                  <a:srgbClr val="10B981"/>
+                </a:solidFill>
+                <a:latin typeface="Arial"/>
+              </a:defRPr>
+            </a:pPr>
+            <a:r>
+              <a:t>Learning</a:t>
+            </a:r>
+          </a:p>
+        </p:txBody>
+      </p:sp>
+      <p:sp>
+        <p:nvSpPr>
+          <p:cNvPr id="16" name="TextBox 15"/>
+          <p:cNvSpPr txBox="1"/>
+          <p:nvPr/>
+        </p:nvSpPr>
+        <p:spPr>
+          <a:xfrm>
+            <a:off x="6400800" y="1783080"/>
+            <a:ext cx="2194560" cy="822960"/>
+          </a:xfrm>
+          <a:prstGeom prst="rect">
+            <a:avLst/>
+          </a:prstGeom>
+          <a:noFill/>
+        </p:spPr>
+        <p:txBody>
+          <a:bodyPr wrap="square">
+            <a:spAutoFit/>
+          </a:bodyPr>
+          <a:lstStyle/>
+          <a:p>
+            <a:pPr algn="l">
+              <a:defRPr sz="900" b="0">
+                <a:solidFill>
+                  <a:srgbClr val="6B7280"/>
+                </a:solidFill>
+                <a:latin typeface="Arial"/>
+              </a:defRPr>
+            </a:pPr>
+            <a:r>
+              <a:t>Nurturing Early Learners. Activity design and assessment indicators aligned to NEL learning areas.</a:t>
+            </a:r>
+          </a:p>
+        </p:txBody>
+      </p:sp>
+      <p:sp>
+        <p:nvSpPr>
+          <p:cNvPr id="17" name="Rectangle 16"/>
           <p:cNvSpPr/>
           <p:nvPr/>
         </p:nvSpPr>
         <p:spPr>
           <a:xfrm>
-            <a:off x="3383280" y="1097280"/>
-            <a:ext cx="54864" cy="1645920"/>
+            <a:off x="548640" y="2926080"/>
+            <a:ext cx="2560320" cy="1645920"/>
           </a:xfrm>
           <a:prstGeom prst="rect">
             <a:avLst/>
           </a:prstGeom>
           <a:solidFill>
-            <a:srgbClr val="3B82F6"/>
+            <a:srgbClr val="FAF6F0"/>
           </a:solidFill>
           <a:ln>
             <a:noFill/>
@@ -5423,13 +4787,13 @@
       </p:sp>
       <p:sp>
         <p:nvSpPr>
-          <p:cNvPr id="12" name="TextBox 11"/>
-          <p:cNvSpPr txBox="1"/>
-          <p:nvPr/>
-        </p:nvSpPr>
-        <p:spPr>
-          <a:xfrm>
-            <a:off x="3566160" y="1188720"/>
+          <p:cNvPr id="18" name="TextBox 17"/>
+          <p:cNvSpPr txBox="1"/>
+          <p:nvPr/>
+        </p:nvSpPr>
+        <p:spPr>
+          <a:xfrm>
+            <a:off x="731520" y="3017520"/>
             <a:ext cx="2194560" cy="274320"/>
           </a:xfrm>
           <a:prstGeom prst="rect">
@@ -5446,26 +4810,26 @@
             <a:pPr algn="l">
               <a:defRPr sz="1400" b="1">
                 <a:solidFill>
-                  <a:srgbClr val="1A365D"/>
-                </a:solidFill>
-                <a:latin typeface="Calibri"/>
-              </a:defRPr>
-            </a:pPr>
-            <a:r>
-              <a:t>EYDF</a:t>
-            </a:r>
-          </a:p>
-        </p:txBody>
-      </p:sp>
-      <p:sp>
-        <p:nvSpPr>
-          <p:cNvPr id="13" name="TextBox 12"/>
-          <p:cNvSpPr txBox="1"/>
-          <p:nvPr/>
-        </p:nvSpPr>
-        <p:spPr>
-          <a:xfrm>
-            <a:off x="3566160" y="1508760"/>
+                  <a:srgbClr val="2D2A5E"/>
+                </a:solidFill>
+                <a:latin typeface="Arial"/>
+              </a:defRPr>
+            </a:pPr>
+            <a:r>
+              <a:t>ECDA QTT</a:t>
+            </a:r>
+          </a:p>
+        </p:txBody>
+      </p:sp>
+      <p:sp>
+        <p:nvSpPr>
+          <p:cNvPr id="19" name="TextBox 18"/>
+          <p:cNvSpPr txBox="1"/>
+          <p:nvPr/>
+        </p:nvSpPr>
+        <p:spPr>
+          <a:xfrm>
+            <a:off x="731520" y="3337560"/>
             <a:ext cx="2194560" cy="274320"/>
           </a:xfrm>
           <a:prstGeom prst="rect">
@@ -5482,26 +4846,26 @@
             <a:pPr algn="l">
               <a:defRPr sz="900" b="1">
                 <a:solidFill>
-                  <a:srgbClr val="3B82F6"/>
-                </a:solidFill>
-                <a:latin typeface="Calibri"/>
-              </a:defRPr>
-            </a:pPr>
-            <a:r>
-              <a:t>Curriculum</a:t>
-            </a:r>
-          </a:p>
-        </p:txBody>
-      </p:sp>
-      <p:sp>
-        <p:nvSpPr>
-          <p:cNvPr id="14" name="TextBox 13"/>
-          <p:cNvSpPr txBox="1"/>
-          <p:nvPr/>
-        </p:nvSpPr>
-        <p:spPr>
-          <a:xfrm>
-            <a:off x="3566160" y="1783080"/>
+                  <a:srgbClr val="FECD1B"/>
+                </a:solidFill>
+                <a:latin typeface="Arial"/>
+              </a:defRPr>
+            </a:pPr>
+            <a:r>
+              <a:t>Quality</a:t>
+            </a:r>
+          </a:p>
+        </p:txBody>
+      </p:sp>
+      <p:sp>
+        <p:nvSpPr>
+          <p:cNvPr id="20" name="TextBox 19"/>
+          <p:cNvSpPr txBox="1"/>
+          <p:nvPr/>
+        </p:nvSpPr>
+        <p:spPr>
+          <a:xfrm>
+            <a:off x="731520" y="3611880"/>
             <a:ext cx="2194560" cy="822960"/>
           </a:xfrm>
           <a:prstGeom prst="rect">
@@ -5518,33 +4882,33 @@
             <a:pPr algn="l">
               <a:defRPr sz="900" b="0">
                 <a:solidFill>
-                  <a:srgbClr val="64748B"/>
-                </a:solidFill>
-                <a:latin typeface="Calibri"/>
-              </a:defRPr>
-            </a:pPr>
-            <a:r>
-              <a:t>Early Years Development Framework. All learning outcomes mapped and tagged in lesson plans and portfolios.</a:t>
-            </a:r>
-          </a:p>
-        </p:txBody>
-      </p:sp>
-      <p:sp>
-        <p:nvSpPr>
-          <p:cNvPr id="15" name="Rectangle 14"/>
+                  <a:srgbClr val="6B7280"/>
+                </a:solidFill>
+                <a:latin typeface="Arial"/>
+              </a:defRPr>
+            </a:pPr>
+            <a:r>
+              <a:t>Quality Teaching Tool. Coaching engine built around QTT rubric domains. Director dashboard tracks QTT scores.</a:t>
+            </a:r>
+          </a:p>
+        </p:txBody>
+      </p:sp>
+      <p:sp>
+        <p:nvSpPr>
+          <p:cNvPr id="21" name="Rectangle 20"/>
           <p:cNvSpPr/>
           <p:nvPr/>
         </p:nvSpPr>
         <p:spPr>
           <a:xfrm>
-            <a:off x="6217920" y="1097280"/>
+            <a:off x="3383280" y="2926080"/>
             <a:ext cx="2560320" cy="1645920"/>
           </a:xfrm>
           <a:prstGeom prst="rect">
             <a:avLst/>
           </a:prstGeom>
           <a:solidFill>
-            <a:srgbClr val="F7F9FC"/>
+            <a:srgbClr val="FAF6F0"/>
           </a:solidFill>
           <a:ln>
             <a:noFill/>
@@ -5574,20 +4938,128 @@
       </p:sp>
       <p:sp>
         <p:nvSpPr>
-          <p:cNvPr id="16" name="Rectangle 15"/>
+          <p:cNvPr id="22" name="TextBox 21"/>
+          <p:cNvSpPr txBox="1"/>
+          <p:nvPr/>
+        </p:nvSpPr>
+        <p:spPr>
+          <a:xfrm>
+            <a:off x="3566160" y="3017520"/>
+            <a:ext cx="2194560" cy="274320"/>
+          </a:xfrm>
+          <a:prstGeom prst="rect">
+            <a:avLst/>
+          </a:prstGeom>
+          <a:noFill/>
+        </p:spPr>
+        <p:txBody>
+          <a:bodyPr wrap="square">
+            <a:spAutoFit/>
+          </a:bodyPr>
+          <a:lstStyle/>
+          <a:p>
+            <a:pPr algn="l">
+              <a:defRPr sz="1400" b="1">
+                <a:solidFill>
+                  <a:srgbClr val="2D2A5E"/>
+                </a:solidFill>
+                <a:latin typeface="Arial"/>
+              </a:defRPr>
+            </a:pPr>
+            <a:r>
+              <a:t>SFw for ECCE</a:t>
+            </a:r>
+          </a:p>
+        </p:txBody>
+      </p:sp>
+      <p:sp>
+        <p:nvSpPr>
+          <p:cNvPr id="23" name="TextBox 22"/>
+          <p:cNvSpPr txBox="1"/>
+          <p:nvPr/>
+        </p:nvSpPr>
+        <p:spPr>
+          <a:xfrm>
+            <a:off x="3566160" y="3337560"/>
+            <a:ext cx="2194560" cy="274320"/>
+          </a:xfrm>
+          <a:prstGeom prst="rect">
+            <a:avLst/>
+          </a:prstGeom>
+          <a:noFill/>
+        </p:spPr>
+        <p:txBody>
+          <a:bodyPr wrap="square">
+            <a:spAutoFit/>
+          </a:bodyPr>
+          <a:lstStyle/>
+          <a:p>
+            <a:pPr algn="l">
+              <a:defRPr sz="900" b="1">
+                <a:solidFill>
+                  <a:srgbClr val="8B5CF6"/>
+                </a:solidFill>
+                <a:latin typeface="Arial"/>
+              </a:defRPr>
+            </a:pPr>
+            <a:r>
+              <a:t>Growth</a:t>
+            </a:r>
+          </a:p>
+        </p:txBody>
+      </p:sp>
+      <p:sp>
+        <p:nvSpPr>
+          <p:cNvPr id="24" name="TextBox 23"/>
+          <p:cNvSpPr txBox="1"/>
+          <p:nvPr/>
+        </p:nvSpPr>
+        <p:spPr>
+          <a:xfrm>
+            <a:off x="3566160" y="3611880"/>
+            <a:ext cx="2194560" cy="822960"/>
+          </a:xfrm>
+          <a:prstGeom prst="rect">
+            <a:avLst/>
+          </a:prstGeom>
+          <a:noFill/>
+        </p:spPr>
+        <p:txBody>
+          <a:bodyPr wrap="square">
+            <a:spAutoFit/>
+          </a:bodyPr>
+          <a:lstStyle/>
+          <a:p>
+            <a:pPr algn="l">
+              <a:defRPr sz="900" b="0">
+                <a:solidFill>
+                  <a:srgbClr val="6B7280"/>
+                </a:solidFill>
+                <a:latin typeface="Arial"/>
+              </a:defRPr>
+            </a:pPr>
+            <a:r>
+              <a:t>Skills Framework for Early Childhood. Professional development mapped to TSC codes. WSQ course recommendations.</a:t>
+            </a:r>
+          </a:p>
+        </p:txBody>
+      </p:sp>
+      <p:sp>
+        <p:nvSpPr>
+          <p:cNvPr id="25" name="Rectangle 24"/>
           <p:cNvSpPr/>
           <p:nvPr/>
         </p:nvSpPr>
         <p:spPr>
           <a:xfrm>
-            <a:off x="6217920" y="1097280"/>
-            <a:ext cx="54864" cy="1645920"/>
+            <a:off x="6217920" y="2926080"/>
+            <a:ext cx="2560320" cy="1645920"/>
           </a:xfrm>
           <a:prstGeom prst="rect">
             <a:avLst/>
           </a:prstGeom>
           <a:solidFill>
-            <a:srgbClr val="10B981"/>
+            <a:srgbClr val="FAF6F0"/>
           </a:solidFill>
           <a:ln>
             <a:noFill/>
@@ -5617,13 +5089,13 @@
       </p:sp>
       <p:sp>
         <p:nvSpPr>
-          <p:cNvPr id="17" name="TextBox 16"/>
-          <p:cNvSpPr txBox="1"/>
-          <p:nvPr/>
-        </p:nvSpPr>
-        <p:spPr>
-          <a:xfrm>
-            <a:off x="6400800" y="1188720"/>
+          <p:cNvPr id="26" name="TextBox 25"/>
+          <p:cNvSpPr txBox="1"/>
+          <p:nvPr/>
+        </p:nvSpPr>
+        <p:spPr>
+          <a:xfrm>
+            <a:off x="6400800" y="3017520"/>
             <a:ext cx="2194560" cy="274320"/>
           </a:xfrm>
           <a:prstGeom prst="rect">
@@ -5640,26 +5112,26 @@
             <a:pPr algn="l">
               <a:defRPr sz="1400" b="1">
                 <a:solidFill>
-                  <a:srgbClr val="1A365D"/>
-                </a:solidFill>
-                <a:latin typeface="Calibri"/>
-              </a:defRPr>
-            </a:pPr>
-            <a:r>
-              <a:t>NEL</a:t>
-            </a:r>
-          </a:p>
-        </p:txBody>
-      </p:sp>
-      <p:sp>
-        <p:nvSpPr>
-          <p:cNvPr id="18" name="TextBox 17"/>
-          <p:cNvSpPr txBox="1"/>
-          <p:nvPr/>
-        </p:nvSpPr>
-        <p:spPr>
-          <a:xfrm>
-            <a:off x="6400800" y="1508760"/>
+                  <a:srgbClr val="2D2A5E"/>
+                </a:solidFill>
+                <a:latin typeface="Arial"/>
+              </a:defRPr>
+            </a:pPr>
+            <a:r>
+              <a:t>PDPA</a:t>
+            </a:r>
+          </a:p>
+        </p:txBody>
+      </p:sp>
+      <p:sp>
+        <p:nvSpPr>
+          <p:cNvPr id="27" name="TextBox 26"/>
+          <p:cNvSpPr txBox="1"/>
+          <p:nvPr/>
+        </p:nvSpPr>
+        <p:spPr>
+          <a:xfrm>
+            <a:off x="6400800" y="3337560"/>
             <a:ext cx="2194560" cy="274320"/>
           </a:xfrm>
           <a:prstGeom prst="rect">
@@ -5676,26 +5148,26 @@
             <a:pPr algn="l">
               <a:defRPr sz="900" b="1">
                 <a:solidFill>
-                  <a:srgbClr val="10B981"/>
-                </a:solidFill>
-                <a:latin typeface="Calibri"/>
-              </a:defRPr>
-            </a:pPr>
-            <a:r>
-              <a:t>Learning</a:t>
-            </a:r>
-          </a:p>
-        </p:txBody>
-      </p:sp>
-      <p:sp>
-        <p:nvSpPr>
-          <p:cNvPr id="19" name="TextBox 18"/>
-          <p:cNvSpPr txBox="1"/>
-          <p:nvPr/>
-        </p:nvSpPr>
-        <p:spPr>
-          <a:xfrm>
-            <a:off x="6400800" y="1783080"/>
+                  <a:srgbClr val="E8063C"/>
+                </a:solidFill>
+                <a:latin typeface="Arial"/>
+              </a:defRPr>
+            </a:pPr>
+            <a:r>
+              <a:t>Compliance</a:t>
+            </a:r>
+          </a:p>
+        </p:txBody>
+      </p:sp>
+      <p:sp>
+        <p:nvSpPr>
+          <p:cNvPr id="28" name="TextBox 27"/>
+          <p:cNvSpPr txBox="1"/>
+          <p:nvPr/>
+        </p:nvSpPr>
+        <p:spPr>
+          <a:xfrm>
+            <a:off x="6400800" y="3611880"/>
             <a:ext cx="2194560" cy="822960"/>
           </a:xfrm>
           <a:prstGeom prst="rect">
@@ -5712,591 +5184,9 @@
             <a:pPr algn="l">
               <a:defRPr sz="900" b="0">
                 <a:solidFill>
-                  <a:srgbClr val="64748B"/>
-                </a:solidFill>
-                <a:latin typeface="Calibri"/>
-              </a:defRPr>
-            </a:pPr>
-            <a:r>
-              <a:t>Nurturing Early Learners. Activity design and assessment indicators aligned to NEL learning areas.</a:t>
-            </a:r>
-          </a:p>
-        </p:txBody>
-      </p:sp>
-      <p:sp>
-        <p:nvSpPr>
-          <p:cNvPr id="20" name="Rectangle 19"/>
-          <p:cNvSpPr/>
-          <p:nvPr/>
-        </p:nvSpPr>
-        <p:spPr>
-          <a:xfrm>
-            <a:off x="548640" y="2926080"/>
-            <a:ext cx="2560320" cy="1645920"/>
-          </a:xfrm>
-          <a:prstGeom prst="rect">
-            <a:avLst/>
-          </a:prstGeom>
-          <a:solidFill>
-            <a:srgbClr val="F7F9FC"/>
-          </a:solidFill>
-          <a:ln>
-            <a:noFill/>
-          </a:ln>
-        </p:spPr>
-        <p:style>
-          <a:lnRef idx="1">
-            <a:schemeClr val="accent1"/>
-          </a:lnRef>
-          <a:fillRef idx="3">
-            <a:schemeClr val="accent1"/>
-          </a:fillRef>
-          <a:effectRef idx="2">
-            <a:schemeClr val="accent1"/>
-          </a:effectRef>
-          <a:fontRef idx="minor">
-            <a:schemeClr val="lt1"/>
-          </a:fontRef>
-        </p:style>
-        <p:txBody>
-          <a:bodyPr rtlCol="0" anchor="ctr"/>
-          <a:lstStyle/>
-          <a:p>
-            <a:pPr algn="ctr"/>
-          </a:p>
-        </p:txBody>
-      </p:sp>
-      <p:sp>
-        <p:nvSpPr>
-          <p:cNvPr id="21" name="Rectangle 20"/>
-          <p:cNvSpPr/>
-          <p:nvPr/>
-        </p:nvSpPr>
-        <p:spPr>
-          <a:xfrm>
-            <a:off x="548640" y="2926080"/>
-            <a:ext cx="54864" cy="1645920"/>
-          </a:xfrm>
-          <a:prstGeom prst="rect">
-            <a:avLst/>
-          </a:prstGeom>
-          <a:solidFill>
-            <a:srgbClr val="F0A500"/>
-          </a:solidFill>
-          <a:ln>
-            <a:noFill/>
-          </a:ln>
-        </p:spPr>
-        <p:style>
-          <a:lnRef idx="1">
-            <a:schemeClr val="accent1"/>
-          </a:lnRef>
-          <a:fillRef idx="3">
-            <a:schemeClr val="accent1"/>
-          </a:fillRef>
-          <a:effectRef idx="2">
-            <a:schemeClr val="accent1"/>
-          </a:effectRef>
-          <a:fontRef idx="minor">
-            <a:schemeClr val="lt1"/>
-          </a:fontRef>
-        </p:style>
-        <p:txBody>
-          <a:bodyPr rtlCol="0" anchor="ctr"/>
-          <a:lstStyle/>
-          <a:p>
-            <a:pPr algn="ctr"/>
-          </a:p>
-        </p:txBody>
-      </p:sp>
-      <p:sp>
-        <p:nvSpPr>
-          <p:cNvPr id="22" name="TextBox 21"/>
-          <p:cNvSpPr txBox="1"/>
-          <p:nvPr/>
-        </p:nvSpPr>
-        <p:spPr>
-          <a:xfrm>
-            <a:off x="731520" y="3017520"/>
-            <a:ext cx="2194560" cy="274320"/>
-          </a:xfrm>
-          <a:prstGeom prst="rect">
-            <a:avLst/>
-          </a:prstGeom>
-          <a:noFill/>
-        </p:spPr>
-        <p:txBody>
-          <a:bodyPr wrap="square">
-            <a:spAutoFit/>
-          </a:bodyPr>
-          <a:lstStyle/>
-          <a:p>
-            <a:pPr algn="l">
-              <a:defRPr sz="1400" b="1">
-                <a:solidFill>
-                  <a:srgbClr val="1A365D"/>
-                </a:solidFill>
-                <a:latin typeface="Calibri"/>
-              </a:defRPr>
-            </a:pPr>
-            <a:r>
-              <a:t>ECDA QTT</a:t>
-            </a:r>
-          </a:p>
-        </p:txBody>
-      </p:sp>
-      <p:sp>
-        <p:nvSpPr>
-          <p:cNvPr id="23" name="TextBox 22"/>
-          <p:cNvSpPr txBox="1"/>
-          <p:nvPr/>
-        </p:nvSpPr>
-        <p:spPr>
-          <a:xfrm>
-            <a:off x="731520" y="3337560"/>
-            <a:ext cx="2194560" cy="274320"/>
-          </a:xfrm>
-          <a:prstGeom prst="rect">
-            <a:avLst/>
-          </a:prstGeom>
-          <a:noFill/>
-        </p:spPr>
-        <p:txBody>
-          <a:bodyPr wrap="square">
-            <a:spAutoFit/>
-          </a:bodyPr>
-          <a:lstStyle/>
-          <a:p>
-            <a:pPr algn="l">
-              <a:defRPr sz="900" b="1">
-                <a:solidFill>
-                  <a:srgbClr val="F0A500"/>
-                </a:solidFill>
-                <a:latin typeface="Calibri"/>
-              </a:defRPr>
-            </a:pPr>
-            <a:r>
-              <a:t>Quality</a:t>
-            </a:r>
-          </a:p>
-        </p:txBody>
-      </p:sp>
-      <p:sp>
-        <p:nvSpPr>
-          <p:cNvPr id="24" name="TextBox 23"/>
-          <p:cNvSpPr txBox="1"/>
-          <p:nvPr/>
-        </p:nvSpPr>
-        <p:spPr>
-          <a:xfrm>
-            <a:off x="731520" y="3611880"/>
-            <a:ext cx="2194560" cy="822960"/>
-          </a:xfrm>
-          <a:prstGeom prst="rect">
-            <a:avLst/>
-          </a:prstGeom>
-          <a:noFill/>
-        </p:spPr>
-        <p:txBody>
-          <a:bodyPr wrap="square">
-            <a:spAutoFit/>
-          </a:bodyPr>
-          <a:lstStyle/>
-          <a:p>
-            <a:pPr algn="l">
-              <a:defRPr sz="900" b="0">
-                <a:solidFill>
-                  <a:srgbClr val="64748B"/>
-                </a:solidFill>
-                <a:latin typeface="Calibri"/>
-              </a:defRPr>
-            </a:pPr>
-            <a:r>
-              <a:t>Quality Teaching Tool. Coaching engine built around QTT rubric domains. Director dashboard tracks QTT scores.</a:t>
-            </a:r>
-          </a:p>
-        </p:txBody>
-      </p:sp>
-      <p:sp>
-        <p:nvSpPr>
-          <p:cNvPr id="25" name="Rectangle 24"/>
-          <p:cNvSpPr/>
-          <p:nvPr/>
-        </p:nvSpPr>
-        <p:spPr>
-          <a:xfrm>
-            <a:off x="3383280" y="2926080"/>
-            <a:ext cx="2560320" cy="1645920"/>
-          </a:xfrm>
-          <a:prstGeom prst="rect">
-            <a:avLst/>
-          </a:prstGeom>
-          <a:solidFill>
-            <a:srgbClr val="F7F9FC"/>
-          </a:solidFill>
-          <a:ln>
-            <a:noFill/>
-          </a:ln>
-        </p:spPr>
-        <p:style>
-          <a:lnRef idx="1">
-            <a:schemeClr val="accent1"/>
-          </a:lnRef>
-          <a:fillRef idx="3">
-            <a:schemeClr val="accent1"/>
-          </a:fillRef>
-          <a:effectRef idx="2">
-            <a:schemeClr val="accent1"/>
-          </a:effectRef>
-          <a:fontRef idx="minor">
-            <a:schemeClr val="lt1"/>
-          </a:fontRef>
-        </p:style>
-        <p:txBody>
-          <a:bodyPr rtlCol="0" anchor="ctr"/>
-          <a:lstStyle/>
-          <a:p>
-            <a:pPr algn="ctr"/>
-          </a:p>
-        </p:txBody>
-      </p:sp>
-      <p:sp>
-        <p:nvSpPr>
-          <p:cNvPr id="26" name="Rectangle 25"/>
-          <p:cNvSpPr/>
-          <p:nvPr/>
-        </p:nvSpPr>
-        <p:spPr>
-          <a:xfrm>
-            <a:off x="3383280" y="2926080"/>
-            <a:ext cx="54864" cy="1645920"/>
-          </a:xfrm>
-          <a:prstGeom prst="rect">
-            <a:avLst/>
-          </a:prstGeom>
-          <a:solidFill>
-            <a:srgbClr val="8B5CF6"/>
-          </a:solidFill>
-          <a:ln>
-            <a:noFill/>
-          </a:ln>
-        </p:spPr>
-        <p:style>
-          <a:lnRef idx="1">
-            <a:schemeClr val="accent1"/>
-          </a:lnRef>
-          <a:fillRef idx="3">
-            <a:schemeClr val="accent1"/>
-          </a:fillRef>
-          <a:effectRef idx="2">
-            <a:schemeClr val="accent1"/>
-          </a:effectRef>
-          <a:fontRef idx="minor">
-            <a:schemeClr val="lt1"/>
-          </a:fontRef>
-        </p:style>
-        <p:txBody>
-          <a:bodyPr rtlCol="0" anchor="ctr"/>
-          <a:lstStyle/>
-          <a:p>
-            <a:pPr algn="ctr"/>
-          </a:p>
-        </p:txBody>
-      </p:sp>
-      <p:sp>
-        <p:nvSpPr>
-          <p:cNvPr id="27" name="TextBox 26"/>
-          <p:cNvSpPr txBox="1"/>
-          <p:nvPr/>
-        </p:nvSpPr>
-        <p:spPr>
-          <a:xfrm>
-            <a:off x="3566160" y="3017520"/>
-            <a:ext cx="2194560" cy="274320"/>
-          </a:xfrm>
-          <a:prstGeom prst="rect">
-            <a:avLst/>
-          </a:prstGeom>
-          <a:noFill/>
-        </p:spPr>
-        <p:txBody>
-          <a:bodyPr wrap="square">
-            <a:spAutoFit/>
-          </a:bodyPr>
-          <a:lstStyle/>
-          <a:p>
-            <a:pPr algn="l">
-              <a:defRPr sz="1400" b="1">
-                <a:solidFill>
-                  <a:srgbClr val="1A365D"/>
-                </a:solidFill>
-                <a:latin typeface="Calibri"/>
-              </a:defRPr>
-            </a:pPr>
-            <a:r>
-              <a:t>SFw for ECCE</a:t>
-            </a:r>
-          </a:p>
-        </p:txBody>
-      </p:sp>
-      <p:sp>
-        <p:nvSpPr>
-          <p:cNvPr id="28" name="TextBox 27"/>
-          <p:cNvSpPr txBox="1"/>
-          <p:nvPr/>
-        </p:nvSpPr>
-        <p:spPr>
-          <a:xfrm>
-            <a:off x="3566160" y="3337560"/>
-            <a:ext cx="2194560" cy="274320"/>
-          </a:xfrm>
-          <a:prstGeom prst="rect">
-            <a:avLst/>
-          </a:prstGeom>
-          <a:noFill/>
-        </p:spPr>
-        <p:txBody>
-          <a:bodyPr wrap="square">
-            <a:spAutoFit/>
-          </a:bodyPr>
-          <a:lstStyle/>
-          <a:p>
-            <a:pPr algn="l">
-              <a:defRPr sz="900" b="1">
-                <a:solidFill>
-                  <a:srgbClr val="8B5CF6"/>
-                </a:solidFill>
-                <a:latin typeface="Calibri"/>
-              </a:defRPr>
-            </a:pPr>
-            <a:r>
-              <a:t>Growth</a:t>
-            </a:r>
-          </a:p>
-        </p:txBody>
-      </p:sp>
-      <p:sp>
-        <p:nvSpPr>
-          <p:cNvPr id="29" name="TextBox 28"/>
-          <p:cNvSpPr txBox="1"/>
-          <p:nvPr/>
-        </p:nvSpPr>
-        <p:spPr>
-          <a:xfrm>
-            <a:off x="3566160" y="3611880"/>
-            <a:ext cx="2194560" cy="822960"/>
-          </a:xfrm>
-          <a:prstGeom prst="rect">
-            <a:avLst/>
-          </a:prstGeom>
-          <a:noFill/>
-        </p:spPr>
-        <p:txBody>
-          <a:bodyPr wrap="square">
-            <a:spAutoFit/>
-          </a:bodyPr>
-          <a:lstStyle/>
-          <a:p>
-            <a:pPr algn="l">
-              <a:defRPr sz="900" b="0">
-                <a:solidFill>
-                  <a:srgbClr val="64748B"/>
-                </a:solidFill>
-                <a:latin typeface="Calibri"/>
-              </a:defRPr>
-            </a:pPr>
-            <a:r>
-              <a:t>Skills Framework for Early Childhood. Professional development mapped to TSC codes. WSQ course recommendations.</a:t>
-            </a:r>
-          </a:p>
-        </p:txBody>
-      </p:sp>
-      <p:sp>
-        <p:nvSpPr>
-          <p:cNvPr id="30" name="Rectangle 29"/>
-          <p:cNvSpPr/>
-          <p:nvPr/>
-        </p:nvSpPr>
-        <p:spPr>
-          <a:xfrm>
-            <a:off x="6217920" y="2926080"/>
-            <a:ext cx="2560320" cy="1645920"/>
-          </a:xfrm>
-          <a:prstGeom prst="rect">
-            <a:avLst/>
-          </a:prstGeom>
-          <a:solidFill>
-            <a:srgbClr val="F7F9FC"/>
-          </a:solidFill>
-          <a:ln>
-            <a:noFill/>
-          </a:ln>
-        </p:spPr>
-        <p:style>
-          <a:lnRef idx="1">
-            <a:schemeClr val="accent1"/>
-          </a:lnRef>
-          <a:fillRef idx="3">
-            <a:schemeClr val="accent1"/>
-          </a:fillRef>
-          <a:effectRef idx="2">
-            <a:schemeClr val="accent1"/>
-          </a:effectRef>
-          <a:fontRef idx="minor">
-            <a:schemeClr val="lt1"/>
-          </a:fontRef>
-        </p:style>
-        <p:txBody>
-          <a:bodyPr rtlCol="0" anchor="ctr"/>
-          <a:lstStyle/>
-          <a:p>
-            <a:pPr algn="ctr"/>
-          </a:p>
-        </p:txBody>
-      </p:sp>
-      <p:sp>
-        <p:nvSpPr>
-          <p:cNvPr id="31" name="Rectangle 30"/>
-          <p:cNvSpPr/>
-          <p:nvPr/>
-        </p:nvSpPr>
-        <p:spPr>
-          <a:xfrm>
-            <a:off x="6217920" y="2926080"/>
-            <a:ext cx="54864" cy="1645920"/>
-          </a:xfrm>
-          <a:prstGeom prst="rect">
-            <a:avLst/>
-          </a:prstGeom>
-          <a:solidFill>
-            <a:srgbClr val="EF4444"/>
-          </a:solidFill>
-          <a:ln>
-            <a:noFill/>
-          </a:ln>
-        </p:spPr>
-        <p:style>
-          <a:lnRef idx="1">
-            <a:schemeClr val="accent1"/>
-          </a:lnRef>
-          <a:fillRef idx="3">
-            <a:schemeClr val="accent1"/>
-          </a:fillRef>
-          <a:effectRef idx="2">
-            <a:schemeClr val="accent1"/>
-          </a:effectRef>
-          <a:fontRef idx="minor">
-            <a:schemeClr val="lt1"/>
-          </a:fontRef>
-        </p:style>
-        <p:txBody>
-          <a:bodyPr rtlCol="0" anchor="ctr"/>
-          <a:lstStyle/>
-          <a:p>
-            <a:pPr algn="ctr"/>
-          </a:p>
-        </p:txBody>
-      </p:sp>
-      <p:sp>
-        <p:nvSpPr>
-          <p:cNvPr id="32" name="TextBox 31"/>
-          <p:cNvSpPr txBox="1"/>
-          <p:nvPr/>
-        </p:nvSpPr>
-        <p:spPr>
-          <a:xfrm>
-            <a:off x="6400800" y="3017520"/>
-            <a:ext cx="2194560" cy="274320"/>
-          </a:xfrm>
-          <a:prstGeom prst="rect">
-            <a:avLst/>
-          </a:prstGeom>
-          <a:noFill/>
-        </p:spPr>
-        <p:txBody>
-          <a:bodyPr wrap="square">
-            <a:spAutoFit/>
-          </a:bodyPr>
-          <a:lstStyle/>
-          <a:p>
-            <a:pPr algn="l">
-              <a:defRPr sz="1400" b="1">
-                <a:solidFill>
-                  <a:srgbClr val="1A365D"/>
-                </a:solidFill>
-                <a:latin typeface="Calibri"/>
-              </a:defRPr>
-            </a:pPr>
-            <a:r>
-              <a:t>PDPA</a:t>
-            </a:r>
-          </a:p>
-        </p:txBody>
-      </p:sp>
-      <p:sp>
-        <p:nvSpPr>
-          <p:cNvPr id="33" name="TextBox 32"/>
-          <p:cNvSpPr txBox="1"/>
-          <p:nvPr/>
-        </p:nvSpPr>
-        <p:spPr>
-          <a:xfrm>
-            <a:off x="6400800" y="3337560"/>
-            <a:ext cx="2194560" cy="274320"/>
-          </a:xfrm>
-          <a:prstGeom prst="rect">
-            <a:avLst/>
-          </a:prstGeom>
-          <a:noFill/>
-        </p:spPr>
-        <p:txBody>
-          <a:bodyPr wrap="square">
-            <a:spAutoFit/>
-          </a:bodyPr>
-          <a:lstStyle/>
-          <a:p>
-            <a:pPr algn="l">
-              <a:defRPr sz="900" b="1">
-                <a:solidFill>
-                  <a:srgbClr val="EF4444"/>
-                </a:solidFill>
-                <a:latin typeface="Calibri"/>
-              </a:defRPr>
-            </a:pPr>
-            <a:r>
-              <a:t>Compliance</a:t>
-            </a:r>
-          </a:p>
-        </p:txBody>
-      </p:sp>
-      <p:sp>
-        <p:nvSpPr>
-          <p:cNvPr id="34" name="TextBox 33"/>
-          <p:cNvSpPr txBox="1"/>
-          <p:nvPr/>
-        </p:nvSpPr>
-        <p:spPr>
-          <a:xfrm>
-            <a:off x="6400800" y="3611880"/>
-            <a:ext cx="2194560" cy="822960"/>
-          </a:xfrm>
-          <a:prstGeom prst="rect">
-            <a:avLst/>
-          </a:prstGeom>
-          <a:noFill/>
-        </p:spPr>
-        <p:txBody>
-          <a:bodyPr wrap="square">
-            <a:spAutoFit/>
-          </a:bodyPr>
-          <a:lstStyle/>
-          <a:p>
-            <a:pPr algn="l">
-              <a:defRPr sz="900" b="0">
-                <a:solidFill>
-                  <a:srgbClr val="64748B"/>
-                </a:solidFill>
-                <a:latin typeface="Calibri"/>
+                  <a:srgbClr val="6B7280"/>
+                </a:solidFill>
+                <a:latin typeface="Arial"/>
               </a:defRPr>
             </a:pPr>
             <a:r>
@@ -6319,7 +5209,7 @@
     <p:bg>
       <p:bgPr>
         <a:solidFill>
-          <a:srgbClr val="1A365D"/>
+          <a:srgbClr val="2D2A5E"/>
         </a:solidFill>
         <a:effectLst/>
       </p:bgPr>
@@ -6346,7 +5236,7 @@
             <a:avLst/>
           </a:prstGeom>
           <a:solidFill>
-            <a:srgbClr val="152A4A"/>
+            <a:srgbClr val="1A1535"/>
           </a:solidFill>
           <a:ln>
             <a:noFill/>
@@ -6389,7 +5279,7 @@
             <a:avLst/>
           </a:prstGeom>
           <a:solidFill>
-            <a:srgbClr val="0E7C6B"/>
+            <a:srgbClr val="01ABAA"/>
           </a:solidFill>
           <a:ln>
             <a:noFill/>
@@ -6444,7 +5334,7 @@
                 <a:solidFill>
                   <a:srgbClr val="FFFFFF"/>
                 </a:solidFill>
-                <a:latin typeface="Calibri"/>
+                <a:latin typeface="Arial"/>
               </a:defRPr>
             </a:pPr>
             <a:r>
@@ -6478,9 +5368,9 @@
             <a:pPr algn="ctr">
               <a:defRPr sz="2000" b="0">
                 <a:solidFill>
-                  <a:srgbClr val="AACCDD"/>
-                </a:solidFill>
-                <a:latin typeface="Calibri"/>
+                  <a:srgbClr val="C8B8E0"/>
+                </a:solidFill>
+                <a:latin typeface="Arial"/>
               </a:defRPr>
             </a:pPr>
             <a:r>
@@ -6514,9 +5404,9 @@
             <a:pPr algn="ctr">
               <a:defRPr sz="1300" b="0">
                 <a:solidFill>
-                  <a:srgbClr val="8BAACC"/>
-                </a:solidFill>
-                <a:latin typeface="Calibri"/>
+                  <a:srgbClr val="B8A0D0"/>
+                </a:solidFill>
+                <a:latin typeface="Arial"/>
               </a:defRPr>
             </a:pPr>
             <a:r>
@@ -6550,9 +5440,9 @@
             <a:pPr algn="ctr">
               <a:defRPr sz="1300" b="0">
                 <a:solidFill>
-                  <a:srgbClr val="8BAACC"/>
-                </a:solidFill>
-                <a:latin typeface="Calibri"/>
+                  <a:srgbClr val="B8A0D0"/>
+                </a:solidFill>
+                <a:latin typeface="Arial"/>
               </a:defRPr>
             </a:pPr>
             <a:r>
@@ -6586,9 +5476,9 @@
             <a:pPr algn="ctr">
               <a:defRPr sz="1300" b="0">
                 <a:solidFill>
-                  <a:srgbClr val="8BAACC"/>
-                </a:solidFill>
-                <a:latin typeface="Calibri"/>
+                  <a:srgbClr val="B8A0D0"/>
+                </a:solidFill>
+                <a:latin typeface="Arial"/>
               </a:defRPr>
             </a:pPr>
             <a:r>
@@ -6622,9 +5512,9 @@
             <a:pPr algn="ctr">
               <a:defRPr sz="1300" b="0">
                 <a:solidFill>
-                  <a:srgbClr val="8BAACC"/>
-                </a:solidFill>
-                <a:latin typeface="Calibri"/>
+                  <a:srgbClr val="B8A0D0"/>
+                </a:solidFill>
+                <a:latin typeface="Arial"/>
               </a:defRPr>
             </a:pPr>
             <a:r>
@@ -6648,7 +5538,7 @@
             <a:avLst/>
           </a:prstGeom>
           <a:solidFill>
-            <a:srgbClr val="0E7C6B"/>
+            <a:srgbClr val="01ABAA"/>
           </a:solidFill>
           <a:ln>
             <a:noFill/>
@@ -6703,11 +5593,11 @@
                 <a:solidFill>
                   <a:srgbClr val="FFFFFF"/>
                 </a:solidFill>
-                <a:latin typeface="Calibri"/>
-              </a:defRPr>
-            </a:pPr>
-            <a:r>
-              <a:t>SGD $125,000  |  12 Months  |  IDP 2.0 Aligned</a:t>
+                <a:latin typeface="Arial"/>
+              </a:defRPr>
+            </a:pPr>
+            <a:r>
+              <a:t>SGD $20,000  |  6 Months  |  IDP 2.0 Aligned</a:t>
             </a:r>
           </a:p>
         </p:txBody>
@@ -6753,7 +5643,7 @@
             <a:avLst/>
           </a:prstGeom>
           <a:solidFill>
-            <a:srgbClr val="0E7C6B"/>
+            <a:srgbClr val="01ABAA"/>
           </a:solidFill>
           <a:ln>
             <a:noFill/>
@@ -6806,9 +5696,9 @@
             <a:pPr algn="l">
               <a:defRPr sz="1000" b="1">
                 <a:solidFill>
-                  <a:srgbClr val="0E7C6B"/>
-                </a:solidFill>
-                <a:latin typeface="Calibri"/>
+                  <a:srgbClr val="01ABAA"/>
+                </a:solidFill>
+                <a:latin typeface="Arial"/>
               </a:defRPr>
             </a:pPr>
             <a:r>
@@ -6842,9 +5732,9 @@
             <a:pPr algn="l">
               <a:defRPr sz="2600" b="1">
                 <a:solidFill>
-                  <a:srgbClr val="1A365D"/>
-                </a:solidFill>
-                <a:latin typeface="Calibri"/>
+                  <a:srgbClr val="2D2A5E"/>
+                </a:solidFill>
+                <a:latin typeface="Arial"/>
               </a:defRPr>
             </a:pPr>
             <a:r>
@@ -6878,9 +5768,9 @@
             <a:pPr algn="l">
               <a:defRPr sz="1300" b="0">
                 <a:solidFill>
-                  <a:srgbClr val="64748B"/>
-                </a:solidFill>
-                <a:latin typeface="Calibri"/>
+                  <a:srgbClr val="6B7280"/>
+                </a:solidFill>
+                <a:latin typeface="Arial"/>
               </a:defRPr>
             </a:pPr>
             <a:r>
@@ -6904,7 +5794,7 @@
             <a:avLst/>
           </a:prstGeom>
           <a:solidFill>
-            <a:srgbClr val="F7F9FC"/>
+            <a:srgbClr val="FAF6F0"/>
           </a:solidFill>
           <a:ln>
             <a:noFill/>
@@ -6934,20 +5824,164 @@
       </p:sp>
       <p:sp>
         <p:nvSpPr>
-          <p:cNvPr id="7" name="Rectangle 6"/>
+          <p:cNvPr id="7" name="TextBox 6"/>
+          <p:cNvSpPr txBox="1"/>
+          <p:nvPr/>
+        </p:nvSpPr>
+        <p:spPr>
+          <a:xfrm>
+            <a:off x="731520" y="1828800"/>
+            <a:ext cx="2194560" cy="274320"/>
+          </a:xfrm>
+          <a:prstGeom prst="rect">
+            <a:avLst/>
+          </a:prstGeom>
+          <a:noFill/>
+        </p:spPr>
+        <p:txBody>
+          <a:bodyPr wrap="square">
+            <a:spAutoFit/>
+          </a:bodyPr>
+          <a:lstStyle/>
+          <a:p>
+            <a:pPr algn="l">
+              <a:defRPr sz="1300" b="1">
+                <a:solidFill>
+                  <a:srgbClr val="2D2A5E"/>
+                </a:solidFill>
+                <a:latin typeface="Arial"/>
+              </a:defRPr>
+            </a:pPr>
+            <a:r>
+              <a:t>Emotional Exhaustion</a:t>
+            </a:r>
+          </a:p>
+        </p:txBody>
+      </p:sp>
+      <p:sp>
+        <p:nvSpPr>
+          <p:cNvPr id="8" name="TextBox 7"/>
+          <p:cNvSpPr txBox="1"/>
+          <p:nvPr/>
+        </p:nvSpPr>
+        <p:spPr>
+          <a:xfrm>
+            <a:off x="731520" y="2194560"/>
+            <a:ext cx="2194560" cy="548640"/>
+          </a:xfrm>
+          <a:prstGeom prst="rect">
+            <a:avLst/>
+          </a:prstGeom>
+          <a:noFill/>
+        </p:spPr>
+        <p:txBody>
+          <a:bodyPr wrap="square">
+            <a:spAutoFit/>
+          </a:bodyPr>
+          <a:lstStyle/>
+          <a:p>
+            <a:pPr algn="l">
+              <a:defRPr sz="3200" b="1">
+                <a:solidFill>
+                  <a:srgbClr val="E8063C"/>
+                </a:solidFill>
+                <a:latin typeface="Arial"/>
+              </a:defRPr>
+            </a:pPr>
+            <a:r>
+              <a:t>8 hrs/week</a:t>
+            </a:r>
+          </a:p>
+        </p:txBody>
+      </p:sp>
+      <p:sp>
+        <p:nvSpPr>
+          <p:cNvPr id="9" name="TextBox 8"/>
+          <p:cNvSpPr txBox="1"/>
+          <p:nvPr/>
+        </p:nvSpPr>
+        <p:spPr>
+          <a:xfrm>
+            <a:off x="731520" y="2697480"/>
+            <a:ext cx="2194560" cy="274320"/>
+          </a:xfrm>
+          <a:prstGeom prst="rect">
+            <a:avLst/>
+          </a:prstGeom>
+          <a:noFill/>
+        </p:spPr>
+        <p:txBody>
+          <a:bodyPr wrap="square">
+            <a:spAutoFit/>
+          </a:bodyPr>
+          <a:lstStyle/>
+          <a:p>
+            <a:pPr algn="l">
+              <a:defRPr sz="1100" b="0">
+                <a:solidFill>
+                  <a:srgbClr val="6B7280"/>
+                </a:solidFill>
+                <a:latin typeface="Arial"/>
+              </a:defRPr>
+            </a:pPr>
+            <a:r>
+              <a:t>on documentation</a:t>
+            </a:r>
+          </a:p>
+        </p:txBody>
+      </p:sp>
+      <p:sp>
+        <p:nvSpPr>
+          <p:cNvPr id="10" name="TextBox 9"/>
+          <p:cNvSpPr txBox="1"/>
+          <p:nvPr/>
+        </p:nvSpPr>
+        <p:spPr>
+          <a:xfrm>
+            <a:off x="731520" y="3108960"/>
+            <a:ext cx="2194560" cy="1371600"/>
+          </a:xfrm>
+          <a:prstGeom prst="rect">
+            <a:avLst/>
+          </a:prstGeom>
+          <a:noFill/>
+        </p:spPr>
+        <p:txBody>
+          <a:bodyPr wrap="square">
+            <a:spAutoFit/>
+          </a:bodyPr>
+          <a:lstStyle/>
+          <a:p>
+            <a:pPr algn="l">
+              <a:defRPr sz="1000" b="0">
+                <a:solidFill>
+                  <a:srgbClr val="6B7280"/>
+                </a:solidFill>
+                <a:latin typeface="Arial"/>
+              </a:defRPr>
+            </a:pPr>
+            <a:r>
+              <a:t>Administrative compliance tasks cause severe emotional exhaustion. Educators spend evenings and weekends on paperwork.</a:t>
+            </a:r>
+          </a:p>
+        </p:txBody>
+      </p:sp>
+      <p:sp>
+        <p:nvSpPr>
+          <p:cNvPr id="11" name="Rectangle 10"/>
           <p:cNvSpPr/>
           <p:nvPr/>
         </p:nvSpPr>
         <p:spPr>
           <a:xfrm>
-            <a:off x="548640" y="1645920"/>
-            <a:ext cx="2560320" cy="54864"/>
+            <a:off x="3383280" y="1645920"/>
+            <a:ext cx="2560320" cy="3108960"/>
           </a:xfrm>
           <a:prstGeom prst="rect">
             <a:avLst/>
           </a:prstGeom>
           <a:solidFill>
-            <a:srgbClr val="EF4444"/>
+            <a:srgbClr val="FAF6F0"/>
           </a:solidFill>
           <a:ln>
             <a:noFill/>
@@ -6977,13 +6011,13 @@
       </p:sp>
       <p:sp>
         <p:nvSpPr>
-          <p:cNvPr id="8" name="TextBox 7"/>
-          <p:cNvSpPr txBox="1"/>
-          <p:nvPr/>
-        </p:nvSpPr>
-        <p:spPr>
-          <a:xfrm>
-            <a:off x="731520" y="1828800"/>
+          <p:cNvPr id="12" name="TextBox 11"/>
+          <p:cNvSpPr txBox="1"/>
+          <p:nvPr/>
+        </p:nvSpPr>
+        <p:spPr>
+          <a:xfrm>
+            <a:off x="3566160" y="1828800"/>
             <a:ext cx="2194560" cy="274320"/>
           </a:xfrm>
           <a:prstGeom prst="rect">
@@ -7000,26 +6034,26 @@
             <a:pPr algn="l">
               <a:defRPr sz="1300" b="1">
                 <a:solidFill>
-                  <a:srgbClr val="1A365D"/>
-                </a:solidFill>
-                <a:latin typeface="Calibri"/>
-              </a:defRPr>
-            </a:pPr>
-            <a:r>
-              <a:t>Emotional Exhaustion</a:t>
-            </a:r>
-          </a:p>
-        </p:txBody>
-      </p:sp>
-      <p:sp>
-        <p:nvSpPr>
-          <p:cNvPr id="9" name="TextBox 8"/>
-          <p:cNvSpPr txBox="1"/>
-          <p:nvPr/>
-        </p:nvSpPr>
-        <p:spPr>
-          <a:xfrm>
-            <a:off x="731520" y="2194560"/>
+                  <a:srgbClr val="2D2A5E"/>
+                </a:solidFill>
+                <a:latin typeface="Arial"/>
+              </a:defRPr>
+            </a:pPr>
+            <a:r>
+              <a:t>Pedagogical Compromise</a:t>
+            </a:r>
+          </a:p>
+        </p:txBody>
+      </p:sp>
+      <p:sp>
+        <p:nvSpPr>
+          <p:cNvPr id="13" name="TextBox 12"/>
+          <p:cNvSpPr txBox="1"/>
+          <p:nvPr/>
+        </p:nvSpPr>
+        <p:spPr>
+          <a:xfrm>
+            <a:off x="3566160" y="2194560"/>
             <a:ext cx="2194560" cy="548640"/>
           </a:xfrm>
           <a:prstGeom prst="rect">
@@ -7036,26 +6070,26 @@
             <a:pPr algn="l">
               <a:defRPr sz="3200" b="1">
                 <a:solidFill>
-                  <a:srgbClr val="EF4444"/>
-                </a:solidFill>
-                <a:latin typeface="Calibri"/>
-              </a:defRPr>
-            </a:pPr>
-            <a:r>
-              <a:t>8 hrs/week</a:t>
-            </a:r>
-          </a:p>
-        </p:txBody>
-      </p:sp>
-      <p:sp>
-        <p:nvSpPr>
-          <p:cNvPr id="10" name="TextBox 9"/>
-          <p:cNvSpPr txBox="1"/>
-          <p:nvPr/>
-        </p:nvSpPr>
-        <p:spPr>
-          <a:xfrm>
-            <a:off x="731520" y="2697480"/>
+                  <a:srgbClr val="FF9E18"/>
+                </a:solidFill>
+                <a:latin typeface="Arial"/>
+              </a:defRPr>
+            </a:pPr>
+            <a:r>
+              <a:t>35% less</a:t>
+            </a:r>
+          </a:p>
+        </p:txBody>
+      </p:sp>
+      <p:sp>
+        <p:nvSpPr>
+          <p:cNvPr id="14" name="TextBox 13"/>
+          <p:cNvSpPr txBox="1"/>
+          <p:nvPr/>
+        </p:nvSpPr>
+        <p:spPr>
+          <a:xfrm>
+            <a:off x="3566160" y="2697480"/>
             <a:ext cx="2194560" cy="274320"/>
           </a:xfrm>
           <a:prstGeom prst="rect">
@@ -7072,26 +6106,26 @@
             <a:pPr algn="l">
               <a:defRPr sz="1100" b="0">
                 <a:solidFill>
-                  <a:srgbClr val="64748B"/>
-                </a:solidFill>
-                <a:latin typeface="Calibri"/>
-              </a:defRPr>
-            </a:pPr>
-            <a:r>
-              <a:t>on documentation</a:t>
-            </a:r>
-          </a:p>
-        </p:txBody>
-      </p:sp>
-      <p:sp>
-        <p:nvSpPr>
-          <p:cNvPr id="11" name="TextBox 10"/>
-          <p:cNvSpPr txBox="1"/>
-          <p:nvPr/>
-        </p:nvSpPr>
-        <p:spPr>
-          <a:xfrm>
-            <a:off x="731520" y="3108960"/>
+                  <a:srgbClr val="6B7280"/>
+                </a:solidFill>
+                <a:latin typeface="Arial"/>
+              </a:defRPr>
+            </a:pPr>
+            <a:r>
+              <a:t>interaction time</a:t>
+            </a:r>
+          </a:p>
+        </p:txBody>
+      </p:sp>
+      <p:sp>
+        <p:nvSpPr>
+          <p:cNvPr id="15" name="TextBox 14"/>
+          <p:cNvSpPr txBox="1"/>
+          <p:nvPr/>
+        </p:nvSpPr>
+        <p:spPr>
+          <a:xfrm>
+            <a:off x="3566160" y="3108960"/>
             <a:ext cx="2194560" cy="1371600"/>
           </a:xfrm>
           <a:prstGeom prst="rect">
@@ -7108,33 +6142,33 @@
             <a:pPr algn="l">
               <a:defRPr sz="1000" b="0">
                 <a:solidFill>
-                  <a:srgbClr val="64748B"/>
-                </a:solidFill>
-                <a:latin typeface="Calibri"/>
-              </a:defRPr>
-            </a:pPr>
-            <a:r>
-              <a:t>Administrative compliance tasks cause severe emotional exhaustion. Educators spend evenings and weekends on paperwork.</a:t>
-            </a:r>
-          </a:p>
-        </p:txBody>
-      </p:sp>
-      <p:sp>
-        <p:nvSpPr>
-          <p:cNvPr id="12" name="Rectangle 11"/>
+                  <a:srgbClr val="6B7280"/>
+                </a:solidFill>
+                <a:latin typeface="Arial"/>
+              </a:defRPr>
+            </a:pPr>
+            <a:r>
+              <a:t>Cognitive overload from multi-framework documentation forces one-size-fits-all planning, reducing individualised learning.</a:t>
+            </a:r>
+          </a:p>
+        </p:txBody>
+      </p:sp>
+      <p:sp>
+        <p:nvSpPr>
+          <p:cNvPr id="16" name="Rectangle 15"/>
           <p:cNvSpPr/>
           <p:nvPr/>
         </p:nvSpPr>
         <p:spPr>
           <a:xfrm>
-            <a:off x="3383280" y="1645920"/>
+            <a:off x="6217920" y="1645920"/>
             <a:ext cx="2560320" cy="3108960"/>
           </a:xfrm>
           <a:prstGeom prst="rect">
             <a:avLst/>
           </a:prstGeom>
           <a:solidFill>
-            <a:srgbClr val="F7F9FC"/>
+            <a:srgbClr val="FAF6F0"/>
           </a:solidFill>
           <a:ln>
             <a:noFill/>
@@ -7164,56 +6198,13 @@
       </p:sp>
       <p:sp>
         <p:nvSpPr>
-          <p:cNvPr id="13" name="Rectangle 12"/>
-          <p:cNvSpPr/>
-          <p:nvPr/>
-        </p:nvSpPr>
-        <p:spPr>
-          <a:xfrm>
-            <a:off x="3383280" y="1645920"/>
-            <a:ext cx="2560320" cy="54864"/>
-          </a:xfrm>
-          <a:prstGeom prst="rect">
-            <a:avLst/>
-          </a:prstGeom>
-          <a:solidFill>
-            <a:srgbClr val="F59E0B"/>
-          </a:solidFill>
-          <a:ln>
-            <a:noFill/>
-          </a:ln>
-        </p:spPr>
-        <p:style>
-          <a:lnRef idx="1">
-            <a:schemeClr val="accent1"/>
-          </a:lnRef>
-          <a:fillRef idx="3">
-            <a:schemeClr val="accent1"/>
-          </a:fillRef>
-          <a:effectRef idx="2">
-            <a:schemeClr val="accent1"/>
-          </a:effectRef>
-          <a:fontRef idx="minor">
-            <a:schemeClr val="lt1"/>
-          </a:fontRef>
-        </p:style>
-        <p:txBody>
-          <a:bodyPr rtlCol="0" anchor="ctr"/>
-          <a:lstStyle/>
-          <a:p>
-            <a:pPr algn="ctr"/>
-          </a:p>
-        </p:txBody>
-      </p:sp>
-      <p:sp>
-        <p:nvSpPr>
-          <p:cNvPr id="14" name="TextBox 13"/>
-          <p:cNvSpPr txBox="1"/>
-          <p:nvPr/>
-        </p:nvSpPr>
-        <p:spPr>
-          <a:xfrm>
-            <a:off x="3566160" y="1828800"/>
+          <p:cNvPr id="17" name="TextBox 16"/>
+          <p:cNvSpPr txBox="1"/>
+          <p:nvPr/>
+        </p:nvSpPr>
+        <p:spPr>
+          <a:xfrm>
+            <a:off x="6400800" y="1828800"/>
             <a:ext cx="2194560" cy="274320"/>
           </a:xfrm>
           <a:prstGeom prst="rect">
@@ -7230,26 +6221,26 @@
             <a:pPr algn="l">
               <a:defRPr sz="1300" b="1">
                 <a:solidFill>
-                  <a:srgbClr val="1A365D"/>
-                </a:solidFill>
-                <a:latin typeface="Calibri"/>
-              </a:defRPr>
-            </a:pPr>
-            <a:r>
-              <a:t>Pedagogical Compromise</a:t>
-            </a:r>
-          </a:p>
-        </p:txBody>
-      </p:sp>
-      <p:sp>
-        <p:nvSpPr>
-          <p:cNvPr id="15" name="TextBox 14"/>
-          <p:cNvSpPr txBox="1"/>
-          <p:nvPr/>
-        </p:nvSpPr>
-        <p:spPr>
-          <a:xfrm>
-            <a:off x="3566160" y="2194560"/>
+                  <a:srgbClr val="2D2A5E"/>
+                </a:solidFill>
+                <a:latin typeface="Arial"/>
+              </a:defRPr>
+            </a:pPr>
+            <a:r>
+              <a:t>Siloed Leadership</a:t>
+            </a:r>
+          </a:p>
+        </p:txBody>
+      </p:sp>
+      <p:sp>
+        <p:nvSpPr>
+          <p:cNvPr id="18" name="TextBox 17"/>
+          <p:cNvSpPr txBox="1"/>
+          <p:nvPr/>
+        </p:nvSpPr>
+        <p:spPr>
+          <a:xfrm>
+            <a:off x="6400800" y="2194560"/>
             <a:ext cx="2194560" cy="548640"/>
           </a:xfrm>
           <a:prstGeom prst="rect">
@@ -7266,26 +6257,26 @@
             <a:pPr algn="l">
               <a:defRPr sz="3200" b="1">
                 <a:solidFill>
-                  <a:srgbClr val="F59E0B"/>
-                </a:solidFill>
-                <a:latin typeface="Calibri"/>
-              </a:defRPr>
-            </a:pPr>
-            <a:r>
-              <a:t>35% less</a:t>
-            </a:r>
-          </a:p>
-        </p:txBody>
-      </p:sp>
-      <p:sp>
-        <p:nvSpPr>
-          <p:cNvPr id="16" name="TextBox 15"/>
-          <p:cNvSpPr txBox="1"/>
-          <p:nvPr/>
-        </p:nvSpPr>
-        <p:spPr>
-          <a:xfrm>
-            <a:off x="3566160" y="2697480"/>
+                  <a:srgbClr val="3B82F6"/>
+                </a:solidFill>
+                <a:latin typeface="Arial"/>
+              </a:defRPr>
+            </a:pPr>
+            <a:r>
+              <a:t>Zero</a:t>
+            </a:r>
+          </a:p>
+        </p:txBody>
+      </p:sp>
+      <p:sp>
+        <p:nvSpPr>
+          <p:cNvPr id="19" name="TextBox 18"/>
+          <p:cNvSpPr txBox="1"/>
+          <p:nvPr/>
+        </p:nvSpPr>
+        <p:spPr>
+          <a:xfrm>
+            <a:off x="6400800" y="2697480"/>
             <a:ext cx="2194560" cy="274320"/>
           </a:xfrm>
           <a:prstGeom prst="rect">
@@ -7302,26 +6293,26 @@
             <a:pPr algn="l">
               <a:defRPr sz="1100" b="0">
                 <a:solidFill>
-                  <a:srgbClr val="64748B"/>
-                </a:solidFill>
-                <a:latin typeface="Calibri"/>
-              </a:defRPr>
-            </a:pPr>
-            <a:r>
-              <a:t>interaction time</a:t>
-            </a:r>
-          </a:p>
-        </p:txBody>
-      </p:sp>
-      <p:sp>
-        <p:nvSpPr>
-          <p:cNvPr id="17" name="TextBox 16"/>
-          <p:cNvSpPr txBox="1"/>
-          <p:nvPr/>
-        </p:nvSpPr>
-        <p:spPr>
-          <a:xfrm>
-            <a:off x="3566160" y="3108960"/>
+                  <a:srgbClr val="6B7280"/>
+                </a:solidFill>
+                <a:latin typeface="Arial"/>
+              </a:defRPr>
+            </a:pPr>
+            <a:r>
+              <a:t>real-time visibility</a:t>
+            </a:r>
+          </a:p>
+        </p:txBody>
+      </p:sp>
+      <p:sp>
+        <p:nvSpPr>
+          <p:cNvPr id="20" name="TextBox 19"/>
+          <p:cNvSpPr txBox="1"/>
+          <p:nvPr/>
+        </p:nvSpPr>
+        <p:spPr>
+          <a:xfrm>
+            <a:off x="6400800" y="3108960"/>
             <a:ext cx="2194560" cy="1371600"/>
           </a:xfrm>
           <a:prstGeom prst="rect">
@@ -7338,135 +6329,13 @@
             <a:pPr algn="l">
               <a:defRPr sz="1000" b="0">
                 <a:solidFill>
-                  <a:srgbClr val="64748B"/>
-                </a:solidFill>
-                <a:latin typeface="Calibri"/>
-              </a:defRPr>
-            </a:pPr>
-            <a:r>
-              <a:t>Cognitive overload from multi-framework documentation forces one-size-fits-all planning, reducing individualized learning.</a:t>
-            </a:r>
-          </a:p>
-        </p:txBody>
-      </p:sp>
-      <p:sp>
-        <p:nvSpPr>
-          <p:cNvPr id="18" name="Rectangle 17"/>
-          <p:cNvSpPr/>
-          <p:nvPr/>
-        </p:nvSpPr>
-        <p:spPr>
-          <a:xfrm>
-            <a:off x="6217920" y="1645920"/>
-            <a:ext cx="2560320" cy="3108960"/>
-          </a:xfrm>
-          <a:prstGeom prst="rect">
-            <a:avLst/>
-          </a:prstGeom>
-          <a:solidFill>
-            <a:srgbClr val="F7F9FC"/>
-          </a:solidFill>
-          <a:ln>
-            <a:noFill/>
-          </a:ln>
-        </p:spPr>
-        <p:style>
-          <a:lnRef idx="1">
-            <a:schemeClr val="accent1"/>
-          </a:lnRef>
-          <a:fillRef idx="3">
-            <a:schemeClr val="accent1"/>
-          </a:fillRef>
-          <a:effectRef idx="2">
-            <a:schemeClr val="accent1"/>
-          </a:effectRef>
-          <a:fontRef idx="minor">
-            <a:schemeClr val="lt1"/>
-          </a:fontRef>
-        </p:style>
-        <p:txBody>
-          <a:bodyPr rtlCol="0" anchor="ctr"/>
-          <a:lstStyle/>
-          <a:p>
-            <a:pPr algn="ctr"/>
-          </a:p>
-        </p:txBody>
-      </p:sp>
-      <p:sp>
-        <p:nvSpPr>
-          <p:cNvPr id="19" name="Rectangle 18"/>
-          <p:cNvSpPr/>
-          <p:nvPr/>
-        </p:nvSpPr>
-        <p:spPr>
-          <a:xfrm>
-            <a:off x="6217920" y="1645920"/>
-            <a:ext cx="2560320" cy="54864"/>
-          </a:xfrm>
-          <a:prstGeom prst="rect">
-            <a:avLst/>
-          </a:prstGeom>
-          <a:solidFill>
-            <a:srgbClr val="3B82F6"/>
-          </a:solidFill>
-          <a:ln>
-            <a:noFill/>
-          </a:ln>
-        </p:spPr>
-        <p:style>
-          <a:lnRef idx="1">
-            <a:schemeClr val="accent1"/>
-          </a:lnRef>
-          <a:fillRef idx="3">
-            <a:schemeClr val="accent1"/>
-          </a:fillRef>
-          <a:effectRef idx="2">
-            <a:schemeClr val="accent1"/>
-          </a:effectRef>
-          <a:fontRef idx="minor">
-            <a:schemeClr val="lt1"/>
-          </a:fontRef>
-        </p:style>
-        <p:txBody>
-          <a:bodyPr rtlCol="0" anchor="ctr"/>
-          <a:lstStyle/>
-          <a:p>
-            <a:pPr algn="ctr"/>
-          </a:p>
-        </p:txBody>
-      </p:sp>
-      <p:sp>
-        <p:nvSpPr>
-          <p:cNvPr id="20" name="TextBox 19"/>
-          <p:cNvSpPr txBox="1"/>
-          <p:nvPr/>
-        </p:nvSpPr>
-        <p:spPr>
-          <a:xfrm>
-            <a:off x="6400800" y="1828800"/>
-            <a:ext cx="2194560" cy="274320"/>
-          </a:xfrm>
-          <a:prstGeom prst="rect">
-            <a:avLst/>
-          </a:prstGeom>
-          <a:noFill/>
-        </p:spPr>
-        <p:txBody>
-          <a:bodyPr wrap="square">
-            <a:spAutoFit/>
-          </a:bodyPr>
-          <a:lstStyle/>
-          <a:p>
-            <a:pPr algn="l">
-              <a:defRPr sz="1300" b="1">
-                <a:solidFill>
-                  <a:srgbClr val="1A365D"/>
-                </a:solidFill>
-                <a:latin typeface="Calibri"/>
-              </a:defRPr>
-            </a:pPr>
-            <a:r>
-              <a:t>Siloed Leadership</a:t>
+                  <a:srgbClr val="6B7280"/>
+                </a:solidFill>
+                <a:latin typeface="Arial"/>
+              </a:defRPr>
+            </a:pPr>
+            <a:r>
+              <a:t>Directors lack data on daily pedagogical quality. Annual appraisals are subjective and disconnected from the Skills Framework.</a:t>
             </a:r>
           </a:p>
         </p:txBody>
@@ -7474,114 +6343,6 @@
       <p:sp>
         <p:nvSpPr>
           <p:cNvPr id="21" name="TextBox 20"/>
-          <p:cNvSpPr txBox="1"/>
-          <p:nvPr/>
-        </p:nvSpPr>
-        <p:spPr>
-          <a:xfrm>
-            <a:off x="6400800" y="2194560"/>
-            <a:ext cx="2194560" cy="548640"/>
-          </a:xfrm>
-          <a:prstGeom prst="rect">
-            <a:avLst/>
-          </a:prstGeom>
-          <a:noFill/>
-        </p:spPr>
-        <p:txBody>
-          <a:bodyPr wrap="square">
-            <a:spAutoFit/>
-          </a:bodyPr>
-          <a:lstStyle/>
-          <a:p>
-            <a:pPr algn="l">
-              <a:defRPr sz="3200" b="1">
-                <a:solidFill>
-                  <a:srgbClr val="3B82F6"/>
-                </a:solidFill>
-                <a:latin typeface="Calibri"/>
-              </a:defRPr>
-            </a:pPr>
-            <a:r>
-              <a:t>Zero</a:t>
-            </a:r>
-          </a:p>
-        </p:txBody>
-      </p:sp>
-      <p:sp>
-        <p:nvSpPr>
-          <p:cNvPr id="22" name="TextBox 21"/>
-          <p:cNvSpPr txBox="1"/>
-          <p:nvPr/>
-        </p:nvSpPr>
-        <p:spPr>
-          <a:xfrm>
-            <a:off x="6400800" y="2697480"/>
-            <a:ext cx="2194560" cy="274320"/>
-          </a:xfrm>
-          <a:prstGeom prst="rect">
-            <a:avLst/>
-          </a:prstGeom>
-          <a:noFill/>
-        </p:spPr>
-        <p:txBody>
-          <a:bodyPr wrap="square">
-            <a:spAutoFit/>
-          </a:bodyPr>
-          <a:lstStyle/>
-          <a:p>
-            <a:pPr algn="l">
-              <a:defRPr sz="1100" b="0">
-                <a:solidFill>
-                  <a:srgbClr val="64748B"/>
-                </a:solidFill>
-                <a:latin typeface="Calibri"/>
-              </a:defRPr>
-            </a:pPr>
-            <a:r>
-              <a:t>real-time visibility</a:t>
-            </a:r>
-          </a:p>
-        </p:txBody>
-      </p:sp>
-      <p:sp>
-        <p:nvSpPr>
-          <p:cNvPr id="23" name="TextBox 22"/>
-          <p:cNvSpPr txBox="1"/>
-          <p:nvPr/>
-        </p:nvSpPr>
-        <p:spPr>
-          <a:xfrm>
-            <a:off x="6400800" y="3108960"/>
-            <a:ext cx="2194560" cy="1371600"/>
-          </a:xfrm>
-          <a:prstGeom prst="rect">
-            <a:avLst/>
-          </a:prstGeom>
-          <a:noFill/>
-        </p:spPr>
-        <p:txBody>
-          <a:bodyPr wrap="square">
-            <a:spAutoFit/>
-          </a:bodyPr>
-          <a:lstStyle/>
-          <a:p>
-            <a:pPr algn="l">
-              <a:defRPr sz="1000" b="0">
-                <a:solidFill>
-                  <a:srgbClr val="64748B"/>
-                </a:solidFill>
-                <a:latin typeface="Calibri"/>
-              </a:defRPr>
-            </a:pPr>
-            <a:r>
-              <a:t>Directors lack data on daily pedagogical quality. Annual appraisals are subjective and disconnected from the Skills Framework.</a:t>
-            </a:r>
-          </a:p>
-        </p:txBody>
-      </p:sp>
-      <p:sp>
-        <p:nvSpPr>
-          <p:cNvPr id="24" name="TextBox 23"/>
           <p:cNvSpPr txBox="1"/>
           <p:nvPr/>
         </p:nvSpPr>
@@ -7604,9 +6365,9 @@
             <a:pPr algn="r">
               <a:defRPr sz="800" b="0">
                 <a:solidFill>
-                  <a:srgbClr val="64748B"/>
-                </a:solidFill>
-                <a:latin typeface="Calibri"/>
+                  <a:srgbClr val="6B7280"/>
+                </a:solidFill>
+                <a:latin typeface="Arial"/>
               </a:defRPr>
             </a:pPr>
             <a:r>
@@ -7656,7 +6417,7 @@
             <a:avLst/>
           </a:prstGeom>
           <a:solidFill>
-            <a:srgbClr val="0E7C6B"/>
+            <a:srgbClr val="01ABAA"/>
           </a:solidFill>
           <a:ln>
             <a:noFill/>
@@ -7709,9 +6470,9 @@
             <a:pPr algn="l">
               <a:defRPr sz="1000" b="1">
                 <a:solidFill>
-                  <a:srgbClr val="0E7C6B"/>
-                </a:solidFill>
-                <a:latin typeface="Calibri"/>
+                  <a:srgbClr val="01ABAA"/>
+                </a:solidFill>
+                <a:latin typeface="Arial"/>
               </a:defRPr>
             </a:pPr>
             <a:r>
@@ -7745,9 +6506,9 @@
             <a:pPr algn="l">
               <a:defRPr sz="2600" b="1">
                 <a:solidFill>
-                  <a:srgbClr val="1A365D"/>
-                </a:solidFill>
-                <a:latin typeface="Calibri"/>
+                  <a:srgbClr val="2D2A5E"/>
+                </a:solidFill>
+                <a:latin typeface="Arial"/>
               </a:defRPr>
             </a:pPr>
             <a:r>
@@ -7771,7 +6532,7 @@
             <a:avLst/>
           </a:prstGeom>
           <a:solidFill>
-            <a:srgbClr val="F7F9FC"/>
+            <a:srgbClr val="FAF6F0"/>
           </a:solidFill>
           <a:ln>
             <a:noFill/>
@@ -7801,20 +6562,128 @@
       </p:sp>
       <p:sp>
         <p:nvSpPr>
-          <p:cNvPr id="6" name="Rectangle 5"/>
+          <p:cNvPr id="6" name="TextBox 5"/>
+          <p:cNvSpPr txBox="1"/>
+          <p:nvPr/>
+        </p:nvSpPr>
+        <p:spPr>
+          <a:xfrm>
+            <a:off x="731520" y="1188720"/>
+            <a:ext cx="3474720" cy="320040"/>
+          </a:xfrm>
+          <a:prstGeom prst="rect">
+            <a:avLst/>
+          </a:prstGeom>
+          <a:noFill/>
+        </p:spPr>
+        <p:txBody>
+          <a:bodyPr wrap="square">
+            <a:spAutoFit/>
+          </a:bodyPr>
+          <a:lstStyle/>
+          <a:p>
+            <a:pPr algn="l">
+              <a:defRPr sz="1400" b="1">
+                <a:solidFill>
+                  <a:srgbClr val="2D2A5E"/>
+                </a:solidFill>
+                <a:latin typeface="Arial"/>
+              </a:defRPr>
+            </a:pPr>
+            <a:r>
+              <a:t>1. Smart Lesson Planner</a:t>
+            </a:r>
+          </a:p>
+        </p:txBody>
+      </p:sp>
+      <p:sp>
+        <p:nvSpPr>
+          <p:cNvPr id="7" name="TextBox 6"/>
+          <p:cNvSpPr txBox="1"/>
+          <p:nvPr/>
+        </p:nvSpPr>
+        <p:spPr>
+          <a:xfrm>
+            <a:off x="731520" y="1554480"/>
+            <a:ext cx="3474720" cy="822960"/>
+          </a:xfrm>
+          <a:prstGeom prst="rect">
+            <a:avLst/>
+          </a:prstGeom>
+          <a:noFill/>
+        </p:spPr>
+        <p:txBody>
+          <a:bodyPr wrap="square">
+            <a:spAutoFit/>
+          </a:bodyPr>
+          <a:lstStyle/>
+          <a:p>
+            <a:pPr algn="l">
+              <a:defRPr sz="1000" b="0">
+                <a:solidFill>
+                  <a:srgbClr val="6B7280"/>
+                </a:solidFill>
+                <a:latin typeface="Arial"/>
+              </a:defRPr>
+            </a:pPr>
+            <a:r>
+              <a:t>AI generates differentiated scaffolding based on classroom learning profiles. Maps to EYDF, NEL, and implements Rehearse &amp; Retrieve scheduling.</a:t>
+            </a:r>
+          </a:p>
+        </p:txBody>
+      </p:sp>
+      <p:sp>
+        <p:nvSpPr>
+          <p:cNvPr id="8" name="TextBox 7"/>
+          <p:cNvSpPr txBox="1"/>
+          <p:nvPr/>
+        </p:nvSpPr>
+        <p:spPr>
+          <a:xfrm>
+            <a:off x="731520" y="2423160"/>
+            <a:ext cx="3474720" cy="274320"/>
+          </a:xfrm>
+          <a:prstGeom prst="rect">
+            <a:avLst/>
+          </a:prstGeom>
+          <a:noFill/>
+        </p:spPr>
+        <p:txBody>
+          <a:bodyPr wrap="square">
+            <a:spAutoFit/>
+          </a:bodyPr>
+          <a:lstStyle/>
+          <a:p>
+            <a:pPr algn="l">
+              <a:defRPr sz="800" b="1">
+                <a:solidFill>
+                  <a:srgbClr val="01ABAA"/>
+                </a:solidFill>
+                <a:latin typeface="Arial"/>
+              </a:defRPr>
+            </a:pPr>
+            <a:r>
+              <a:t>EYDF | NEL | Differentiation</a:t>
+            </a:r>
+          </a:p>
+        </p:txBody>
+      </p:sp>
+      <p:sp>
+        <p:nvSpPr>
+          <p:cNvPr id="9" name="Rectangle 8"/>
           <p:cNvSpPr/>
           <p:nvPr/>
         </p:nvSpPr>
         <p:spPr>
           <a:xfrm>
-            <a:off x="548640" y="1097280"/>
-            <a:ext cx="54864" cy="1737360"/>
+            <a:off x="4754879" y="1097280"/>
+            <a:ext cx="3840480" cy="1737360"/>
           </a:xfrm>
           <a:prstGeom prst="rect">
             <a:avLst/>
           </a:prstGeom>
           <a:solidFill>
-            <a:srgbClr val="0E7C6B"/>
+            <a:srgbClr val="FAF6F0"/>
           </a:solidFill>
           <a:ln>
             <a:noFill/>
@@ -7844,13 +6713,13 @@
       </p:sp>
       <p:sp>
         <p:nvSpPr>
-          <p:cNvPr id="7" name="TextBox 6"/>
-          <p:cNvSpPr txBox="1"/>
-          <p:nvPr/>
-        </p:nvSpPr>
-        <p:spPr>
-          <a:xfrm>
-            <a:off x="731520" y="1188720"/>
+          <p:cNvPr id="10" name="TextBox 9"/>
+          <p:cNvSpPr txBox="1"/>
+          <p:nvPr/>
+        </p:nvSpPr>
+        <p:spPr>
+          <a:xfrm>
+            <a:off x="4937759" y="1188720"/>
             <a:ext cx="3474720" cy="320040"/>
           </a:xfrm>
           <a:prstGeom prst="rect">
@@ -7867,26 +6736,26 @@
             <a:pPr algn="l">
               <a:defRPr sz="1400" b="1">
                 <a:solidFill>
-                  <a:srgbClr val="1A365D"/>
-                </a:solidFill>
-                <a:latin typeface="Calibri"/>
-              </a:defRPr>
-            </a:pPr>
-            <a:r>
-              <a:t>1. Smart Lesson Planner</a:t>
-            </a:r>
-          </a:p>
-        </p:txBody>
-      </p:sp>
-      <p:sp>
-        <p:nvSpPr>
-          <p:cNvPr id="8" name="TextBox 7"/>
-          <p:cNvSpPr txBox="1"/>
-          <p:nvPr/>
-        </p:nvSpPr>
-        <p:spPr>
-          <a:xfrm>
-            <a:off x="731520" y="1554480"/>
+                  <a:srgbClr val="2D2A5E"/>
+                </a:solidFill>
+                <a:latin typeface="Arial"/>
+              </a:defRPr>
+            </a:pPr>
+            <a:r>
+              <a:t>2. Portfolio &amp; Profiling</a:t>
+            </a:r>
+          </a:p>
+        </p:txBody>
+      </p:sp>
+      <p:sp>
+        <p:nvSpPr>
+          <p:cNvPr id="11" name="TextBox 10"/>
+          <p:cNvSpPr txBox="1"/>
+          <p:nvPr/>
+        </p:nvSpPr>
+        <p:spPr>
+          <a:xfrm>
+            <a:off x="4937759" y="1554480"/>
             <a:ext cx="3474720" cy="822960"/>
           </a:xfrm>
           <a:prstGeom prst="rect">
@@ -7903,26 +6772,26 @@
             <a:pPr algn="l">
               <a:defRPr sz="1000" b="0">
                 <a:solidFill>
-                  <a:srgbClr val="64748B"/>
-                </a:solidFill>
-                <a:latin typeface="Calibri"/>
-              </a:defRPr>
-            </a:pPr>
-            <a:r>
-              <a:t>AI generates differentiated scaffolding based on classroom learning profiles. Maps to EYDF, NEL, and implements Rehearse &amp; Retrieve scheduling.</a:t>
-            </a:r>
-          </a:p>
-        </p:txBody>
-      </p:sp>
-      <p:sp>
-        <p:nvSpPr>
-          <p:cNvPr id="9" name="TextBox 8"/>
-          <p:cNvSpPr txBox="1"/>
-          <p:nvPr/>
-        </p:nvSpPr>
-        <p:spPr>
-          <a:xfrm>
-            <a:off x="731520" y="2423160"/>
+                  <a:srgbClr val="6B7280"/>
+                </a:solidFill>
+                <a:latin typeface="Arial"/>
+              </a:defRPr>
+            </a:pPr>
+            <a:r>
+              <a:t>Capture observations and work samples. AI drafts developmental narratives. 'Living Profile' feeds back into lesson planning.</a:t>
+            </a:r>
+          </a:p>
+        </p:txBody>
+      </p:sp>
+      <p:sp>
+        <p:nvSpPr>
+          <p:cNvPr id="12" name="TextBox 11"/>
+          <p:cNvSpPr txBox="1"/>
+          <p:nvPr/>
+        </p:nvSpPr>
+        <p:spPr>
+          <a:xfrm>
+            <a:off x="4937759" y="2423160"/>
             <a:ext cx="3474720" cy="274320"/>
           </a:xfrm>
           <a:prstGeom prst="rect">
@@ -7939,33 +6808,33 @@
             <a:pPr algn="l">
               <a:defRPr sz="800" b="1">
                 <a:solidFill>
-                  <a:srgbClr val="0E7C6B"/>
-                </a:solidFill>
-                <a:latin typeface="Calibri"/>
-              </a:defRPr>
-            </a:pPr>
-            <a:r>
-              <a:t>EYDF | NEL | Differentiation</a:t>
-            </a:r>
-          </a:p>
-        </p:txBody>
-      </p:sp>
-      <p:sp>
-        <p:nvSpPr>
-          <p:cNvPr id="10" name="Rectangle 9"/>
+                  <a:srgbClr val="3B82F6"/>
+                </a:solidFill>
+                <a:latin typeface="Arial"/>
+              </a:defRPr>
+            </a:pPr>
+            <a:r>
+              <a:t>Living Profile | Assessment</a:t>
+            </a:r>
+          </a:p>
+        </p:txBody>
+      </p:sp>
+      <p:sp>
+        <p:nvSpPr>
+          <p:cNvPr id="13" name="Rectangle 12"/>
           <p:cNvSpPr/>
           <p:nvPr/>
         </p:nvSpPr>
         <p:spPr>
           <a:xfrm>
-            <a:off x="4754879" y="1097280"/>
+            <a:off x="548640" y="3017520"/>
             <a:ext cx="3840480" cy="1737360"/>
           </a:xfrm>
           <a:prstGeom prst="rect">
             <a:avLst/>
           </a:prstGeom>
           <a:solidFill>
-            <a:srgbClr val="F7F9FC"/>
+            <a:srgbClr val="FAF6F0"/>
           </a:solidFill>
           <a:ln>
             <a:noFill/>
@@ -7995,20 +6864,128 @@
       </p:sp>
       <p:sp>
         <p:nvSpPr>
-          <p:cNvPr id="11" name="Rectangle 10"/>
+          <p:cNvPr id="14" name="TextBox 13"/>
+          <p:cNvSpPr txBox="1"/>
+          <p:nvPr/>
+        </p:nvSpPr>
+        <p:spPr>
+          <a:xfrm>
+            <a:off x="731520" y="3108960"/>
+            <a:ext cx="3474720" cy="320040"/>
+          </a:xfrm>
+          <a:prstGeom prst="rect">
+            <a:avLst/>
+          </a:prstGeom>
+          <a:noFill/>
+        </p:spPr>
+        <p:txBody>
+          <a:bodyPr wrap="square">
+            <a:spAutoFit/>
+          </a:bodyPr>
+          <a:lstStyle/>
+          <a:p>
+            <a:pPr algn="l">
+              <a:defRPr sz="1400" b="1">
+                <a:solidFill>
+                  <a:srgbClr val="2D2A5E"/>
+                </a:solidFill>
+                <a:latin typeface="Arial"/>
+              </a:defRPr>
+            </a:pPr>
+            <a:r>
+              <a:t>3. AI Coaching Agent</a:t>
+            </a:r>
+          </a:p>
+        </p:txBody>
+      </p:sp>
+      <p:sp>
+        <p:nvSpPr>
+          <p:cNvPr id="15" name="TextBox 14"/>
+          <p:cNvSpPr txBox="1"/>
+          <p:nvPr/>
+        </p:nvSpPr>
+        <p:spPr>
+          <a:xfrm>
+            <a:off x="731520" y="3474720"/>
+            <a:ext cx="3474720" cy="822960"/>
+          </a:xfrm>
+          <a:prstGeom prst="rect">
+            <a:avLst/>
+          </a:prstGeom>
+          <a:noFill/>
+        </p:spPr>
+        <p:txBody>
+          <a:bodyPr wrap="square">
+            <a:spAutoFit/>
+          </a:bodyPr>
+          <a:lstStyle/>
+          <a:p>
+            <a:pPr algn="l">
+              <a:defRPr sz="1000" b="0">
+                <a:solidFill>
+                  <a:srgbClr val="6B7280"/>
+                </a:solidFill>
+                <a:latin typeface="Arial"/>
+              </a:defRPr>
+            </a:pPr>
+            <a:r>
+              <a:t>Four coaching modes: Reflective Practice, QTT Deep Dive, Socratic Inquiry, Scenario Analysis. Anti-sycophancy directives built in.</a:t>
+            </a:r>
+          </a:p>
+        </p:txBody>
+      </p:sp>
+      <p:sp>
+        <p:nvSpPr>
+          <p:cNvPr id="16" name="TextBox 15"/>
+          <p:cNvSpPr txBox="1"/>
+          <p:nvPr/>
+        </p:nvSpPr>
+        <p:spPr>
+          <a:xfrm>
+            <a:off x="731520" y="4343400"/>
+            <a:ext cx="3474720" cy="274320"/>
+          </a:xfrm>
+          <a:prstGeom prst="rect">
+            <a:avLst/>
+          </a:prstGeom>
+          <a:noFill/>
+        </p:spPr>
+        <p:txBody>
+          <a:bodyPr wrap="square">
+            <a:spAutoFit/>
+          </a:bodyPr>
+          <a:lstStyle/>
+          <a:p>
+            <a:pPr algn="l">
+              <a:defRPr sz="800" b="1">
+                <a:solidFill>
+                  <a:srgbClr val="FECD1B"/>
+                </a:solidFill>
+                <a:latin typeface="Arial"/>
+              </a:defRPr>
+            </a:pPr>
+            <a:r>
+              <a:t>QTT | Skills Framework</a:t>
+            </a:r>
+          </a:p>
+        </p:txBody>
+      </p:sp>
+      <p:sp>
+        <p:nvSpPr>
+          <p:cNvPr id="17" name="Rectangle 16"/>
           <p:cNvSpPr/>
           <p:nvPr/>
         </p:nvSpPr>
         <p:spPr>
           <a:xfrm>
-            <a:off x="4754879" y="1097280"/>
-            <a:ext cx="54864" cy="1737360"/>
+            <a:off x="4754879" y="3017520"/>
+            <a:ext cx="3840480" cy="1737360"/>
           </a:xfrm>
           <a:prstGeom prst="rect">
             <a:avLst/>
           </a:prstGeom>
           <a:solidFill>
-            <a:srgbClr val="3B82F6"/>
+            <a:srgbClr val="FAF6F0"/>
           </a:solidFill>
           <a:ln>
             <a:noFill/>
@@ -8038,13 +7015,13 @@
       </p:sp>
       <p:sp>
         <p:nvSpPr>
-          <p:cNvPr id="12" name="TextBox 11"/>
-          <p:cNvSpPr txBox="1"/>
-          <p:nvPr/>
-        </p:nvSpPr>
-        <p:spPr>
-          <a:xfrm>
-            <a:off x="4937759" y="1188720"/>
+          <p:cNvPr id="18" name="TextBox 17"/>
+          <p:cNvSpPr txBox="1"/>
+          <p:nvPr/>
+        </p:nvSpPr>
+        <p:spPr>
+          <a:xfrm>
+            <a:off x="4937759" y="3108960"/>
             <a:ext cx="3474720" cy="320040"/>
           </a:xfrm>
           <a:prstGeom prst="rect">
@@ -8061,26 +7038,26 @@
             <a:pPr algn="l">
               <a:defRPr sz="1400" b="1">
                 <a:solidFill>
-                  <a:srgbClr val="1A365D"/>
-                </a:solidFill>
-                <a:latin typeface="Calibri"/>
-              </a:defRPr>
-            </a:pPr>
-            <a:r>
-              <a:t>2. Portfolio &amp; Profiling</a:t>
-            </a:r>
-          </a:p>
-        </p:txBody>
-      </p:sp>
-      <p:sp>
-        <p:nvSpPr>
-          <p:cNvPr id="13" name="TextBox 12"/>
-          <p:cNvSpPr txBox="1"/>
-          <p:nvPr/>
-        </p:nvSpPr>
-        <p:spPr>
-          <a:xfrm>
-            <a:off x="4937759" y="1554480"/>
+                  <a:srgbClr val="2D2A5E"/>
+                </a:solidFill>
+                <a:latin typeface="Arial"/>
+              </a:defRPr>
+            </a:pPr>
+            <a:r>
+              <a:t>4. Director Dashboard</a:t>
+            </a:r>
+          </a:p>
+        </p:txBody>
+      </p:sp>
+      <p:sp>
+        <p:nvSpPr>
+          <p:cNvPr id="19" name="TextBox 18"/>
+          <p:cNvSpPr txBox="1"/>
+          <p:nvPr/>
+        </p:nvSpPr>
+        <p:spPr>
+          <a:xfrm>
+            <a:off x="4937759" y="3474720"/>
             <a:ext cx="3474720" cy="822960"/>
           </a:xfrm>
           <a:prstGeom prst="rect">
@@ -8097,26 +7074,26 @@
             <a:pPr algn="l">
               <a:defRPr sz="1000" b="0">
                 <a:solidFill>
-                  <a:srgbClr val="64748B"/>
-                </a:solidFill>
-                <a:latin typeface="Calibri"/>
-              </a:defRPr>
-            </a:pPr>
-            <a:r>
-              <a:t>Capture observations and work samples. AI drafts developmental narratives. 'Living Profile' feeds back into lesson planning.</a:t>
-            </a:r>
-          </a:p>
-        </p:txBody>
-      </p:sp>
-      <p:sp>
-        <p:nvSpPr>
-          <p:cNvPr id="14" name="TextBox 13"/>
-          <p:cNvSpPr txBox="1"/>
-          <p:nvPr/>
-        </p:nvSpPr>
-        <p:spPr>
-          <a:xfrm>
-            <a:off x="4937759" y="2423160"/>
+                  <a:srgbClr val="6B7280"/>
+                </a:solidFill>
+                <a:latin typeface="Arial"/>
+              </a:defRPr>
+            </a:pPr>
+            <a:r>
+              <a:t>Centre-wide QTT averages, educator profiles, PLC collaboration topics, and SFw-aligned professional development recommendations.</a:t>
+            </a:r>
+          </a:p>
+        </p:txBody>
+      </p:sp>
+      <p:sp>
+        <p:nvSpPr>
+          <p:cNvPr id="20" name="TextBox 19"/>
+          <p:cNvSpPr txBox="1"/>
+          <p:nvPr/>
+        </p:nvSpPr>
+        <p:spPr>
+          <a:xfrm>
+            <a:off x="4937759" y="4343400"/>
             <a:ext cx="3474720" cy="274320"/>
           </a:xfrm>
           <a:prstGeom prst="rect">
@@ -8133,397 +7110,9 @@
             <a:pPr algn="l">
               <a:defRPr sz="800" b="1">
                 <a:solidFill>
-                  <a:srgbClr val="3B82F6"/>
-                </a:solidFill>
-                <a:latin typeface="Calibri"/>
-              </a:defRPr>
-            </a:pPr>
-            <a:r>
-              <a:t>Living Profile | Assessment</a:t>
-            </a:r>
-          </a:p>
-        </p:txBody>
-      </p:sp>
-      <p:sp>
-        <p:nvSpPr>
-          <p:cNvPr id="15" name="Rectangle 14"/>
-          <p:cNvSpPr/>
-          <p:nvPr/>
-        </p:nvSpPr>
-        <p:spPr>
-          <a:xfrm>
-            <a:off x="548640" y="3017520"/>
-            <a:ext cx="3840480" cy="1737360"/>
-          </a:xfrm>
-          <a:prstGeom prst="rect">
-            <a:avLst/>
-          </a:prstGeom>
-          <a:solidFill>
-            <a:srgbClr val="F7F9FC"/>
-          </a:solidFill>
-          <a:ln>
-            <a:noFill/>
-          </a:ln>
-        </p:spPr>
-        <p:style>
-          <a:lnRef idx="1">
-            <a:schemeClr val="accent1"/>
-          </a:lnRef>
-          <a:fillRef idx="3">
-            <a:schemeClr val="accent1"/>
-          </a:fillRef>
-          <a:effectRef idx="2">
-            <a:schemeClr val="accent1"/>
-          </a:effectRef>
-          <a:fontRef idx="minor">
-            <a:schemeClr val="lt1"/>
-          </a:fontRef>
-        </p:style>
-        <p:txBody>
-          <a:bodyPr rtlCol="0" anchor="ctr"/>
-          <a:lstStyle/>
-          <a:p>
-            <a:pPr algn="ctr"/>
-          </a:p>
-        </p:txBody>
-      </p:sp>
-      <p:sp>
-        <p:nvSpPr>
-          <p:cNvPr id="16" name="Rectangle 15"/>
-          <p:cNvSpPr/>
-          <p:nvPr/>
-        </p:nvSpPr>
-        <p:spPr>
-          <a:xfrm>
-            <a:off x="548640" y="3017520"/>
-            <a:ext cx="54864" cy="1737360"/>
-          </a:xfrm>
-          <a:prstGeom prst="rect">
-            <a:avLst/>
-          </a:prstGeom>
-          <a:solidFill>
-            <a:srgbClr val="F0A500"/>
-          </a:solidFill>
-          <a:ln>
-            <a:noFill/>
-          </a:ln>
-        </p:spPr>
-        <p:style>
-          <a:lnRef idx="1">
-            <a:schemeClr val="accent1"/>
-          </a:lnRef>
-          <a:fillRef idx="3">
-            <a:schemeClr val="accent1"/>
-          </a:fillRef>
-          <a:effectRef idx="2">
-            <a:schemeClr val="accent1"/>
-          </a:effectRef>
-          <a:fontRef idx="minor">
-            <a:schemeClr val="lt1"/>
-          </a:fontRef>
-        </p:style>
-        <p:txBody>
-          <a:bodyPr rtlCol="0" anchor="ctr"/>
-          <a:lstStyle/>
-          <a:p>
-            <a:pPr algn="ctr"/>
-          </a:p>
-        </p:txBody>
-      </p:sp>
-      <p:sp>
-        <p:nvSpPr>
-          <p:cNvPr id="17" name="TextBox 16"/>
-          <p:cNvSpPr txBox="1"/>
-          <p:nvPr/>
-        </p:nvSpPr>
-        <p:spPr>
-          <a:xfrm>
-            <a:off x="731520" y="3108960"/>
-            <a:ext cx="3474720" cy="320040"/>
-          </a:xfrm>
-          <a:prstGeom prst="rect">
-            <a:avLst/>
-          </a:prstGeom>
-          <a:noFill/>
-        </p:spPr>
-        <p:txBody>
-          <a:bodyPr wrap="square">
-            <a:spAutoFit/>
-          </a:bodyPr>
-          <a:lstStyle/>
-          <a:p>
-            <a:pPr algn="l">
-              <a:defRPr sz="1400" b="1">
-                <a:solidFill>
-                  <a:srgbClr val="1A365D"/>
-                </a:solidFill>
-                <a:latin typeface="Calibri"/>
-              </a:defRPr>
-            </a:pPr>
-            <a:r>
-              <a:t>3. AI Coaching Agent</a:t>
-            </a:r>
-          </a:p>
-        </p:txBody>
-      </p:sp>
-      <p:sp>
-        <p:nvSpPr>
-          <p:cNvPr id="18" name="TextBox 17"/>
-          <p:cNvSpPr txBox="1"/>
-          <p:nvPr/>
-        </p:nvSpPr>
-        <p:spPr>
-          <a:xfrm>
-            <a:off x="731520" y="3474720"/>
-            <a:ext cx="3474720" cy="822960"/>
-          </a:xfrm>
-          <a:prstGeom prst="rect">
-            <a:avLst/>
-          </a:prstGeom>
-          <a:noFill/>
-        </p:spPr>
-        <p:txBody>
-          <a:bodyPr wrap="square">
-            <a:spAutoFit/>
-          </a:bodyPr>
-          <a:lstStyle/>
-          <a:p>
-            <a:pPr algn="l">
-              <a:defRPr sz="1000" b="0">
-                <a:solidFill>
-                  <a:srgbClr val="64748B"/>
-                </a:solidFill>
-                <a:latin typeface="Calibri"/>
-              </a:defRPr>
-            </a:pPr>
-            <a:r>
-              <a:t>Four coaching modes: Reflective Practice, QTT Deep Dive, Socratic Inquiry, Scenario Analysis. Anti-sycophancy directives built in.</a:t>
-            </a:r>
-          </a:p>
-        </p:txBody>
-      </p:sp>
-      <p:sp>
-        <p:nvSpPr>
-          <p:cNvPr id="19" name="TextBox 18"/>
-          <p:cNvSpPr txBox="1"/>
-          <p:nvPr/>
-        </p:nvSpPr>
-        <p:spPr>
-          <a:xfrm>
-            <a:off x="731520" y="4343400"/>
-            <a:ext cx="3474720" cy="274320"/>
-          </a:xfrm>
-          <a:prstGeom prst="rect">
-            <a:avLst/>
-          </a:prstGeom>
-          <a:noFill/>
-        </p:spPr>
-        <p:txBody>
-          <a:bodyPr wrap="square">
-            <a:spAutoFit/>
-          </a:bodyPr>
-          <a:lstStyle/>
-          <a:p>
-            <a:pPr algn="l">
-              <a:defRPr sz="800" b="1">
-                <a:solidFill>
-                  <a:srgbClr val="F0A500"/>
-                </a:solidFill>
-                <a:latin typeface="Calibri"/>
-              </a:defRPr>
-            </a:pPr>
-            <a:r>
-              <a:t>QTT | Skills Framework</a:t>
-            </a:r>
-          </a:p>
-        </p:txBody>
-      </p:sp>
-      <p:sp>
-        <p:nvSpPr>
-          <p:cNvPr id="20" name="Rectangle 19"/>
-          <p:cNvSpPr/>
-          <p:nvPr/>
-        </p:nvSpPr>
-        <p:spPr>
-          <a:xfrm>
-            <a:off x="4754879" y="3017520"/>
-            <a:ext cx="3840480" cy="1737360"/>
-          </a:xfrm>
-          <a:prstGeom prst="rect">
-            <a:avLst/>
-          </a:prstGeom>
-          <a:solidFill>
-            <a:srgbClr val="F7F9FC"/>
-          </a:solidFill>
-          <a:ln>
-            <a:noFill/>
-          </a:ln>
-        </p:spPr>
-        <p:style>
-          <a:lnRef idx="1">
-            <a:schemeClr val="accent1"/>
-          </a:lnRef>
-          <a:fillRef idx="3">
-            <a:schemeClr val="accent1"/>
-          </a:fillRef>
-          <a:effectRef idx="2">
-            <a:schemeClr val="accent1"/>
-          </a:effectRef>
-          <a:fontRef idx="minor">
-            <a:schemeClr val="lt1"/>
-          </a:fontRef>
-        </p:style>
-        <p:txBody>
-          <a:bodyPr rtlCol="0" anchor="ctr"/>
-          <a:lstStyle/>
-          <a:p>
-            <a:pPr algn="ctr"/>
-          </a:p>
-        </p:txBody>
-      </p:sp>
-      <p:sp>
-        <p:nvSpPr>
-          <p:cNvPr id="21" name="Rectangle 20"/>
-          <p:cNvSpPr/>
-          <p:nvPr/>
-        </p:nvSpPr>
-        <p:spPr>
-          <a:xfrm>
-            <a:off x="4754879" y="3017520"/>
-            <a:ext cx="54864" cy="1737360"/>
-          </a:xfrm>
-          <a:prstGeom prst="rect">
-            <a:avLst/>
-          </a:prstGeom>
-          <a:solidFill>
-            <a:srgbClr val="8B5CF6"/>
-          </a:solidFill>
-          <a:ln>
-            <a:noFill/>
-          </a:ln>
-        </p:spPr>
-        <p:style>
-          <a:lnRef idx="1">
-            <a:schemeClr val="accent1"/>
-          </a:lnRef>
-          <a:fillRef idx="3">
-            <a:schemeClr val="accent1"/>
-          </a:fillRef>
-          <a:effectRef idx="2">
-            <a:schemeClr val="accent1"/>
-          </a:effectRef>
-          <a:fontRef idx="minor">
-            <a:schemeClr val="lt1"/>
-          </a:fontRef>
-        </p:style>
-        <p:txBody>
-          <a:bodyPr rtlCol="0" anchor="ctr"/>
-          <a:lstStyle/>
-          <a:p>
-            <a:pPr algn="ctr"/>
-          </a:p>
-        </p:txBody>
-      </p:sp>
-      <p:sp>
-        <p:nvSpPr>
-          <p:cNvPr id="22" name="TextBox 21"/>
-          <p:cNvSpPr txBox="1"/>
-          <p:nvPr/>
-        </p:nvSpPr>
-        <p:spPr>
-          <a:xfrm>
-            <a:off x="4937759" y="3108960"/>
-            <a:ext cx="3474720" cy="320040"/>
-          </a:xfrm>
-          <a:prstGeom prst="rect">
-            <a:avLst/>
-          </a:prstGeom>
-          <a:noFill/>
-        </p:spPr>
-        <p:txBody>
-          <a:bodyPr wrap="square">
-            <a:spAutoFit/>
-          </a:bodyPr>
-          <a:lstStyle/>
-          <a:p>
-            <a:pPr algn="l">
-              <a:defRPr sz="1400" b="1">
-                <a:solidFill>
-                  <a:srgbClr val="1A365D"/>
-                </a:solidFill>
-                <a:latin typeface="Calibri"/>
-              </a:defRPr>
-            </a:pPr>
-            <a:r>
-              <a:t>4. Director Dashboard</a:t>
-            </a:r>
-          </a:p>
-        </p:txBody>
-      </p:sp>
-      <p:sp>
-        <p:nvSpPr>
-          <p:cNvPr id="23" name="TextBox 22"/>
-          <p:cNvSpPr txBox="1"/>
-          <p:nvPr/>
-        </p:nvSpPr>
-        <p:spPr>
-          <a:xfrm>
-            <a:off x="4937759" y="3474720"/>
-            <a:ext cx="3474720" cy="822960"/>
-          </a:xfrm>
-          <a:prstGeom prst="rect">
-            <a:avLst/>
-          </a:prstGeom>
-          <a:noFill/>
-        </p:spPr>
-        <p:txBody>
-          <a:bodyPr wrap="square">
-            <a:spAutoFit/>
-          </a:bodyPr>
-          <a:lstStyle/>
-          <a:p>
-            <a:pPr algn="l">
-              <a:defRPr sz="1000" b="0">
-                <a:solidFill>
-                  <a:srgbClr val="64748B"/>
-                </a:solidFill>
-                <a:latin typeface="Calibri"/>
-              </a:defRPr>
-            </a:pPr>
-            <a:r>
-              <a:t>Center-wide QTT averages, educator profiles, PLC collaboration topics, and SFw-aligned professional development recommendations.</a:t>
-            </a:r>
-          </a:p>
-        </p:txBody>
-      </p:sp>
-      <p:sp>
-        <p:nvSpPr>
-          <p:cNvPr id="24" name="TextBox 23"/>
-          <p:cNvSpPr txBox="1"/>
-          <p:nvPr/>
-        </p:nvSpPr>
-        <p:spPr>
-          <a:xfrm>
-            <a:off x="4937759" y="4343400"/>
-            <a:ext cx="3474720" cy="274320"/>
-          </a:xfrm>
-          <a:prstGeom prst="rect">
-            <a:avLst/>
-          </a:prstGeom>
-          <a:noFill/>
-        </p:spPr>
-        <p:txBody>
-          <a:bodyPr wrap="square">
-            <a:spAutoFit/>
-          </a:bodyPr>
-          <a:lstStyle/>
-          <a:p>
-            <a:pPr algn="l">
-              <a:defRPr sz="800" b="1">
-                <a:solidFill>
                   <a:srgbClr val="8B5CF6"/>
                 </a:solidFill>
-                <a:latin typeface="Calibri"/>
+                <a:latin typeface="Arial"/>
               </a:defRPr>
             </a:pPr>
             <a:r>
@@ -8546,7 +7135,7 @@
     <p:bg>
       <p:bgPr>
         <a:solidFill>
-          <a:srgbClr val="1A365D"/>
+          <a:srgbClr val="2D2A5E"/>
         </a:solidFill>
         <a:effectLst/>
       </p:bgPr>
@@ -8573,7 +7162,7 @@
             <a:avLst/>
           </a:prstGeom>
           <a:solidFill>
-            <a:srgbClr val="F0A500"/>
+            <a:srgbClr val="FECD1B"/>
           </a:solidFill>
           <a:ln>
             <a:noFill/>
@@ -8626,9 +7215,9 @@
             <a:pPr algn="l">
               <a:defRPr sz="1000" b="1">
                 <a:solidFill>
-                  <a:srgbClr val="F0A500"/>
-                </a:solidFill>
-                <a:latin typeface="Calibri"/>
+                  <a:srgbClr val="FECD1B"/>
+                </a:solidFill>
+                <a:latin typeface="Arial"/>
               </a:defRPr>
             </a:pPr>
             <a:r>
@@ -8664,7 +7253,7 @@
                 <a:solidFill>
                   <a:srgbClr val="FFFFFF"/>
                 </a:solidFill>
-                <a:latin typeface="Calibri"/>
+                <a:latin typeface="Arial"/>
               </a:defRPr>
             </a:pPr>
             <a:r>
@@ -8688,7 +7277,7 @@
             <a:avLst/>
           </a:prstGeom>
           <a:solidFill>
-            <a:srgbClr val="1E3A5F"/>
+            <a:srgbClr val="3D2663"/>
           </a:solidFill>
           <a:ln>
             <a:noFill/>
@@ -8743,7 +7332,7 @@
                 <a:solidFill>
                   <a:srgbClr val="FFFFFF"/>
                 </a:solidFill>
-                <a:latin typeface="Calibri"/>
+                <a:latin typeface="Arial"/>
               </a:defRPr>
             </a:pPr>
             <a:r>
@@ -8777,9 +7366,9 @@
             <a:pPr algn="l">
               <a:defRPr sz="900" b="0">
                 <a:solidFill>
-                  <a:srgbClr val="AABBCC"/>
-                </a:solidFill>
-                <a:latin typeface="Calibri"/>
+                  <a:srgbClr val="B0A0C8"/>
+                </a:solidFill>
+                <a:latin typeface="Arial"/>
               </a:defRPr>
             </a:pPr>
             <a:r>
@@ -8813,7 +7402,7 @@
             <a:avLst/>
           </a:prstGeom>
           <a:solidFill>
-            <a:srgbClr val="F0A500"/>
+            <a:srgbClr val="FECD1B"/>
           </a:solidFill>
           <a:ln>
             <a:noFill/>
@@ -8856,7 +7445,7 @@
             <a:avLst/>
           </a:prstGeom>
           <a:solidFill>
-            <a:srgbClr val="2A456A"/>
+            <a:srgbClr val="3A3060"/>
           </a:solidFill>
           <a:ln>
             <a:noFill/>
@@ -8899,7 +7488,7 @@
             <a:avLst/>
           </a:prstGeom>
           <a:solidFill>
-            <a:srgbClr val="2A456A"/>
+            <a:srgbClr val="3A3060"/>
           </a:solidFill>
           <a:ln>
             <a:noFill/>
@@ -8942,7 +7531,7 @@
             <a:avLst/>
           </a:prstGeom>
           <a:solidFill>
-            <a:srgbClr val="2A456A"/>
+            <a:srgbClr val="3A3060"/>
           </a:solidFill>
           <a:ln>
             <a:noFill/>
@@ -8995,9 +7584,9 @@
             <a:pPr algn="l">
               <a:defRPr sz="800" b="0">
                 <a:solidFill>
-                  <a:srgbClr val="8BAACC"/>
-                </a:solidFill>
-                <a:latin typeface="Calibri"/>
+                  <a:srgbClr val="B8A0D0"/>
+                </a:solidFill>
+                <a:latin typeface="Arial"/>
               </a:defRPr>
             </a:pPr>
             <a:r>
@@ -9021,7 +7610,7 @@
             <a:avLst/>
           </a:prstGeom>
           <a:solidFill>
-            <a:srgbClr val="1E3A5F"/>
+            <a:srgbClr val="3D2663"/>
           </a:solidFill>
           <a:ln>
             <a:noFill/>
@@ -9076,7 +7665,7 @@
                 <a:solidFill>
                   <a:srgbClr val="FFFFFF"/>
                 </a:solidFill>
-                <a:latin typeface="Calibri"/>
+                <a:latin typeface="Arial"/>
               </a:defRPr>
             </a:pPr>
             <a:r>
@@ -9110,9 +7699,9 @@
             <a:pPr algn="l">
               <a:defRPr sz="900" b="0">
                 <a:solidFill>
-                  <a:srgbClr val="AABBCC"/>
-                </a:solidFill>
-                <a:latin typeface="Calibri"/>
+                  <a:srgbClr val="B0A0C8"/>
+                </a:solidFill>
+                <a:latin typeface="Arial"/>
               </a:defRPr>
             </a:pPr>
             <a:r>
@@ -9146,7 +7735,7 @@
             <a:avLst/>
           </a:prstGeom>
           <a:solidFill>
-            <a:srgbClr val="F0A500"/>
+            <a:srgbClr val="FECD1B"/>
           </a:solidFill>
           <a:ln>
             <a:noFill/>
@@ -9189,7 +7778,7 @@
             <a:avLst/>
           </a:prstGeom>
           <a:solidFill>
-            <a:srgbClr val="F0A500"/>
+            <a:srgbClr val="FECD1B"/>
           </a:solidFill>
           <a:ln>
             <a:noFill/>
@@ -9232,7 +7821,7 @@
             <a:avLst/>
           </a:prstGeom>
           <a:solidFill>
-            <a:srgbClr val="2A456A"/>
+            <a:srgbClr val="3A3060"/>
           </a:solidFill>
           <a:ln>
             <a:noFill/>
@@ -9275,7 +7864,7 @@
             <a:avLst/>
           </a:prstGeom>
           <a:solidFill>
-            <a:srgbClr val="2A456A"/>
+            <a:srgbClr val="3A3060"/>
           </a:solidFill>
           <a:ln>
             <a:noFill/>
@@ -9328,9 +7917,9 @@
             <a:pPr algn="l">
               <a:defRPr sz="800" b="0">
                 <a:solidFill>
-                  <a:srgbClr val="8BAACC"/>
-                </a:solidFill>
-                <a:latin typeface="Calibri"/>
+                  <a:srgbClr val="B8A0D0"/>
+                </a:solidFill>
+                <a:latin typeface="Arial"/>
               </a:defRPr>
             </a:pPr>
             <a:r>
@@ -9354,7 +7943,7 @@
             <a:avLst/>
           </a:prstGeom>
           <a:solidFill>
-            <a:srgbClr val="1E3A5F"/>
+            <a:srgbClr val="3D2663"/>
           </a:solidFill>
           <a:ln>
             <a:noFill/>
@@ -9409,7 +7998,7 @@
                 <a:solidFill>
                   <a:srgbClr val="FFFFFF"/>
                 </a:solidFill>
-                <a:latin typeface="Calibri"/>
+                <a:latin typeface="Arial"/>
               </a:defRPr>
             </a:pPr>
             <a:r>
@@ -9443,9 +8032,9 @@
             <a:pPr algn="l">
               <a:defRPr sz="900" b="0">
                 <a:solidFill>
-                  <a:srgbClr val="AABBCC"/>
-                </a:solidFill>
-                <a:latin typeface="Calibri"/>
+                  <a:srgbClr val="B0A0C8"/>
+                </a:solidFill>
+                <a:latin typeface="Arial"/>
               </a:defRPr>
             </a:pPr>
             <a:r>
@@ -9479,7 +8068,7 @@
             <a:avLst/>
           </a:prstGeom>
           <a:solidFill>
-            <a:srgbClr val="F0A500"/>
+            <a:srgbClr val="FECD1B"/>
           </a:solidFill>
           <a:ln>
             <a:noFill/>
@@ -9522,7 +8111,7 @@
             <a:avLst/>
           </a:prstGeom>
           <a:solidFill>
-            <a:srgbClr val="F0A500"/>
+            <a:srgbClr val="FECD1B"/>
           </a:solidFill>
           <a:ln>
             <a:noFill/>
@@ -9565,7 +8154,7 @@
             <a:avLst/>
           </a:prstGeom>
           <a:solidFill>
-            <a:srgbClr val="F0A500"/>
+            <a:srgbClr val="FECD1B"/>
           </a:solidFill>
           <a:ln>
             <a:noFill/>
@@ -9608,7 +8197,7 @@
             <a:avLst/>
           </a:prstGeom>
           <a:solidFill>
-            <a:srgbClr val="2A456A"/>
+            <a:srgbClr val="3A3060"/>
           </a:solidFill>
           <a:ln>
             <a:noFill/>
@@ -9661,9 +8250,9 @@
             <a:pPr algn="l">
               <a:defRPr sz="800" b="0">
                 <a:solidFill>
-                  <a:srgbClr val="8BAACC"/>
-                </a:solidFill>
-                <a:latin typeface="Calibri"/>
+                  <a:srgbClr val="B8A0D0"/>
+                </a:solidFill>
+                <a:latin typeface="Arial"/>
               </a:defRPr>
             </a:pPr>
             <a:r>
@@ -9687,7 +8276,7 @@
             <a:avLst/>
           </a:prstGeom>
           <a:solidFill>
-            <a:srgbClr val="1E3A5F"/>
+            <a:srgbClr val="3D2663"/>
           </a:solidFill>
           <a:ln>
             <a:noFill/>
@@ -9742,7 +8331,7 @@
                 <a:solidFill>
                   <a:srgbClr val="FFFFFF"/>
                 </a:solidFill>
-                <a:latin typeface="Calibri"/>
+                <a:latin typeface="Arial"/>
               </a:defRPr>
             </a:pPr>
             <a:r>
@@ -9776,9 +8365,9 @@
             <a:pPr algn="l">
               <a:defRPr sz="900" b="0">
                 <a:solidFill>
-                  <a:srgbClr val="AABBCC"/>
-                </a:solidFill>
-                <a:latin typeface="Calibri"/>
+                  <a:srgbClr val="B0A0C8"/>
+                </a:solidFill>
+                <a:latin typeface="Arial"/>
               </a:defRPr>
             </a:pPr>
             <a:r>
@@ -9812,7 +8401,7 @@
             <a:avLst/>
           </a:prstGeom>
           <a:solidFill>
-            <a:srgbClr val="F0A500"/>
+            <a:srgbClr val="FECD1B"/>
           </a:solidFill>
           <a:ln>
             <a:noFill/>
@@ -9855,7 +8444,7 @@
             <a:avLst/>
           </a:prstGeom>
           <a:solidFill>
-            <a:srgbClr val="F0A500"/>
+            <a:srgbClr val="FECD1B"/>
           </a:solidFill>
           <a:ln>
             <a:noFill/>
@@ -9898,7 +8487,7 @@
             <a:avLst/>
           </a:prstGeom>
           <a:solidFill>
-            <a:srgbClr val="F0A500"/>
+            <a:srgbClr val="FECD1B"/>
           </a:solidFill>
           <a:ln>
             <a:noFill/>
@@ -9941,7 +8530,7 @@
             <a:avLst/>
           </a:prstGeom>
           <a:solidFill>
-            <a:srgbClr val="F0A500"/>
+            <a:srgbClr val="FECD1B"/>
           </a:solidFill>
           <a:ln>
             <a:noFill/>
@@ -9994,9 +8583,9 @@
             <a:pPr algn="l">
               <a:defRPr sz="800" b="0">
                 <a:solidFill>
-                  <a:srgbClr val="8BAACC"/>
-                </a:solidFill>
-                <a:latin typeface="Calibri"/>
+                  <a:srgbClr val="B8A0D0"/>
+                </a:solidFill>
+                <a:latin typeface="Arial"/>
               </a:defRPr>
             </a:pPr>
             <a:r>
@@ -10030,9 +8619,9 @@
             <a:pPr algn="l">
               <a:defRPr sz="900" b="0">
                 <a:solidFill>
-                  <a:srgbClr val="8BAACC"/>
-                </a:solidFill>
-                <a:latin typeface="Calibri"/>
+                  <a:srgbClr val="B8A0D0"/>
+                </a:solidFill>
+                <a:latin typeface="Arial"/>
               </a:defRPr>
             </a:pPr>
             <a:r>
@@ -10066,9 +8655,9 @@
             <a:pPr algn="l">
               <a:defRPr sz="900" b="0">
                 <a:solidFill>
-                  <a:srgbClr val="8BAACC"/>
-                </a:solidFill>
-                <a:latin typeface="Calibri"/>
+                  <a:srgbClr val="B8A0D0"/>
+                </a:solidFill>
+                <a:latin typeface="Arial"/>
               </a:defRPr>
             </a:pPr>
             <a:r>
@@ -10102,9 +8691,9 @@
             <a:pPr algn="l">
               <a:defRPr sz="900" b="0">
                 <a:solidFill>
-                  <a:srgbClr val="8BAACC"/>
-                </a:solidFill>
-                <a:latin typeface="Calibri"/>
+                  <a:srgbClr val="B8A0D0"/>
+                </a:solidFill>
+                <a:latin typeface="Arial"/>
               </a:defRPr>
             </a:pPr>
             <a:r>
@@ -10138,9 +8727,9 @@
             <a:pPr algn="l">
               <a:defRPr sz="900" b="0">
                 <a:solidFill>
-                  <a:srgbClr val="8BAACC"/>
-                </a:solidFill>
-                <a:latin typeface="Calibri"/>
+                  <a:srgbClr val="B8A0D0"/>
+                </a:solidFill>
+                <a:latin typeface="Arial"/>
               </a:defRPr>
             </a:pPr>
             <a:r>
@@ -10190,7 +8779,7 @@
             <a:avLst/>
           </a:prstGeom>
           <a:solidFill>
-            <a:srgbClr val="0E7C6B"/>
+            <a:srgbClr val="01ABAA"/>
           </a:solidFill>
           <a:ln>
             <a:noFill/>
@@ -10243,9 +8832,9 @@
             <a:pPr algn="l">
               <a:defRPr sz="1000" b="1">
                 <a:solidFill>
-                  <a:srgbClr val="0E7C6B"/>
-                </a:solidFill>
-                <a:latin typeface="Calibri"/>
+                  <a:srgbClr val="01ABAA"/>
+                </a:solidFill>
+                <a:latin typeface="Arial"/>
               </a:defRPr>
             </a:pPr>
             <a:r>
@@ -10279,9 +8868,9 @@
             <a:pPr algn="l">
               <a:defRPr sz="2600" b="1">
                 <a:solidFill>
-                  <a:srgbClr val="1A365D"/>
-                </a:solidFill>
-                <a:latin typeface="Calibri"/>
+                  <a:srgbClr val="2D2A5E"/>
+                </a:solidFill>
+                <a:latin typeface="Arial"/>
               </a:defRPr>
             </a:pPr>
             <a:r>
@@ -10305,7 +8894,7 @@
             <a:avLst/>
           </a:prstGeom>
           <a:solidFill>
-            <a:srgbClr val="0E7C6B"/>
+            <a:srgbClr val="01ABAA"/>
           </a:solidFill>
           <a:ln>
             <a:noFill/>
@@ -10360,7 +8949,7 @@
                 <a:solidFill>
                   <a:srgbClr val="FFFFFF"/>
                 </a:solidFill>
-                <a:latin typeface="Calibri"/>
+                <a:latin typeface="Arial"/>
               </a:defRPr>
             </a:pPr>
             <a:r>
@@ -10394,9 +8983,9 @@
             <a:pPr algn="ctr">
               <a:defRPr sz="1200" b="1">
                 <a:solidFill>
-                  <a:srgbClr val="1A365D"/>
-                </a:solidFill>
-                <a:latin typeface="Calibri"/>
+                  <a:srgbClr val="2D2A5E"/>
+                </a:solidFill>
+                <a:latin typeface="Arial"/>
               </a:defRPr>
             </a:pPr>
             <a:r>
@@ -10430,9 +9019,9 @@
             <a:pPr algn="ctr">
               <a:defRPr sz="900" b="0">
                 <a:solidFill>
-                  <a:srgbClr val="64748B"/>
-                </a:solidFill>
-                <a:latin typeface="Calibri"/>
+                  <a:srgbClr val="6B7280"/>
+                </a:solidFill>
+                <a:latin typeface="Arial"/>
               </a:defRPr>
             </a:pPr>
             <a:r>
@@ -10474,9 +9063,9 @@
             <a:pPr algn="ctr">
               <a:defRPr sz="2400" b="0">
                 <a:solidFill>
-                  <a:srgbClr val="64748B"/>
-                </a:solidFill>
-                <a:latin typeface="Calibri"/>
+                  <a:srgbClr val="6B7280"/>
+                </a:solidFill>
+                <a:latin typeface="Arial"/>
               </a:defRPr>
             </a:pPr>
             <a:r>
@@ -10555,7 +9144,7 @@
                 <a:solidFill>
                   <a:srgbClr val="FFFFFF"/>
                 </a:solidFill>
-                <a:latin typeface="Calibri"/>
+                <a:latin typeface="Arial"/>
               </a:defRPr>
             </a:pPr>
             <a:r>
@@ -10589,9 +9178,9 @@
             <a:pPr algn="ctr">
               <a:defRPr sz="1200" b="1">
                 <a:solidFill>
-                  <a:srgbClr val="1A365D"/>
-                </a:solidFill>
-                <a:latin typeface="Calibri"/>
+                  <a:srgbClr val="2D2A5E"/>
+                </a:solidFill>
+                <a:latin typeface="Arial"/>
               </a:defRPr>
             </a:pPr>
             <a:r>
@@ -10625,9 +9214,9 @@
             <a:pPr algn="ctr">
               <a:defRPr sz="900" b="0">
                 <a:solidFill>
-                  <a:srgbClr val="64748B"/>
-                </a:solidFill>
-                <a:latin typeface="Calibri"/>
+                  <a:srgbClr val="6B7280"/>
+                </a:solidFill>
+                <a:latin typeface="Arial"/>
               </a:defRPr>
             </a:pPr>
             <a:r>
@@ -10669,9 +9258,9 @@
             <a:pPr algn="ctr">
               <a:defRPr sz="2400" b="0">
                 <a:solidFill>
-                  <a:srgbClr val="64748B"/>
-                </a:solidFill>
-                <a:latin typeface="Calibri"/>
+                  <a:srgbClr val="6B7280"/>
+                </a:solidFill>
+                <a:latin typeface="Arial"/>
               </a:defRPr>
             </a:pPr>
             <a:r>
@@ -10750,7 +9339,7 @@
                 <a:solidFill>
                   <a:srgbClr val="FFFFFF"/>
                 </a:solidFill>
-                <a:latin typeface="Calibri"/>
+                <a:latin typeface="Arial"/>
               </a:defRPr>
             </a:pPr>
             <a:r>
@@ -10784,9 +9373,9 @@
             <a:pPr algn="ctr">
               <a:defRPr sz="1200" b="1">
                 <a:solidFill>
-                  <a:srgbClr val="1A365D"/>
-                </a:solidFill>
-                <a:latin typeface="Calibri"/>
+                  <a:srgbClr val="2D2A5E"/>
+                </a:solidFill>
+                <a:latin typeface="Arial"/>
               </a:defRPr>
             </a:pPr>
             <a:r>
@@ -10820,9 +9409,9 @@
             <a:pPr algn="ctr">
               <a:defRPr sz="900" b="0">
                 <a:solidFill>
-                  <a:srgbClr val="64748B"/>
-                </a:solidFill>
-                <a:latin typeface="Calibri"/>
+                  <a:srgbClr val="6B7280"/>
+                </a:solidFill>
+                <a:latin typeface="Arial"/>
               </a:defRPr>
             </a:pPr>
             <a:r>
@@ -10864,9 +9453,9 @@
             <a:pPr algn="ctr">
               <a:defRPr sz="2400" b="0">
                 <a:solidFill>
-                  <a:srgbClr val="64748B"/>
-                </a:solidFill>
-                <a:latin typeface="Calibri"/>
+                  <a:srgbClr val="6B7280"/>
+                </a:solidFill>
+                <a:latin typeface="Arial"/>
               </a:defRPr>
             </a:pPr>
             <a:r>
@@ -10890,7 +9479,7 @@
             <a:avLst/>
           </a:prstGeom>
           <a:solidFill>
-            <a:srgbClr val="F0A500"/>
+            <a:srgbClr val="FECD1B"/>
           </a:solidFill>
           <a:ln>
             <a:noFill/>
@@ -10945,7 +9534,7 @@
                 <a:solidFill>
                   <a:srgbClr val="FFFFFF"/>
                 </a:solidFill>
-                <a:latin typeface="Calibri"/>
+                <a:latin typeface="Arial"/>
               </a:defRPr>
             </a:pPr>
             <a:r>
@@ -10979,9 +9568,9 @@
             <a:pPr algn="ctr">
               <a:defRPr sz="1200" b="1">
                 <a:solidFill>
-                  <a:srgbClr val="1A365D"/>
-                </a:solidFill>
-                <a:latin typeface="Calibri"/>
+                  <a:srgbClr val="2D2A5E"/>
+                </a:solidFill>
+                <a:latin typeface="Arial"/>
               </a:defRPr>
             </a:pPr>
             <a:r>
@@ -11015,9 +9604,9 @@
             <a:pPr algn="ctr">
               <a:defRPr sz="900" b="0">
                 <a:solidFill>
-                  <a:srgbClr val="64748B"/>
-                </a:solidFill>
-                <a:latin typeface="Calibri"/>
+                  <a:srgbClr val="6B7280"/>
+                </a:solidFill>
+                <a:latin typeface="Arial"/>
               </a:defRPr>
             </a:pPr>
             <a:r>
@@ -11059,9 +9648,9 @@
             <a:pPr algn="ctr">
               <a:defRPr sz="2400" b="0">
                 <a:solidFill>
-                  <a:srgbClr val="64748B"/>
-                </a:solidFill>
-                <a:latin typeface="Calibri"/>
+                  <a:srgbClr val="6B7280"/>
+                </a:solidFill>
+                <a:latin typeface="Arial"/>
               </a:defRPr>
             </a:pPr>
             <a:r>
@@ -11085,7 +9674,7 @@
             <a:avLst/>
           </a:prstGeom>
           <a:solidFill>
-            <a:srgbClr val="EF4444"/>
+            <a:srgbClr val="E8063C"/>
           </a:solidFill>
           <a:ln>
             <a:noFill/>
@@ -11140,7 +9729,7 @@
                 <a:solidFill>
                   <a:srgbClr val="FFFFFF"/>
                 </a:solidFill>
-                <a:latin typeface="Calibri"/>
+                <a:latin typeface="Arial"/>
               </a:defRPr>
             </a:pPr>
             <a:r>
@@ -11174,9 +9763,9 @@
             <a:pPr algn="ctr">
               <a:defRPr sz="1200" b="1">
                 <a:solidFill>
-                  <a:srgbClr val="1A365D"/>
-                </a:solidFill>
-                <a:latin typeface="Calibri"/>
+                  <a:srgbClr val="2D2A5E"/>
+                </a:solidFill>
+                <a:latin typeface="Arial"/>
               </a:defRPr>
             </a:pPr>
             <a:r>
@@ -11210,9 +9799,9 @@
             <a:pPr algn="ctr">
               <a:defRPr sz="900" b="0">
                 <a:solidFill>
-                  <a:srgbClr val="64748B"/>
-                </a:solidFill>
-                <a:latin typeface="Calibri"/>
+                  <a:srgbClr val="6B7280"/>
+                </a:solidFill>
+                <a:latin typeface="Arial"/>
               </a:defRPr>
             </a:pPr>
             <a:r>
@@ -11254,9 +9843,9 @@
             <a:pPr algn="ctr">
               <a:defRPr sz="2400" b="0">
                 <a:solidFill>
-                  <a:srgbClr val="64748B"/>
-                </a:solidFill>
-                <a:latin typeface="Calibri"/>
+                  <a:srgbClr val="6B7280"/>
+                </a:solidFill>
+                <a:latin typeface="Arial"/>
               </a:defRPr>
             </a:pPr>
             <a:r>
@@ -11335,7 +9924,7 @@
                 <a:solidFill>
                   <a:srgbClr val="FFFFFF"/>
                 </a:solidFill>
-                <a:latin typeface="Calibri"/>
+                <a:latin typeface="Arial"/>
               </a:defRPr>
             </a:pPr>
             <a:r>
@@ -11369,9 +9958,9 @@
             <a:pPr algn="ctr">
               <a:defRPr sz="1200" b="1">
                 <a:solidFill>
-                  <a:srgbClr val="1A365D"/>
-                </a:solidFill>
-                <a:latin typeface="Calibri"/>
+                  <a:srgbClr val="2D2A5E"/>
+                </a:solidFill>
+                <a:latin typeface="Arial"/>
               </a:defRPr>
             </a:pPr>
             <a:r>
@@ -11405,9 +9994,9 @@
             <a:pPr algn="ctr">
               <a:defRPr sz="900" b="0">
                 <a:solidFill>
-                  <a:srgbClr val="64748B"/>
-                </a:solidFill>
-                <a:latin typeface="Calibri"/>
+                  <a:srgbClr val="6B7280"/>
+                </a:solidFill>
+                <a:latin typeface="Arial"/>
               </a:defRPr>
             </a:pPr>
             <a:r>
@@ -11439,7 +10028,7 @@
             <a:avLst/>
           </a:prstGeom>
           <a:solidFill>
-            <a:srgbClr val="F7F9FC"/>
+            <a:srgbClr val="FAF6F0"/>
           </a:solidFill>
           <a:ln>
             <a:noFill/>
@@ -11492,9 +10081,9 @@
             <a:pPr algn="l">
               <a:defRPr sz="1000" b="0">
                 <a:solidFill>
-                  <a:srgbClr val="64748B"/>
-                </a:solidFill>
-                <a:latin typeface="Calibri"/>
+                  <a:srgbClr val="6B7280"/>
+                </a:solidFill>
+                <a:latin typeface="Arial"/>
               </a:defRPr>
             </a:pPr>
             <a:r>
@@ -11528,9 +10117,9 @@
             <a:pPr algn="ctr">
               <a:defRPr sz="1300" b="1">
                 <a:solidFill>
-                  <a:srgbClr val="0E7C6B"/>
-                </a:solidFill>
-                <a:latin typeface="Calibri"/>
+                  <a:srgbClr val="01ABAA"/>
+                </a:solidFill>
+                <a:latin typeface="Arial"/>
               </a:defRPr>
             </a:pPr>
             <a:r>
@@ -11580,7 +10169,7 @@
             <a:avLst/>
           </a:prstGeom>
           <a:solidFill>
-            <a:srgbClr val="0E7C6B"/>
+            <a:srgbClr val="01ABAA"/>
           </a:solidFill>
           <a:ln>
             <a:noFill/>
@@ -11633,9 +10222,9 @@
             <a:pPr algn="l">
               <a:defRPr sz="1000" b="1">
                 <a:solidFill>
-                  <a:srgbClr val="0E7C6B"/>
-                </a:solidFill>
-                <a:latin typeface="Calibri"/>
+                  <a:srgbClr val="01ABAA"/>
+                </a:solidFill>
+                <a:latin typeface="Arial"/>
               </a:defRPr>
             </a:pPr>
             <a:r>
@@ -11669,9 +10258,9 @@
             <a:pPr algn="l">
               <a:defRPr sz="2600" b="1">
                 <a:solidFill>
-                  <a:srgbClr val="1A365D"/>
-                </a:solidFill>
-                <a:latin typeface="Calibri"/>
+                  <a:srgbClr val="2D2A5E"/>
+                </a:solidFill>
+                <a:latin typeface="Arial"/>
               </a:defRPr>
             </a:pPr>
             <a:r>
@@ -11695,7 +10284,7 @@
             <a:avLst/>
           </a:prstGeom>
           <a:solidFill>
-            <a:srgbClr val="F7F9FC"/>
+            <a:srgbClr val="FAF6F0"/>
           </a:solidFill>
           <a:ln>
             <a:noFill/>
@@ -11725,20 +10314,92 @@
       </p:sp>
       <p:sp>
         <p:nvSpPr>
-          <p:cNvPr id="6" name="Rectangle 5"/>
+          <p:cNvPr id="6" name="TextBox 5"/>
+          <p:cNvSpPr txBox="1"/>
+          <p:nvPr/>
+        </p:nvSpPr>
+        <p:spPr>
+          <a:xfrm>
+            <a:off x="731520" y="1097280"/>
+            <a:ext cx="1188720" cy="320040"/>
+          </a:xfrm>
+          <a:prstGeom prst="rect">
+            <a:avLst/>
+          </a:prstGeom>
+          <a:noFill/>
+        </p:spPr>
+        <p:txBody>
+          <a:bodyPr wrap="square">
+            <a:spAutoFit/>
+          </a:bodyPr>
+          <a:lstStyle/>
+          <a:p>
+            <a:pPr algn="l">
+              <a:defRPr sz="1100" b="1">
+                <a:solidFill>
+                  <a:srgbClr val="2D2A5E"/>
+                </a:solidFill>
+                <a:latin typeface="Arial"/>
+              </a:defRPr>
+            </a:pPr>
+            <a:r>
+              <a:t>Frontend</a:t>
+            </a:r>
+          </a:p>
+        </p:txBody>
+      </p:sp>
+      <p:sp>
+        <p:nvSpPr>
+          <p:cNvPr id="7" name="TextBox 6"/>
+          <p:cNvSpPr txBox="1"/>
+          <p:nvPr/>
+        </p:nvSpPr>
+        <p:spPr>
+          <a:xfrm>
+            <a:off x="2011680" y="1097280"/>
+            <a:ext cx="2286000" cy="320040"/>
+          </a:xfrm>
+          <a:prstGeom prst="rect">
+            <a:avLst/>
+          </a:prstGeom>
+          <a:noFill/>
+        </p:spPr>
+        <p:txBody>
+          <a:bodyPr wrap="square">
+            <a:spAutoFit/>
+          </a:bodyPr>
+          <a:lstStyle/>
+          <a:p>
+            <a:pPr algn="l">
+              <a:defRPr sz="1000" b="0">
+                <a:solidFill>
+                  <a:srgbClr val="6B7280"/>
+                </a:solidFill>
+                <a:latin typeface="Arial"/>
+              </a:defRPr>
+            </a:pPr>
+            <a:r>
+              <a:t>React / Next.js, TypeScript, TailwindCSS</a:t>
+            </a:r>
+          </a:p>
+        </p:txBody>
+      </p:sp>
+      <p:sp>
+        <p:nvSpPr>
+          <p:cNvPr id="8" name="Rectangle 7"/>
           <p:cNvSpPr/>
           <p:nvPr/>
         </p:nvSpPr>
         <p:spPr>
           <a:xfrm>
-            <a:off x="548640" y="1051560"/>
-            <a:ext cx="54864" cy="438912"/>
+            <a:off x="548640" y="1581912"/>
+            <a:ext cx="3840480" cy="438912"/>
           </a:xfrm>
           <a:prstGeom prst="rect">
             <a:avLst/>
           </a:prstGeom>
           <a:solidFill>
-            <a:srgbClr val="3B82F6"/>
+            <a:srgbClr val="FAF6F0"/>
           </a:solidFill>
           <a:ln>
             <a:noFill/>
@@ -11768,13 +10429,13 @@
       </p:sp>
       <p:sp>
         <p:nvSpPr>
-          <p:cNvPr id="7" name="TextBox 6"/>
-          <p:cNvSpPr txBox="1"/>
-          <p:nvPr/>
-        </p:nvSpPr>
-        <p:spPr>
-          <a:xfrm>
-            <a:off x="731520" y="1097280"/>
+          <p:cNvPr id="9" name="TextBox 8"/>
+          <p:cNvSpPr txBox="1"/>
+          <p:nvPr/>
+        </p:nvSpPr>
+        <p:spPr>
+          <a:xfrm>
+            <a:off x="731520" y="1627632"/>
             <a:ext cx="1188720" cy="320040"/>
           </a:xfrm>
           <a:prstGeom prst="rect">
@@ -11791,26 +10452,26 @@
             <a:pPr algn="l">
               <a:defRPr sz="1100" b="1">
                 <a:solidFill>
-                  <a:srgbClr val="1A365D"/>
-                </a:solidFill>
-                <a:latin typeface="Calibri"/>
-              </a:defRPr>
-            </a:pPr>
-            <a:r>
-              <a:t>Frontend</a:t>
-            </a:r>
-          </a:p>
-        </p:txBody>
-      </p:sp>
-      <p:sp>
-        <p:nvSpPr>
-          <p:cNvPr id="8" name="TextBox 7"/>
-          <p:cNvSpPr txBox="1"/>
-          <p:nvPr/>
-        </p:nvSpPr>
-        <p:spPr>
-          <a:xfrm>
-            <a:off x="2011680" y="1097280"/>
+                  <a:srgbClr val="2D2A5E"/>
+                </a:solidFill>
+                <a:latin typeface="Arial"/>
+              </a:defRPr>
+            </a:pPr>
+            <a:r>
+              <a:t>Backend</a:t>
+            </a:r>
+          </a:p>
+        </p:txBody>
+      </p:sp>
+      <p:sp>
+        <p:nvSpPr>
+          <p:cNvPr id="10" name="TextBox 9"/>
+          <p:cNvSpPr txBox="1"/>
+          <p:nvPr/>
+        </p:nvSpPr>
+        <p:spPr>
+          <a:xfrm>
+            <a:off x="2011680" y="1627632"/>
             <a:ext cx="2286000" cy="320040"/>
           </a:xfrm>
           <a:prstGeom prst="rect">
@@ -11827,33 +10488,33 @@
             <a:pPr algn="l">
               <a:defRPr sz="1000" b="0">
                 <a:solidFill>
-                  <a:srgbClr val="64748B"/>
-                </a:solidFill>
-                <a:latin typeface="Calibri"/>
-              </a:defRPr>
-            </a:pPr>
-            <a:r>
-              <a:t>React / Next.js, TypeScript, TailwindCSS</a:t>
-            </a:r>
-          </a:p>
-        </p:txBody>
-      </p:sp>
-      <p:sp>
-        <p:nvSpPr>
-          <p:cNvPr id="9" name="Rectangle 8"/>
+                  <a:srgbClr val="6B7280"/>
+                </a:solidFill>
+                <a:latin typeface="Arial"/>
+              </a:defRPr>
+            </a:pPr>
+            <a:r>
+              <a:t>Python 3.11+, FastAPI, Uvicorn</a:t>
+            </a:r>
+          </a:p>
+        </p:txBody>
+      </p:sp>
+      <p:sp>
+        <p:nvSpPr>
+          <p:cNvPr id="11" name="Rectangle 10"/>
           <p:cNvSpPr/>
           <p:nvPr/>
         </p:nvSpPr>
         <p:spPr>
           <a:xfrm>
-            <a:off x="548640" y="1581912"/>
+            <a:off x="548640" y="2112263"/>
             <a:ext cx="3840480" cy="438912"/>
           </a:xfrm>
           <a:prstGeom prst="rect">
             <a:avLst/>
           </a:prstGeom>
           <a:solidFill>
-            <a:srgbClr val="F7F9FC"/>
+            <a:srgbClr val="FAF6F0"/>
           </a:solidFill>
           <a:ln>
             <a:noFill/>
@@ -11883,20 +10544,92 @@
       </p:sp>
       <p:sp>
         <p:nvSpPr>
-          <p:cNvPr id="10" name="Rectangle 9"/>
+          <p:cNvPr id="12" name="TextBox 11"/>
+          <p:cNvSpPr txBox="1"/>
+          <p:nvPr/>
+        </p:nvSpPr>
+        <p:spPr>
+          <a:xfrm>
+            <a:off x="731520" y="2157983"/>
+            <a:ext cx="1188720" cy="320040"/>
+          </a:xfrm>
+          <a:prstGeom prst="rect">
+            <a:avLst/>
+          </a:prstGeom>
+          <a:noFill/>
+        </p:spPr>
+        <p:txBody>
+          <a:bodyPr wrap="square">
+            <a:spAutoFit/>
+          </a:bodyPr>
+          <a:lstStyle/>
+          <a:p>
+            <a:pPr algn="l">
+              <a:defRPr sz="1100" b="1">
+                <a:solidFill>
+                  <a:srgbClr val="2D2A5E"/>
+                </a:solidFill>
+                <a:latin typeface="Arial"/>
+              </a:defRPr>
+            </a:pPr>
+            <a:r>
+              <a:t>AI / LLM</a:t>
+            </a:r>
+          </a:p>
+        </p:txBody>
+      </p:sp>
+      <p:sp>
+        <p:nvSpPr>
+          <p:cNvPr id="13" name="TextBox 12"/>
+          <p:cNvSpPr txBox="1"/>
+          <p:nvPr/>
+        </p:nvSpPr>
+        <p:spPr>
+          <a:xfrm>
+            <a:off x="2011680" y="2157983"/>
+            <a:ext cx="2286000" cy="320040"/>
+          </a:xfrm>
+          <a:prstGeom prst="rect">
+            <a:avLst/>
+          </a:prstGeom>
+          <a:noFill/>
+        </p:spPr>
+        <p:txBody>
+          <a:bodyPr wrap="square">
+            <a:spAutoFit/>
+          </a:bodyPr>
+          <a:lstStyle/>
+          <a:p>
+            <a:pPr algn="l">
+              <a:defRPr sz="1000" b="0">
+                <a:solidFill>
+                  <a:srgbClr val="6B7280"/>
+                </a:solidFill>
+                <a:latin typeface="Arial"/>
+              </a:defRPr>
+            </a:pPr>
+            <a:r>
+              <a:t>Claude Haiku 4.5 via Azure AI Foundry</a:t>
+            </a:r>
+          </a:p>
+        </p:txBody>
+      </p:sp>
+      <p:sp>
+        <p:nvSpPr>
+          <p:cNvPr id="14" name="Rectangle 13"/>
           <p:cNvSpPr/>
           <p:nvPr/>
         </p:nvSpPr>
         <p:spPr>
           <a:xfrm>
-            <a:off x="548640" y="1581912"/>
-            <a:ext cx="54864" cy="438912"/>
+            <a:off x="548640" y="2642615"/>
+            <a:ext cx="3840480" cy="438912"/>
           </a:xfrm>
           <a:prstGeom prst="rect">
             <a:avLst/>
           </a:prstGeom>
           <a:solidFill>
-            <a:srgbClr val="0E7C6B"/>
+            <a:srgbClr val="FAF6F0"/>
           </a:solidFill>
           <a:ln>
             <a:noFill/>
@@ -11926,13 +10659,13 @@
       </p:sp>
       <p:sp>
         <p:nvSpPr>
-          <p:cNvPr id="11" name="TextBox 10"/>
-          <p:cNvSpPr txBox="1"/>
-          <p:nvPr/>
-        </p:nvSpPr>
-        <p:spPr>
-          <a:xfrm>
-            <a:off x="731520" y="1627632"/>
+          <p:cNvPr id="15" name="TextBox 14"/>
+          <p:cNvSpPr txBox="1"/>
+          <p:nvPr/>
+        </p:nvSpPr>
+        <p:spPr>
+          <a:xfrm>
+            <a:off x="731520" y="2688335"/>
             <a:ext cx="1188720" cy="320040"/>
           </a:xfrm>
           <a:prstGeom prst="rect">
@@ -11949,26 +10682,26 @@
             <a:pPr algn="l">
               <a:defRPr sz="1100" b="1">
                 <a:solidFill>
-                  <a:srgbClr val="1A365D"/>
-                </a:solidFill>
-                <a:latin typeface="Calibri"/>
-              </a:defRPr>
-            </a:pPr>
-            <a:r>
-              <a:t>Backend</a:t>
-            </a:r>
-          </a:p>
-        </p:txBody>
-      </p:sp>
-      <p:sp>
-        <p:nvSpPr>
-          <p:cNvPr id="12" name="TextBox 11"/>
-          <p:cNvSpPr txBox="1"/>
-          <p:nvPr/>
-        </p:nvSpPr>
-        <p:spPr>
-          <a:xfrm>
-            <a:off x="2011680" y="1627632"/>
+                  <a:srgbClr val="2D2A5E"/>
+                </a:solidFill>
+                <a:latin typeface="Arial"/>
+              </a:defRPr>
+            </a:pPr>
+            <a:r>
+              <a:t>Database</a:t>
+            </a:r>
+          </a:p>
+        </p:txBody>
+      </p:sp>
+      <p:sp>
+        <p:nvSpPr>
+          <p:cNvPr id="16" name="TextBox 15"/>
+          <p:cNvSpPr txBox="1"/>
+          <p:nvPr/>
+        </p:nvSpPr>
+        <p:spPr>
+          <a:xfrm>
+            <a:off x="2011680" y="2688335"/>
             <a:ext cx="2286000" cy="320040"/>
           </a:xfrm>
           <a:prstGeom prst="rect">
@@ -11985,33 +10718,33 @@
             <a:pPr algn="l">
               <a:defRPr sz="1000" b="0">
                 <a:solidFill>
-                  <a:srgbClr val="64748B"/>
-                </a:solidFill>
-                <a:latin typeface="Calibri"/>
-              </a:defRPr>
-            </a:pPr>
-            <a:r>
-              <a:t>Python 3.11+, FastAPI, Uvicorn</a:t>
-            </a:r>
-          </a:p>
-        </p:txBody>
-      </p:sp>
-      <p:sp>
-        <p:nvSpPr>
-          <p:cNvPr id="13" name="Rectangle 12"/>
+                  <a:srgbClr val="6B7280"/>
+                </a:solidFill>
+                <a:latin typeface="Arial"/>
+              </a:defRPr>
+            </a:pPr>
+            <a:r>
+              <a:t>PostgreSQL (children, plans, portfolios)</a:t>
+            </a:r>
+          </a:p>
+        </p:txBody>
+      </p:sp>
+      <p:sp>
+        <p:nvSpPr>
+          <p:cNvPr id="17" name="Rectangle 16"/>
           <p:cNvSpPr/>
           <p:nvPr/>
         </p:nvSpPr>
         <p:spPr>
           <a:xfrm>
-            <a:off x="548640" y="2112263"/>
+            <a:off x="548640" y="3172968"/>
             <a:ext cx="3840480" cy="438912"/>
           </a:xfrm>
           <a:prstGeom prst="rect">
             <a:avLst/>
           </a:prstGeom>
           <a:solidFill>
-            <a:srgbClr val="F7F9FC"/>
+            <a:srgbClr val="FAF6F0"/>
           </a:solidFill>
           <a:ln>
             <a:noFill/>
@@ -12041,20 +10774,92 @@
       </p:sp>
       <p:sp>
         <p:nvSpPr>
-          <p:cNvPr id="14" name="Rectangle 13"/>
+          <p:cNvPr id="18" name="TextBox 17"/>
+          <p:cNvSpPr txBox="1"/>
+          <p:nvPr/>
+        </p:nvSpPr>
+        <p:spPr>
+          <a:xfrm>
+            <a:off x="731520" y="3218688"/>
+            <a:ext cx="1188720" cy="320040"/>
+          </a:xfrm>
+          <a:prstGeom prst="rect">
+            <a:avLst/>
+          </a:prstGeom>
+          <a:noFill/>
+        </p:spPr>
+        <p:txBody>
+          <a:bodyPr wrap="square">
+            <a:spAutoFit/>
+          </a:bodyPr>
+          <a:lstStyle/>
+          <a:p>
+            <a:pPr algn="l">
+              <a:defRPr sz="1100" b="1">
+                <a:solidFill>
+                  <a:srgbClr val="2D2A5E"/>
+                </a:solidFill>
+                <a:latin typeface="Arial"/>
+              </a:defRPr>
+            </a:pPr>
+            <a:r>
+              <a:t>Auth</a:t>
+            </a:r>
+          </a:p>
+        </p:txBody>
+      </p:sp>
+      <p:sp>
+        <p:nvSpPr>
+          <p:cNvPr id="19" name="TextBox 18"/>
+          <p:cNvSpPr txBox="1"/>
+          <p:nvPr/>
+        </p:nvSpPr>
+        <p:spPr>
+          <a:xfrm>
+            <a:off x="2011680" y="3218688"/>
+            <a:ext cx="2286000" cy="320040"/>
+          </a:xfrm>
+          <a:prstGeom prst="rect">
+            <a:avLst/>
+          </a:prstGeom>
+          <a:noFill/>
+        </p:spPr>
+        <p:txBody>
+          <a:bodyPr wrap="square">
+            <a:spAutoFit/>
+          </a:bodyPr>
+          <a:lstStyle/>
+          <a:p>
+            <a:pPr algn="l">
+              <a:defRPr sz="1000" b="0">
+                <a:solidFill>
+                  <a:srgbClr val="6B7280"/>
+                </a:solidFill>
+                <a:latin typeface="Arial"/>
+              </a:defRPr>
+            </a:pPr>
+            <a:r>
+              <a:t>JWT + bcrypt, RBAC (educator / director / admin)</a:t>
+            </a:r>
+          </a:p>
+        </p:txBody>
+      </p:sp>
+      <p:sp>
+        <p:nvSpPr>
+          <p:cNvPr id="20" name="Rectangle 19"/>
           <p:cNvSpPr/>
           <p:nvPr/>
         </p:nvSpPr>
         <p:spPr>
           <a:xfrm>
-            <a:off x="548640" y="2112263"/>
-            <a:ext cx="54864" cy="438912"/>
+            <a:off x="548640" y="3703320"/>
+            <a:ext cx="3840480" cy="438912"/>
           </a:xfrm>
           <a:prstGeom prst="rect">
             <a:avLst/>
           </a:prstGeom>
           <a:solidFill>
-            <a:srgbClr val="F0A500"/>
+            <a:srgbClr val="FAF6F0"/>
           </a:solidFill>
           <a:ln>
             <a:noFill/>
@@ -12084,13 +10889,13 @@
       </p:sp>
       <p:sp>
         <p:nvSpPr>
-          <p:cNvPr id="15" name="TextBox 14"/>
-          <p:cNvSpPr txBox="1"/>
-          <p:nvPr/>
-        </p:nvSpPr>
-        <p:spPr>
-          <a:xfrm>
-            <a:off x="731520" y="2157983"/>
+          <p:cNvPr id="21" name="TextBox 20"/>
+          <p:cNvSpPr txBox="1"/>
+          <p:nvPr/>
+        </p:nvSpPr>
+        <p:spPr>
+          <a:xfrm>
+            <a:off x="731520" y="3749040"/>
             <a:ext cx="1188720" cy="320040"/>
           </a:xfrm>
           <a:prstGeom prst="rect">
@@ -12107,26 +10912,26 @@
             <a:pPr algn="l">
               <a:defRPr sz="1100" b="1">
                 <a:solidFill>
-                  <a:srgbClr val="1A365D"/>
-                </a:solidFill>
-                <a:latin typeface="Calibri"/>
-              </a:defRPr>
-            </a:pPr>
-            <a:r>
-              <a:t>AI / LLM</a:t>
-            </a:r>
-          </a:p>
-        </p:txBody>
-      </p:sp>
-      <p:sp>
-        <p:nvSpPr>
-          <p:cNvPr id="16" name="TextBox 15"/>
-          <p:cNvSpPr txBox="1"/>
-          <p:nvPr/>
-        </p:nvSpPr>
-        <p:spPr>
-          <a:xfrm>
-            <a:off x="2011680" y="2157983"/>
+                  <a:srgbClr val="2D2A5E"/>
+                </a:solidFill>
+                <a:latin typeface="Arial"/>
+              </a:defRPr>
+            </a:pPr>
+            <a:r>
+              <a:t>Hosting</a:t>
+            </a:r>
+          </a:p>
+        </p:txBody>
+      </p:sp>
+      <p:sp>
+        <p:nvSpPr>
+          <p:cNvPr id="22" name="TextBox 21"/>
+          <p:cNvSpPr txBox="1"/>
+          <p:nvPr/>
+        </p:nvSpPr>
+        <p:spPr>
+          <a:xfrm>
+            <a:off x="2011680" y="3749040"/>
             <a:ext cx="2286000" cy="320040"/>
           </a:xfrm>
           <a:prstGeom prst="rect">
@@ -12143,494 +10948,20 @@
             <a:pPr algn="l">
               <a:defRPr sz="1000" b="0">
                 <a:solidFill>
-                  <a:srgbClr val="64748B"/>
-                </a:solidFill>
-                <a:latin typeface="Calibri"/>
-              </a:defRPr>
-            </a:pPr>
-            <a:r>
-              <a:t>Claude Opus 4 via Azure AI Foundry</a:t>
-            </a:r>
-          </a:p>
-        </p:txBody>
-      </p:sp>
-      <p:sp>
-        <p:nvSpPr>
-          <p:cNvPr id="17" name="Rectangle 16"/>
-          <p:cNvSpPr/>
-          <p:nvPr/>
-        </p:nvSpPr>
-        <p:spPr>
-          <a:xfrm>
-            <a:off x="548640" y="2642615"/>
-            <a:ext cx="3840480" cy="438912"/>
-          </a:xfrm>
-          <a:prstGeom prst="rect">
-            <a:avLst/>
-          </a:prstGeom>
-          <a:solidFill>
-            <a:srgbClr val="F7F9FC"/>
-          </a:solidFill>
-          <a:ln>
-            <a:noFill/>
-          </a:ln>
-        </p:spPr>
-        <p:style>
-          <a:lnRef idx="1">
-            <a:schemeClr val="accent1"/>
-          </a:lnRef>
-          <a:fillRef idx="3">
-            <a:schemeClr val="accent1"/>
-          </a:fillRef>
-          <a:effectRef idx="2">
-            <a:schemeClr val="accent1"/>
-          </a:effectRef>
-          <a:fontRef idx="minor">
-            <a:schemeClr val="lt1"/>
-          </a:fontRef>
-        </p:style>
-        <p:txBody>
-          <a:bodyPr rtlCol="0" anchor="ctr"/>
-          <a:lstStyle/>
-          <a:p>
-            <a:pPr algn="ctr"/>
-          </a:p>
-        </p:txBody>
-      </p:sp>
-      <p:sp>
-        <p:nvSpPr>
-          <p:cNvPr id="18" name="Rectangle 17"/>
-          <p:cNvSpPr/>
-          <p:nvPr/>
-        </p:nvSpPr>
-        <p:spPr>
-          <a:xfrm>
-            <a:off x="548640" y="2642615"/>
-            <a:ext cx="54864" cy="438912"/>
-          </a:xfrm>
-          <a:prstGeom prst="rect">
-            <a:avLst/>
-          </a:prstGeom>
-          <a:solidFill>
-            <a:srgbClr val="8B5CF6"/>
-          </a:solidFill>
-          <a:ln>
-            <a:noFill/>
-          </a:ln>
-        </p:spPr>
-        <p:style>
-          <a:lnRef idx="1">
-            <a:schemeClr val="accent1"/>
-          </a:lnRef>
-          <a:fillRef idx="3">
-            <a:schemeClr val="accent1"/>
-          </a:fillRef>
-          <a:effectRef idx="2">
-            <a:schemeClr val="accent1"/>
-          </a:effectRef>
-          <a:fontRef idx="minor">
-            <a:schemeClr val="lt1"/>
-          </a:fontRef>
-        </p:style>
-        <p:txBody>
-          <a:bodyPr rtlCol="0" anchor="ctr"/>
-          <a:lstStyle/>
-          <a:p>
-            <a:pPr algn="ctr"/>
-          </a:p>
-        </p:txBody>
-      </p:sp>
-      <p:sp>
-        <p:nvSpPr>
-          <p:cNvPr id="19" name="TextBox 18"/>
-          <p:cNvSpPr txBox="1"/>
-          <p:nvPr/>
-        </p:nvSpPr>
-        <p:spPr>
-          <a:xfrm>
-            <a:off x="731520" y="2688335"/>
-            <a:ext cx="1188720" cy="320040"/>
-          </a:xfrm>
-          <a:prstGeom prst="rect">
-            <a:avLst/>
-          </a:prstGeom>
-          <a:noFill/>
-        </p:spPr>
-        <p:txBody>
-          <a:bodyPr wrap="square">
-            <a:spAutoFit/>
-          </a:bodyPr>
-          <a:lstStyle/>
-          <a:p>
-            <a:pPr algn="l">
-              <a:defRPr sz="1100" b="1">
-                <a:solidFill>
-                  <a:srgbClr val="1A365D"/>
-                </a:solidFill>
-                <a:latin typeface="Calibri"/>
-              </a:defRPr>
-            </a:pPr>
-            <a:r>
-              <a:t>Database</a:t>
-            </a:r>
-          </a:p>
-        </p:txBody>
-      </p:sp>
-      <p:sp>
-        <p:nvSpPr>
-          <p:cNvPr id="20" name="TextBox 19"/>
-          <p:cNvSpPr txBox="1"/>
-          <p:nvPr/>
-        </p:nvSpPr>
-        <p:spPr>
-          <a:xfrm>
-            <a:off x="2011680" y="2688335"/>
-            <a:ext cx="2286000" cy="320040"/>
-          </a:xfrm>
-          <a:prstGeom prst="rect">
-            <a:avLst/>
-          </a:prstGeom>
-          <a:noFill/>
-        </p:spPr>
-        <p:txBody>
-          <a:bodyPr wrap="square">
-            <a:spAutoFit/>
-          </a:bodyPr>
-          <a:lstStyle/>
-          <a:p>
-            <a:pPr algn="l">
-              <a:defRPr sz="1000" b="0">
-                <a:solidFill>
-                  <a:srgbClr val="64748B"/>
-                </a:solidFill>
-                <a:latin typeface="Calibri"/>
-              </a:defRPr>
-            </a:pPr>
-            <a:r>
-              <a:t>PostgreSQL (children, plans, portfolios)</a:t>
-            </a:r>
-          </a:p>
-        </p:txBody>
-      </p:sp>
-      <p:sp>
-        <p:nvSpPr>
-          <p:cNvPr id="21" name="Rectangle 20"/>
-          <p:cNvSpPr/>
-          <p:nvPr/>
-        </p:nvSpPr>
-        <p:spPr>
-          <a:xfrm>
-            <a:off x="548640" y="3172968"/>
-            <a:ext cx="3840480" cy="438912"/>
-          </a:xfrm>
-          <a:prstGeom prst="rect">
-            <a:avLst/>
-          </a:prstGeom>
-          <a:solidFill>
-            <a:srgbClr val="F7F9FC"/>
-          </a:solidFill>
-          <a:ln>
-            <a:noFill/>
-          </a:ln>
-        </p:spPr>
-        <p:style>
-          <a:lnRef idx="1">
-            <a:schemeClr val="accent1"/>
-          </a:lnRef>
-          <a:fillRef idx="3">
-            <a:schemeClr val="accent1"/>
-          </a:fillRef>
-          <a:effectRef idx="2">
-            <a:schemeClr val="accent1"/>
-          </a:effectRef>
-          <a:fontRef idx="minor">
-            <a:schemeClr val="lt1"/>
-          </a:fontRef>
-        </p:style>
-        <p:txBody>
-          <a:bodyPr rtlCol="0" anchor="ctr"/>
-          <a:lstStyle/>
-          <a:p>
-            <a:pPr algn="ctr"/>
-          </a:p>
-        </p:txBody>
-      </p:sp>
-      <p:sp>
-        <p:nvSpPr>
-          <p:cNvPr id="22" name="Rectangle 21"/>
-          <p:cNvSpPr/>
-          <p:nvPr/>
-        </p:nvSpPr>
-        <p:spPr>
-          <a:xfrm>
-            <a:off x="548640" y="3172968"/>
-            <a:ext cx="54864" cy="438912"/>
-          </a:xfrm>
-          <a:prstGeom prst="rect">
-            <a:avLst/>
-          </a:prstGeom>
-          <a:solidFill>
-            <a:srgbClr val="EF4444"/>
-          </a:solidFill>
-          <a:ln>
-            <a:noFill/>
-          </a:ln>
-        </p:spPr>
-        <p:style>
-          <a:lnRef idx="1">
-            <a:schemeClr val="accent1"/>
-          </a:lnRef>
-          <a:fillRef idx="3">
-            <a:schemeClr val="accent1"/>
-          </a:fillRef>
-          <a:effectRef idx="2">
-            <a:schemeClr val="accent1"/>
-          </a:effectRef>
-          <a:fontRef idx="minor">
-            <a:schemeClr val="lt1"/>
-          </a:fontRef>
-        </p:style>
-        <p:txBody>
-          <a:bodyPr rtlCol="0" anchor="ctr"/>
-          <a:lstStyle/>
-          <a:p>
-            <a:pPr algn="ctr"/>
+                  <a:srgbClr val="6B7280"/>
+                </a:solidFill>
+                <a:latin typeface="Arial"/>
+              </a:defRPr>
+            </a:pPr>
+            <a:r>
+              <a:t>Azure App Service (SG region), Key Vault</a:t>
+            </a:r>
           </a:p>
         </p:txBody>
       </p:sp>
       <p:sp>
         <p:nvSpPr>
           <p:cNvPr id="23" name="TextBox 22"/>
-          <p:cNvSpPr txBox="1"/>
-          <p:nvPr/>
-        </p:nvSpPr>
-        <p:spPr>
-          <a:xfrm>
-            <a:off x="731520" y="3218688"/>
-            <a:ext cx="1188720" cy="320040"/>
-          </a:xfrm>
-          <a:prstGeom prst="rect">
-            <a:avLst/>
-          </a:prstGeom>
-          <a:noFill/>
-        </p:spPr>
-        <p:txBody>
-          <a:bodyPr wrap="square">
-            <a:spAutoFit/>
-          </a:bodyPr>
-          <a:lstStyle/>
-          <a:p>
-            <a:pPr algn="l">
-              <a:defRPr sz="1100" b="1">
-                <a:solidFill>
-                  <a:srgbClr val="1A365D"/>
-                </a:solidFill>
-                <a:latin typeface="Calibri"/>
-              </a:defRPr>
-            </a:pPr>
-            <a:r>
-              <a:t>Auth</a:t>
-            </a:r>
-          </a:p>
-        </p:txBody>
-      </p:sp>
-      <p:sp>
-        <p:nvSpPr>
-          <p:cNvPr id="24" name="TextBox 23"/>
-          <p:cNvSpPr txBox="1"/>
-          <p:nvPr/>
-        </p:nvSpPr>
-        <p:spPr>
-          <a:xfrm>
-            <a:off x="2011680" y="3218688"/>
-            <a:ext cx="2286000" cy="320040"/>
-          </a:xfrm>
-          <a:prstGeom prst="rect">
-            <a:avLst/>
-          </a:prstGeom>
-          <a:noFill/>
-        </p:spPr>
-        <p:txBody>
-          <a:bodyPr wrap="square">
-            <a:spAutoFit/>
-          </a:bodyPr>
-          <a:lstStyle/>
-          <a:p>
-            <a:pPr algn="l">
-              <a:defRPr sz="1000" b="0">
-                <a:solidFill>
-                  <a:srgbClr val="64748B"/>
-                </a:solidFill>
-                <a:latin typeface="Calibri"/>
-              </a:defRPr>
-            </a:pPr>
-            <a:r>
-              <a:t>JWT + bcrypt, RBAC (educator / director / admin)</a:t>
-            </a:r>
-          </a:p>
-        </p:txBody>
-      </p:sp>
-      <p:sp>
-        <p:nvSpPr>
-          <p:cNvPr id="25" name="Rectangle 24"/>
-          <p:cNvSpPr/>
-          <p:nvPr/>
-        </p:nvSpPr>
-        <p:spPr>
-          <a:xfrm>
-            <a:off x="548640" y="3703320"/>
-            <a:ext cx="3840480" cy="438912"/>
-          </a:xfrm>
-          <a:prstGeom prst="rect">
-            <a:avLst/>
-          </a:prstGeom>
-          <a:solidFill>
-            <a:srgbClr val="F7F9FC"/>
-          </a:solidFill>
-          <a:ln>
-            <a:noFill/>
-          </a:ln>
-        </p:spPr>
-        <p:style>
-          <a:lnRef idx="1">
-            <a:schemeClr val="accent1"/>
-          </a:lnRef>
-          <a:fillRef idx="3">
-            <a:schemeClr val="accent1"/>
-          </a:fillRef>
-          <a:effectRef idx="2">
-            <a:schemeClr val="accent1"/>
-          </a:effectRef>
-          <a:fontRef idx="minor">
-            <a:schemeClr val="lt1"/>
-          </a:fontRef>
-        </p:style>
-        <p:txBody>
-          <a:bodyPr rtlCol="0" anchor="ctr"/>
-          <a:lstStyle/>
-          <a:p>
-            <a:pPr algn="ctr"/>
-          </a:p>
-        </p:txBody>
-      </p:sp>
-      <p:sp>
-        <p:nvSpPr>
-          <p:cNvPr id="26" name="Rectangle 25"/>
-          <p:cNvSpPr/>
-          <p:nvPr/>
-        </p:nvSpPr>
-        <p:spPr>
-          <a:xfrm>
-            <a:off x="548640" y="3703320"/>
-            <a:ext cx="54864" cy="438912"/>
-          </a:xfrm>
-          <a:prstGeom prst="rect">
-            <a:avLst/>
-          </a:prstGeom>
-          <a:solidFill>
-            <a:srgbClr val="1A365D"/>
-          </a:solidFill>
-          <a:ln>
-            <a:noFill/>
-          </a:ln>
-        </p:spPr>
-        <p:style>
-          <a:lnRef idx="1">
-            <a:schemeClr val="accent1"/>
-          </a:lnRef>
-          <a:fillRef idx="3">
-            <a:schemeClr val="accent1"/>
-          </a:fillRef>
-          <a:effectRef idx="2">
-            <a:schemeClr val="accent1"/>
-          </a:effectRef>
-          <a:fontRef idx="minor">
-            <a:schemeClr val="lt1"/>
-          </a:fontRef>
-        </p:style>
-        <p:txBody>
-          <a:bodyPr rtlCol="0" anchor="ctr"/>
-          <a:lstStyle/>
-          <a:p>
-            <a:pPr algn="ctr"/>
-          </a:p>
-        </p:txBody>
-      </p:sp>
-      <p:sp>
-        <p:nvSpPr>
-          <p:cNvPr id="27" name="TextBox 26"/>
-          <p:cNvSpPr txBox="1"/>
-          <p:nvPr/>
-        </p:nvSpPr>
-        <p:spPr>
-          <a:xfrm>
-            <a:off x="731520" y="3749040"/>
-            <a:ext cx="1188720" cy="320040"/>
-          </a:xfrm>
-          <a:prstGeom prst="rect">
-            <a:avLst/>
-          </a:prstGeom>
-          <a:noFill/>
-        </p:spPr>
-        <p:txBody>
-          <a:bodyPr wrap="square">
-            <a:spAutoFit/>
-          </a:bodyPr>
-          <a:lstStyle/>
-          <a:p>
-            <a:pPr algn="l">
-              <a:defRPr sz="1100" b="1">
-                <a:solidFill>
-                  <a:srgbClr val="1A365D"/>
-                </a:solidFill>
-                <a:latin typeface="Calibri"/>
-              </a:defRPr>
-            </a:pPr>
-            <a:r>
-              <a:t>Hosting</a:t>
-            </a:r>
-          </a:p>
-        </p:txBody>
-      </p:sp>
-      <p:sp>
-        <p:nvSpPr>
-          <p:cNvPr id="28" name="TextBox 27"/>
-          <p:cNvSpPr txBox="1"/>
-          <p:nvPr/>
-        </p:nvSpPr>
-        <p:spPr>
-          <a:xfrm>
-            <a:off x="2011680" y="3749040"/>
-            <a:ext cx="2286000" cy="320040"/>
-          </a:xfrm>
-          <a:prstGeom prst="rect">
-            <a:avLst/>
-          </a:prstGeom>
-          <a:noFill/>
-        </p:spPr>
-        <p:txBody>
-          <a:bodyPr wrap="square">
-            <a:spAutoFit/>
-          </a:bodyPr>
-          <a:lstStyle/>
-          <a:p>
-            <a:pPr algn="l">
-              <a:defRPr sz="1000" b="0">
-                <a:solidFill>
-                  <a:srgbClr val="64748B"/>
-                </a:solidFill>
-                <a:latin typeface="Calibri"/>
-              </a:defRPr>
-            </a:pPr>
-            <a:r>
-              <a:t>Azure App Service (SG region), Key Vault</a:t>
-            </a:r>
-          </a:p>
-        </p:txBody>
-      </p:sp>
-      <p:sp>
-        <p:nvSpPr>
-          <p:cNvPr id="29" name="TextBox 28"/>
           <p:cNvSpPr txBox="1"/>
           <p:nvPr/>
         </p:nvSpPr>
@@ -12653,9 +10984,9 @@
             <a:pPr algn="l">
               <a:defRPr sz="1400" b="1">
                 <a:solidFill>
-                  <a:srgbClr val="1A365D"/>
-                </a:solidFill>
-                <a:latin typeface="Calibri"/>
+                  <a:srgbClr val="2D2A5E"/>
+                </a:solidFill>
+                <a:latin typeface="Arial"/>
               </a:defRPr>
             </a:pPr>
             <a:r>
@@ -12666,7 +10997,7 @@
       </p:sp>
       <p:sp>
         <p:nvSpPr>
-          <p:cNvPr id="30" name="TextBox 29"/>
+          <p:cNvPr id="24" name="TextBox 23"/>
           <p:cNvSpPr txBox="1"/>
           <p:nvPr/>
         </p:nvSpPr>
@@ -12689,9 +11020,9 @@
             <a:pPr algn="l">
               <a:defRPr sz="1000" b="1">
                 <a:solidFill>
-                  <a:srgbClr val="0E7C6B"/>
-                </a:solidFill>
-                <a:latin typeface="Calibri"/>
+                  <a:srgbClr val="01ABAA"/>
+                </a:solidFill>
+                <a:latin typeface="Arial"/>
               </a:defRPr>
             </a:pPr>
             <a:r>
@@ -12702,7 +11033,7 @@
       </p:sp>
       <p:sp>
         <p:nvSpPr>
-          <p:cNvPr id="31" name="TextBox 30"/>
+          <p:cNvPr id="25" name="TextBox 24"/>
           <p:cNvSpPr txBox="1"/>
           <p:nvPr/>
         </p:nvSpPr>
@@ -12725,9 +11056,9 @@
             <a:pPr algn="l">
               <a:defRPr sz="900" b="0">
                 <a:solidFill>
-                  <a:srgbClr val="64748B"/>
-                </a:solidFill>
-                <a:latin typeface="Calibri"/>
+                  <a:srgbClr val="6B7280"/>
+                </a:solidFill>
+                <a:latin typeface="Arial"/>
               </a:defRPr>
             </a:pPr>
             <a:r>
@@ -12738,7 +11069,7 @@
       </p:sp>
       <p:sp>
         <p:nvSpPr>
-          <p:cNvPr id="32" name="TextBox 31"/>
+          <p:cNvPr id="26" name="TextBox 25"/>
           <p:cNvSpPr txBox="1"/>
           <p:nvPr/>
         </p:nvSpPr>
@@ -12761,9 +11092,9 @@
             <a:pPr algn="l">
               <a:defRPr sz="1000" b="1">
                 <a:solidFill>
-                  <a:srgbClr val="0E7C6B"/>
-                </a:solidFill>
-                <a:latin typeface="Calibri"/>
+                  <a:srgbClr val="01ABAA"/>
+                </a:solidFill>
+                <a:latin typeface="Arial"/>
               </a:defRPr>
             </a:pPr>
             <a:r>
@@ -12774,7 +11105,7 @@
       </p:sp>
       <p:sp>
         <p:nvSpPr>
-          <p:cNvPr id="33" name="TextBox 32"/>
+          <p:cNvPr id="27" name="TextBox 26"/>
           <p:cNvSpPr txBox="1"/>
           <p:nvPr/>
         </p:nvSpPr>
@@ -12797,9 +11128,9 @@
             <a:pPr algn="l">
               <a:defRPr sz="900" b="0">
                 <a:solidFill>
-                  <a:srgbClr val="64748B"/>
-                </a:solidFill>
-                <a:latin typeface="Calibri"/>
+                  <a:srgbClr val="6B7280"/>
+                </a:solidFill>
+                <a:latin typeface="Arial"/>
               </a:defRPr>
             </a:pPr>
             <a:r>
@@ -12810,7 +11141,7 @@
       </p:sp>
       <p:sp>
         <p:nvSpPr>
-          <p:cNvPr id="34" name="TextBox 33"/>
+          <p:cNvPr id="28" name="TextBox 27"/>
           <p:cNvSpPr txBox="1"/>
           <p:nvPr/>
         </p:nvSpPr>
@@ -12833,9 +11164,9 @@
             <a:pPr algn="l">
               <a:defRPr sz="1000" b="1">
                 <a:solidFill>
-                  <a:srgbClr val="0E7C6B"/>
-                </a:solidFill>
-                <a:latin typeface="Calibri"/>
+                  <a:srgbClr val="01ABAA"/>
+                </a:solidFill>
+                <a:latin typeface="Arial"/>
               </a:defRPr>
             </a:pPr>
             <a:r>
@@ -12846,7 +11177,7 @@
       </p:sp>
       <p:sp>
         <p:nvSpPr>
-          <p:cNvPr id="35" name="TextBox 34"/>
+          <p:cNvPr id="29" name="TextBox 28"/>
           <p:cNvSpPr txBox="1"/>
           <p:nvPr/>
         </p:nvSpPr>
@@ -12869,20 +11200,20 @@
             <a:pPr algn="l">
               <a:defRPr sz="900" b="0">
                 <a:solidFill>
-                  <a:srgbClr val="64748B"/>
-                </a:solidFill>
-                <a:latin typeface="Calibri"/>
-              </a:defRPr>
-            </a:pPr>
-            <a:r>
-              <a:t>Educators see only assigned cohorts; Directors get aggregated center view</a:t>
-            </a:r>
-          </a:p>
-        </p:txBody>
-      </p:sp>
-      <p:sp>
-        <p:nvSpPr>
-          <p:cNvPr id="36" name="TextBox 35"/>
+                  <a:srgbClr val="6B7280"/>
+                </a:solidFill>
+                <a:latin typeface="Arial"/>
+              </a:defRPr>
+            </a:pPr>
+            <a:r>
+              <a:t>Educators see only assigned cohorts; Directors get aggregated centre view</a:t>
+            </a:r>
+          </a:p>
+        </p:txBody>
+      </p:sp>
+      <p:sp>
+        <p:nvSpPr>
+          <p:cNvPr id="30" name="TextBox 29"/>
           <p:cNvSpPr txBox="1"/>
           <p:nvPr/>
         </p:nvSpPr>
@@ -12905,9 +11236,9 @@
             <a:pPr algn="l">
               <a:defRPr sz="1000" b="1">
                 <a:solidFill>
-                  <a:srgbClr val="0E7C6B"/>
-                </a:solidFill>
-                <a:latin typeface="Calibri"/>
+                  <a:srgbClr val="01ABAA"/>
+                </a:solidFill>
+                <a:latin typeface="Arial"/>
               </a:defRPr>
             </a:pPr>
             <a:r>
@@ -12918,7 +11249,7 @@
       </p:sp>
       <p:sp>
         <p:nvSpPr>
-          <p:cNvPr id="37" name="TextBox 36"/>
+          <p:cNvPr id="31" name="TextBox 30"/>
           <p:cNvSpPr txBox="1"/>
           <p:nvPr/>
         </p:nvSpPr>
@@ -12941,9 +11272,9 @@
             <a:pPr algn="l">
               <a:defRPr sz="900" b="0">
                 <a:solidFill>
-                  <a:srgbClr val="64748B"/>
-                </a:solidFill>
-                <a:latin typeface="Calibri"/>
+                  <a:srgbClr val="6B7280"/>
+                </a:solidFill>
+                <a:latin typeface="Arial"/>
               </a:defRPr>
             </a:pPr>
             <a:r>
@@ -12954,7 +11285,7 @@
       </p:sp>
       <p:sp>
         <p:nvSpPr>
-          <p:cNvPr id="38" name="TextBox 37"/>
+          <p:cNvPr id="32" name="TextBox 31"/>
           <p:cNvSpPr txBox="1"/>
           <p:nvPr/>
         </p:nvSpPr>
@@ -12977,9 +11308,9 @@
             <a:pPr algn="l">
               <a:defRPr sz="1000" b="1">
                 <a:solidFill>
-                  <a:srgbClr val="0E7C6B"/>
-                </a:solidFill>
-                <a:latin typeface="Calibri"/>
+                  <a:srgbClr val="01ABAA"/>
+                </a:solidFill>
+                <a:latin typeface="Arial"/>
               </a:defRPr>
             </a:pPr>
             <a:r>
@@ -12990,7 +11321,7 @@
       </p:sp>
       <p:sp>
         <p:nvSpPr>
-          <p:cNvPr id="39" name="TextBox 38"/>
+          <p:cNvPr id="33" name="TextBox 32"/>
           <p:cNvSpPr txBox="1"/>
           <p:nvPr/>
         </p:nvSpPr>
@@ -13013,9 +11344,9 @@
             <a:pPr algn="l">
               <a:defRPr sz="900" b="0">
                 <a:solidFill>
-                  <a:srgbClr val="64748B"/>
-                </a:solidFill>
-                <a:latin typeface="Calibri"/>
+                  <a:srgbClr val="6B7280"/>
+                </a:solidFill>
+                <a:latin typeface="Arial"/>
               </a:defRPr>
             </a:pPr>
             <a:r>
@@ -13065,7 +11396,7 @@
             <a:avLst/>
           </a:prstGeom>
           <a:solidFill>
-            <a:srgbClr val="0E7C6B"/>
+            <a:srgbClr val="01ABAA"/>
           </a:solidFill>
           <a:ln>
             <a:noFill/>
@@ -13118,9 +11449,9 @@
             <a:pPr algn="l">
               <a:defRPr sz="1000" b="1">
                 <a:solidFill>
-                  <a:srgbClr val="0E7C6B"/>
-                </a:solidFill>
-                <a:latin typeface="Calibri"/>
+                  <a:srgbClr val="01ABAA"/>
+                </a:solidFill>
+                <a:latin typeface="Arial"/>
               </a:defRPr>
             </a:pPr>
             <a:r>
@@ -13154,9 +11485,9 @@
             <a:pPr algn="l">
               <a:defRPr sz="2600" b="1">
                 <a:solidFill>
-                  <a:srgbClr val="1A365D"/>
-                </a:solidFill>
-                <a:latin typeface="Calibri"/>
+                  <a:srgbClr val="2D2A5E"/>
+                </a:solidFill>
+                <a:latin typeface="Arial"/>
               </a:defRPr>
             </a:pPr>
             <a:r>
@@ -13180,7 +11511,7 @@
             <a:avLst/>
           </a:prstGeom>
           <a:solidFill>
-            <a:srgbClr val="F7F9FC"/>
+            <a:srgbClr val="FAF6F0"/>
           </a:solidFill>
           <a:ln>
             <a:noFill/>
@@ -13233,9 +11564,9 @@
             <a:pPr algn="ctr">
               <a:defRPr sz="3600" b="1">
                 <a:solidFill>
-                  <a:srgbClr val="0E7C6B"/>
-                </a:solidFill>
-                <a:latin typeface="Calibri"/>
+                  <a:srgbClr val="01ABAA"/>
+                </a:solidFill>
+                <a:latin typeface="Arial"/>
               </a:defRPr>
             </a:pPr>
             <a:r>
@@ -13269,9 +11600,9 @@
             <a:pPr algn="ctr">
               <a:defRPr sz="1200" b="1">
                 <a:solidFill>
-                  <a:srgbClr val="1A365D"/>
-                </a:solidFill>
-                <a:latin typeface="Calibri"/>
+                  <a:srgbClr val="2D2A5E"/>
+                </a:solidFill>
+                <a:latin typeface="Arial"/>
               </a:defRPr>
             </a:pPr>
             <a:r>
@@ -13309,9 +11640,9 @@
             <a:pPr algn="ctr">
               <a:defRPr sz="900" b="0">
                 <a:solidFill>
-                  <a:srgbClr val="64748B"/>
-                </a:solidFill>
-                <a:latin typeface="Calibri"/>
+                  <a:srgbClr val="6B7280"/>
+                </a:solidFill>
+                <a:latin typeface="Arial"/>
               </a:defRPr>
             </a:pPr>
             <a:r>
@@ -13335,7 +11666,7 @@
             <a:avLst/>
           </a:prstGeom>
           <a:solidFill>
-            <a:srgbClr val="F7F9FC"/>
+            <a:srgbClr val="FAF6F0"/>
           </a:solidFill>
           <a:ln>
             <a:noFill/>
@@ -13390,7 +11721,7 @@
                 <a:solidFill>
                   <a:srgbClr val="3B82F6"/>
                 </a:solidFill>
-                <a:latin typeface="Calibri"/>
+                <a:latin typeface="Arial"/>
               </a:defRPr>
             </a:pPr>
             <a:r>
@@ -13424,9 +11755,9 @@
             <a:pPr algn="ctr">
               <a:defRPr sz="1200" b="1">
                 <a:solidFill>
-                  <a:srgbClr val="1A365D"/>
-                </a:solidFill>
-                <a:latin typeface="Calibri"/>
+                  <a:srgbClr val="2D2A5E"/>
+                </a:solidFill>
+                <a:latin typeface="Arial"/>
               </a:defRPr>
             </a:pPr>
             <a:r>
@@ -13464,9 +11795,9 @@
             <a:pPr algn="ctr">
               <a:defRPr sz="900" b="0">
                 <a:solidFill>
-                  <a:srgbClr val="64748B"/>
-                </a:solidFill>
-                <a:latin typeface="Calibri"/>
+                  <a:srgbClr val="6B7280"/>
+                </a:solidFill>
+                <a:latin typeface="Arial"/>
               </a:defRPr>
             </a:pPr>
             <a:r>
@@ -13490,7 +11821,7 @@
             <a:avLst/>
           </a:prstGeom>
           <a:solidFill>
-            <a:srgbClr val="F7F9FC"/>
+            <a:srgbClr val="FAF6F0"/>
           </a:solidFill>
           <a:ln>
             <a:noFill/>
@@ -13545,7 +11876,7 @@
                 <a:solidFill>
                   <a:srgbClr val="10B981"/>
                 </a:solidFill>
-                <a:latin typeface="Calibri"/>
+                <a:latin typeface="Arial"/>
               </a:defRPr>
             </a:pPr>
             <a:r>
@@ -13579,9 +11910,9 @@
             <a:pPr algn="ctr">
               <a:defRPr sz="1200" b="1">
                 <a:solidFill>
-                  <a:srgbClr val="1A365D"/>
-                </a:solidFill>
-                <a:latin typeface="Calibri"/>
+                  <a:srgbClr val="2D2A5E"/>
+                </a:solidFill>
+                <a:latin typeface="Arial"/>
               </a:defRPr>
             </a:pPr>
             <a:r>
@@ -13619,9 +11950,9 @@
             <a:pPr algn="ctr">
               <a:defRPr sz="900" b="0">
                 <a:solidFill>
-                  <a:srgbClr val="64748B"/>
-                </a:solidFill>
-                <a:latin typeface="Calibri"/>
+                  <a:srgbClr val="6B7280"/>
+                </a:solidFill>
+                <a:latin typeface="Arial"/>
               </a:defRPr>
             </a:pPr>
             <a:r>
@@ -13645,7 +11976,7 @@
             <a:avLst/>
           </a:prstGeom>
           <a:solidFill>
-            <a:srgbClr val="F7F9FC"/>
+            <a:srgbClr val="FAF6F0"/>
           </a:solidFill>
           <a:ln>
             <a:noFill/>
@@ -13698,9 +12029,9 @@
             <a:pPr algn="ctr">
               <a:defRPr sz="3600" b="1">
                 <a:solidFill>
-                  <a:srgbClr val="F0A500"/>
-                </a:solidFill>
-                <a:latin typeface="Calibri"/>
+                  <a:srgbClr val="FECD1B"/>
+                </a:solidFill>
+                <a:latin typeface="Arial"/>
               </a:defRPr>
             </a:pPr>
             <a:r>
@@ -13734,9 +12065,9 @@
             <a:pPr algn="ctr">
               <a:defRPr sz="1200" b="1">
                 <a:solidFill>
-                  <a:srgbClr val="1A365D"/>
-                </a:solidFill>
-                <a:latin typeface="Calibri"/>
+                  <a:srgbClr val="2D2A5E"/>
+                </a:solidFill>
+                <a:latin typeface="Arial"/>
               </a:defRPr>
             </a:pPr>
             <a:r>
@@ -13774,9 +12105,9 @@
             <a:pPr algn="ctr">
               <a:defRPr sz="900" b="0">
                 <a:solidFill>
-                  <a:srgbClr val="64748B"/>
-                </a:solidFill>
-                <a:latin typeface="Calibri"/>
+                  <a:srgbClr val="6B7280"/>
+                </a:solidFill>
+                <a:latin typeface="Arial"/>
               </a:defRPr>
             </a:pPr>
             <a:r>
@@ -13800,7 +12131,7 @@
             <a:avLst/>
           </a:prstGeom>
           <a:solidFill>
-            <a:srgbClr val="F7F9FC"/>
+            <a:srgbClr val="FAF6F0"/>
           </a:solidFill>
           <a:ln>
             <a:noFill/>
@@ -13855,7 +12186,7 @@
                 <a:solidFill>
                   <a:srgbClr val="8B5CF6"/>
                 </a:solidFill>
-                <a:latin typeface="Calibri"/>
+                <a:latin typeface="Arial"/>
               </a:defRPr>
             </a:pPr>
             <a:r>
@@ -13889,9 +12220,9 @@
             <a:pPr algn="ctr">
               <a:defRPr sz="1200" b="1">
                 <a:solidFill>
-                  <a:srgbClr val="1A365D"/>
-                </a:solidFill>
-                <a:latin typeface="Calibri"/>
+                  <a:srgbClr val="2D2A5E"/>
+                </a:solidFill>
+                <a:latin typeface="Arial"/>
               </a:defRPr>
             </a:pPr>
             <a:r>
@@ -13929,13 +12260,13 @@
             <a:pPr algn="ctr">
               <a:defRPr sz="900" b="0">
                 <a:solidFill>
-                  <a:srgbClr val="64748B"/>
-                </a:solidFill>
-                <a:latin typeface="Calibri"/>
-              </a:defRPr>
-            </a:pPr>
-            <a:r>
-              <a:t>Center average</a:t>
+                  <a:srgbClr val="6B7280"/>
+                </a:solidFill>
+                <a:latin typeface="Arial"/>
+              </a:defRPr>
+            </a:pPr>
+            <a:r>
+              <a:t>Centre average</a:t>
             </a:r>
           </a:p>
         </p:txBody>
@@ -13955,7 +12286,7 @@
             <a:avLst/>
           </a:prstGeom>
           <a:solidFill>
-            <a:srgbClr val="F7F9FC"/>
+            <a:srgbClr val="FAF6F0"/>
           </a:solidFill>
           <a:ln>
             <a:noFill/>
@@ -14008,9 +12339,9 @@
             <a:pPr algn="ctr">
               <a:defRPr sz="3600" b="1">
                 <a:solidFill>
-                  <a:srgbClr val="EF4444"/>
-                </a:solidFill>
-                <a:latin typeface="Calibri"/>
+                  <a:srgbClr val="E8063C"/>
+                </a:solidFill>
+                <a:latin typeface="Arial"/>
               </a:defRPr>
             </a:pPr>
             <a:r>
@@ -14044,9 +12375,9 @@
             <a:pPr algn="ctr">
               <a:defRPr sz="1200" b="1">
                 <a:solidFill>
-                  <a:srgbClr val="1A365D"/>
-                </a:solidFill>
-                <a:latin typeface="Calibri"/>
+                  <a:srgbClr val="2D2A5E"/>
+                </a:solidFill>
+                <a:latin typeface="Arial"/>
               </a:defRPr>
             </a:pPr>
             <a:r>
@@ -14084,9 +12415,9 @@
             <a:pPr algn="ctr">
               <a:defRPr sz="900" b="0">
                 <a:solidFill>
-                  <a:srgbClr val="64748B"/>
-                </a:solidFill>
-                <a:latin typeface="Calibri"/>
+                  <a:srgbClr val="6B7280"/>
+                </a:solidFill>
+                <a:latin typeface="Arial"/>
               </a:defRPr>
             </a:pPr>
             <a:r>
@@ -14136,7 +12467,7 @@
             <a:avLst/>
           </a:prstGeom>
           <a:solidFill>
-            <a:srgbClr val="0E7C6B"/>
+            <a:srgbClr val="01ABAA"/>
           </a:solidFill>
           <a:ln>
             <a:noFill/>
@@ -14189,13 +12520,13 @@
             <a:pPr algn="l">
               <a:defRPr sz="1000" b="1">
                 <a:solidFill>
-                  <a:srgbClr val="0E7C6B"/>
-                </a:solidFill>
-                <a:latin typeface="Calibri"/>
-              </a:defRPr>
-            </a:pPr>
-            <a:r>
-              <a:t>12-MONTH ROADMAP</a:t>
+                  <a:srgbClr val="01ABAA"/>
+                </a:solidFill>
+                <a:latin typeface="Arial"/>
+              </a:defRPr>
+            </a:pPr>
+            <a:r>
+              <a:t>6-MONTH ROADMAP</a:t>
             </a:r>
           </a:p>
         </p:txBody>
@@ -14225,9 +12556,9 @@
             <a:pPr algn="l">
               <a:defRPr sz="2600" b="1">
                 <a:solidFill>
-                  <a:srgbClr val="1A365D"/>
-                </a:solidFill>
-                <a:latin typeface="Calibri"/>
+                  <a:srgbClr val="2D2A5E"/>
+                </a:solidFill>
+                <a:latin typeface="Arial"/>
               </a:defRPr>
             </a:pPr>
             <a:r>
@@ -14294,7 +12625,7 @@
             <a:avLst/>
           </a:prstGeom>
           <a:solidFill>
-            <a:srgbClr val="0E7C6B"/>
+            <a:srgbClr val="01ABAA"/>
           </a:solidFill>
           <a:ln>
             <a:noFill/>
@@ -14347,9 +12678,9 @@
             <a:pPr algn="ctr">
               <a:defRPr sz="800" b="1">
                 <a:solidFill>
-                  <a:srgbClr val="0E7C6B"/>
-                </a:solidFill>
-                <a:latin typeface="Calibri"/>
+                  <a:srgbClr val="01ABAA"/>
+                </a:solidFill>
+                <a:latin typeface="Arial"/>
               </a:defRPr>
             </a:pPr>
             <a:r>
@@ -14383,13 +12714,13 @@
             <a:pPr algn="ctr">
               <a:defRPr sz="1000" b="1">
                 <a:solidFill>
-                  <a:srgbClr val="1A365D"/>
-                </a:solidFill>
-                <a:latin typeface="Calibri"/>
-              </a:defRPr>
-            </a:pPr>
-            <a:r>
-              <a:t>Architecture &amp;</a:t>
+                  <a:srgbClr val="2D2A5E"/>
+                </a:solidFill>
+                <a:latin typeface="Arial"/>
+              </a:defRPr>
+            </a:pPr>
+            <a:r>
+              <a:t>Development &amp;</a:t>
             </a:r>
             <a:br/>
             <a:r>
@@ -14423,17 +12754,17 @@
             <a:pPr algn="ctr">
               <a:defRPr sz="800" b="0">
                 <a:solidFill>
-                  <a:srgbClr val="64748B"/>
-                </a:solidFill>
-                <a:latin typeface="Calibri"/>
-              </a:defRPr>
-            </a:pPr>
-            <a:r>
-              <a:t>Infrastructure, AI prompt</a:t>
+                  <a:srgbClr val="6B7280"/>
+                </a:solidFill>
+                <a:latin typeface="Arial"/>
+              </a:defRPr>
+            </a:pPr>
+            <a:r>
+              <a:t>Infrastructure, AI prompts,</a:t>
             </a:r>
             <a:br/>
             <a:r>
-              <a:t>engineering, PDPA setup</a:t>
+              <a:t>platform build, PDPA</a:t>
             </a:r>
           </a:p>
         </p:txBody>
@@ -14508,11 +12839,11 @@
                 <a:solidFill>
                   <a:srgbClr val="3B82F6"/>
                 </a:solidFill>
-                <a:latin typeface="Calibri"/>
-              </a:defRPr>
-            </a:pPr>
-            <a:r>
-              <a:t>Months 3–4</a:t>
+                <a:latin typeface="Arial"/>
+              </a:defRPr>
+            </a:pPr>
+            <a:r>
+              <a:t>Month 3</a:t>
             </a:r>
           </a:p>
         </p:txBody>
@@ -14542,17 +12873,17 @@
             <a:pPr algn="ctr">
               <a:defRPr sz="1000" b="1">
                 <a:solidFill>
-                  <a:srgbClr val="1A365D"/>
-                </a:solidFill>
-                <a:latin typeface="Calibri"/>
-              </a:defRPr>
-            </a:pPr>
-            <a:r>
-              <a:t>Platform</a:t>
+                  <a:srgbClr val="2D2A5E"/>
+                </a:solidFill>
+                <a:latin typeface="Arial"/>
+              </a:defRPr>
+            </a:pPr>
+            <a:r>
+              <a:t>Pilot</a:t>
             </a:r>
             <a:br/>
             <a:r>
-              <a:t>Build</a:t>
+              <a:t>Deployment</a:t>
             </a:r>
           </a:p>
         </p:txBody>
@@ -14582,17 +12913,17 @@
             <a:pPr algn="ctr">
               <a:defRPr sz="800" b="0">
                 <a:solidFill>
-                  <a:srgbClr val="64748B"/>
-                </a:solidFill>
-                <a:latin typeface="Calibri"/>
-              </a:defRPr>
-            </a:pPr>
-            <a:r>
-              <a:t>Lesson planner, portfolio,</a:t>
+                  <a:srgbClr val="6B7280"/>
+                </a:solidFill>
+                <a:latin typeface="Arial"/>
+              </a:defRPr>
+            </a:pPr>
+            <a:r>
+              <a:t>2–3 centres onboarded,</a:t>
             </a:r>
             <a:br/>
             <a:r>
-              <a:t>coaching, dashboard</a:t>
+              <a:t>educator workshops</a:t>
             </a:r>
           </a:p>
         </p:txBody>
@@ -14612,7 +12943,7 @@
             <a:avLst/>
           </a:prstGeom>
           <a:solidFill>
-            <a:srgbClr val="10B981"/>
+            <a:srgbClr val="FECD1B"/>
           </a:solidFill>
           <a:ln>
             <a:noFill/>
@@ -14665,13 +12996,13 @@
             <a:pPr algn="ctr">
               <a:defRPr sz="800" b="1">
                 <a:solidFill>
-                  <a:srgbClr val="10B981"/>
-                </a:solidFill>
-                <a:latin typeface="Calibri"/>
-              </a:defRPr>
-            </a:pPr>
-            <a:r>
-              <a:t>Month 5</a:t>
+                  <a:srgbClr val="FECD1B"/>
+                </a:solidFill>
+                <a:latin typeface="Arial"/>
+              </a:defRPr>
+            </a:pPr>
+            <a:r>
+              <a:t>Months 4–5</a:t>
             </a:r>
           </a:p>
         </p:txBody>
@@ -14701,17 +13032,17 @@
             <a:pPr algn="ctr">
               <a:defRPr sz="1000" b="1">
                 <a:solidFill>
-                  <a:srgbClr val="1A365D"/>
-                </a:solidFill>
-                <a:latin typeface="Calibri"/>
-              </a:defRPr>
-            </a:pPr>
-            <a:r>
-              <a:t>Pilot</a:t>
+                  <a:srgbClr val="2D2A5E"/>
+                </a:solidFill>
+                <a:latin typeface="Arial"/>
+              </a:defRPr>
+            </a:pPr>
+            <a:r>
+              <a:t>Active</a:t>
             </a:r>
             <a:br/>
             <a:r>
-              <a:t>Deployment</a:t>
+              <a:t>Execution</a:t>
             </a:r>
           </a:p>
         </p:txBody>
@@ -14741,17 +13072,17 @@
             <a:pPr algn="ctr">
               <a:defRPr sz="800" b="0">
                 <a:solidFill>
-                  <a:srgbClr val="64748B"/>
-                </a:solidFill>
-                <a:latin typeface="Calibri"/>
-              </a:defRPr>
-            </a:pPr>
-            <a:r>
-              <a:t>2–3 centers onboarded,</a:t>
+                  <a:srgbClr val="6B7280"/>
+                </a:solidFill>
+                <a:latin typeface="Arial"/>
+              </a:defRPr>
+            </a:pPr>
+            <a:r>
+              <a:t>Live classroom usage,</a:t>
             </a:r>
             <a:br/>
             <a:r>
-              <a:t>educator workshops</a:t>
+              <a:t>first IDPs generated</a:t>
             </a:r>
           </a:p>
         </p:txBody>
@@ -14771,7 +13102,7 @@
             <a:avLst/>
           </a:prstGeom>
           <a:solidFill>
-            <a:srgbClr val="F0A500"/>
+            <a:srgbClr val="E8063C"/>
           </a:solidFill>
           <a:ln>
             <a:noFill/>
@@ -14824,13 +13155,13 @@
             <a:pPr algn="ctr">
               <a:defRPr sz="800" b="1">
                 <a:solidFill>
-                  <a:srgbClr val="F0A500"/>
-                </a:solidFill>
-                <a:latin typeface="Calibri"/>
-              </a:defRPr>
-            </a:pPr>
-            <a:r>
-              <a:t>Months 6–9</a:t>
+                  <a:srgbClr val="E8063C"/>
+                </a:solidFill>
+                <a:latin typeface="Arial"/>
+              </a:defRPr>
+            </a:pPr>
+            <a:r>
+              <a:t>Month 6</a:t>
             </a:r>
           </a:p>
         </p:txBody>
@@ -14860,17 +13191,17 @@
             <a:pPr algn="ctr">
               <a:defRPr sz="1000" b="1">
                 <a:solidFill>
-                  <a:srgbClr val="1A365D"/>
-                </a:solidFill>
-                <a:latin typeface="Calibri"/>
-              </a:defRPr>
-            </a:pPr>
-            <a:r>
-              <a:t>Active</a:t>
+                  <a:srgbClr val="2D2A5E"/>
+                </a:solidFill>
+                <a:latin typeface="Arial"/>
+              </a:defRPr>
+            </a:pPr>
+            <a:r>
+              <a:t>Impact Assessment</a:t>
             </a:r>
             <a:br/>
             <a:r>
-              <a:t>Execution</a:t>
+              <a:t>&amp; Reporting</a:t>
             </a:r>
           </a:p>
         </p:txBody>
@@ -14900,334 +13231,16 @@
             <a:pPr algn="ctr">
               <a:defRPr sz="800" b="0">
                 <a:solidFill>
-                  <a:srgbClr val="64748B"/>
-                </a:solidFill>
-                <a:latin typeface="Calibri"/>
-              </a:defRPr>
-            </a:pPr>
-            <a:r>
-              <a:t>Live classroom usage,</a:t>
+                  <a:srgbClr val="6B7280"/>
+                </a:solidFill>
+                <a:latin typeface="Arial"/>
+              </a:defRPr>
+            </a:pPr>
+            <a:r>
+              <a:t>Findings, commercialisation</a:t>
             </a:r>
             <a:br/>
             <a:r>
-              <a:t>first IDPs generated</a:t>
-            </a:r>
-          </a:p>
-        </p:txBody>
-      </p:sp>
-      <p:sp>
-        <p:nvSpPr>
-          <p:cNvPr id="22" name="Oval 21"/>
-          <p:cNvSpPr/>
-          <p:nvPr/>
-        </p:nvSpPr>
-        <p:spPr>
-          <a:xfrm>
-            <a:off x="6583680" y="1554480"/>
-            <a:ext cx="292608" cy="292608"/>
-          </a:xfrm>
-          <a:prstGeom prst="ellipse">
-            <a:avLst/>
-          </a:prstGeom>
-          <a:solidFill>
-            <a:srgbClr val="8B5CF6"/>
-          </a:solidFill>
-          <a:ln>
-            <a:noFill/>
-          </a:ln>
-        </p:spPr>
-        <p:style>
-          <a:lnRef idx="1">
-            <a:schemeClr val="accent1"/>
-          </a:lnRef>
-          <a:fillRef idx="3">
-            <a:schemeClr val="accent1"/>
-          </a:fillRef>
-          <a:effectRef idx="2">
-            <a:schemeClr val="accent1"/>
-          </a:effectRef>
-          <a:fontRef idx="minor">
-            <a:schemeClr val="lt1"/>
-          </a:fontRef>
-        </p:style>
-        <p:txBody>
-          <a:bodyPr rtlCol="0" anchor="ctr"/>
-          <a:lstStyle/>
-          <a:p>
-            <a:pPr algn="ctr"/>
-          </a:p>
-        </p:txBody>
-      </p:sp>
-      <p:sp>
-        <p:nvSpPr>
-          <p:cNvPr id="23" name="TextBox 22"/>
-          <p:cNvSpPr txBox="1"/>
-          <p:nvPr/>
-        </p:nvSpPr>
-        <p:spPr>
-          <a:xfrm>
-            <a:off x="6035040" y="1143000"/>
-            <a:ext cx="1371600" cy="274320"/>
-          </a:xfrm>
-          <a:prstGeom prst="rect">
-            <a:avLst/>
-          </a:prstGeom>
-          <a:noFill/>
-        </p:spPr>
-        <p:txBody>
-          <a:bodyPr wrap="square">
-            <a:spAutoFit/>
-          </a:bodyPr>
-          <a:lstStyle/>
-          <a:p>
-            <a:pPr algn="ctr">
-              <a:defRPr sz="800" b="1">
-                <a:solidFill>
-                  <a:srgbClr val="8B5CF6"/>
-                </a:solidFill>
-                <a:latin typeface="Calibri"/>
-              </a:defRPr>
-            </a:pPr>
-            <a:r>
-              <a:t>Months 10–11</a:t>
-            </a:r>
-          </a:p>
-        </p:txBody>
-      </p:sp>
-      <p:sp>
-        <p:nvSpPr>
-          <p:cNvPr id="24" name="TextBox 23"/>
-          <p:cNvSpPr txBox="1"/>
-          <p:nvPr/>
-        </p:nvSpPr>
-        <p:spPr>
-          <a:xfrm>
-            <a:off x="6035040" y="2011680"/>
-            <a:ext cx="1371600" cy="457200"/>
-          </a:xfrm>
-          <a:prstGeom prst="rect">
-            <a:avLst/>
-          </a:prstGeom>
-          <a:noFill/>
-        </p:spPr>
-        <p:txBody>
-          <a:bodyPr wrap="square">
-            <a:spAutoFit/>
-          </a:bodyPr>
-          <a:lstStyle/>
-          <a:p>
-            <a:pPr algn="ctr">
-              <a:defRPr sz="1000" b="1">
-                <a:solidFill>
-                  <a:srgbClr val="1A365D"/>
-                </a:solidFill>
-                <a:latin typeface="Calibri"/>
-              </a:defRPr>
-            </a:pPr>
-            <a:r>
-              <a:t>Impact</a:t>
-            </a:r>
-            <a:br/>
-            <a:r>
-              <a:t>Assessment</a:t>
-            </a:r>
-          </a:p>
-        </p:txBody>
-      </p:sp>
-      <p:sp>
-        <p:nvSpPr>
-          <p:cNvPr id="25" name="TextBox 24"/>
-          <p:cNvSpPr txBox="1"/>
-          <p:nvPr/>
-        </p:nvSpPr>
-        <p:spPr>
-          <a:xfrm>
-            <a:off x="6035040" y="2560320"/>
-            <a:ext cx="1371600" cy="640080"/>
-          </a:xfrm>
-          <a:prstGeom prst="rect">
-            <a:avLst/>
-          </a:prstGeom>
-          <a:noFill/>
-        </p:spPr>
-        <p:txBody>
-          <a:bodyPr wrap="square">
-            <a:spAutoFit/>
-          </a:bodyPr>
-          <a:lstStyle/>
-          <a:p>
-            <a:pPr algn="ctr">
-              <a:defRPr sz="800" b="0">
-                <a:solidFill>
-                  <a:srgbClr val="64748B"/>
-                </a:solidFill>
-                <a:latin typeface="Calibri"/>
-              </a:defRPr>
-            </a:pPr>
-            <a:r>
-              <a:t>End-of-year LNA,</a:t>
-            </a:r>
-            <a:br/>
-            <a:r>
-              <a:t>quantitative metrics</a:t>
-            </a:r>
-          </a:p>
-        </p:txBody>
-      </p:sp>
-      <p:sp>
-        <p:nvSpPr>
-          <p:cNvPr id="26" name="Oval 25"/>
-          <p:cNvSpPr/>
-          <p:nvPr/>
-        </p:nvSpPr>
-        <p:spPr>
-          <a:xfrm>
-            <a:off x="8001000" y="1554480"/>
-            <a:ext cx="292608" cy="292608"/>
-          </a:xfrm>
-          <a:prstGeom prst="ellipse">
-            <a:avLst/>
-          </a:prstGeom>
-          <a:solidFill>
-            <a:srgbClr val="EF4444"/>
-          </a:solidFill>
-          <a:ln>
-            <a:noFill/>
-          </a:ln>
-        </p:spPr>
-        <p:style>
-          <a:lnRef idx="1">
-            <a:schemeClr val="accent1"/>
-          </a:lnRef>
-          <a:fillRef idx="3">
-            <a:schemeClr val="accent1"/>
-          </a:fillRef>
-          <a:effectRef idx="2">
-            <a:schemeClr val="accent1"/>
-          </a:effectRef>
-          <a:fontRef idx="minor">
-            <a:schemeClr val="lt1"/>
-          </a:fontRef>
-        </p:style>
-        <p:txBody>
-          <a:bodyPr rtlCol="0" anchor="ctr"/>
-          <a:lstStyle/>
-          <a:p>
-            <a:pPr algn="ctr"/>
-          </a:p>
-        </p:txBody>
-      </p:sp>
-      <p:sp>
-        <p:nvSpPr>
-          <p:cNvPr id="27" name="TextBox 26"/>
-          <p:cNvSpPr txBox="1"/>
-          <p:nvPr/>
-        </p:nvSpPr>
-        <p:spPr>
-          <a:xfrm>
-            <a:off x="7452360" y="1143000"/>
-            <a:ext cx="1371600" cy="274320"/>
-          </a:xfrm>
-          <a:prstGeom prst="rect">
-            <a:avLst/>
-          </a:prstGeom>
-          <a:noFill/>
-        </p:spPr>
-        <p:txBody>
-          <a:bodyPr wrap="square">
-            <a:spAutoFit/>
-          </a:bodyPr>
-          <a:lstStyle/>
-          <a:p>
-            <a:pPr algn="ctr">
-              <a:defRPr sz="800" b="1">
-                <a:solidFill>
-                  <a:srgbClr val="EF4444"/>
-                </a:solidFill>
-                <a:latin typeface="Calibri"/>
-              </a:defRPr>
-            </a:pPr>
-            <a:r>
-              <a:t>Month 12</a:t>
-            </a:r>
-          </a:p>
-        </p:txBody>
-      </p:sp>
-      <p:sp>
-        <p:nvSpPr>
-          <p:cNvPr id="28" name="TextBox 27"/>
-          <p:cNvSpPr txBox="1"/>
-          <p:nvPr/>
-        </p:nvSpPr>
-        <p:spPr>
-          <a:xfrm>
-            <a:off x="7452360" y="2011680"/>
-            <a:ext cx="1371600" cy="457200"/>
-          </a:xfrm>
-          <a:prstGeom prst="rect">
-            <a:avLst/>
-          </a:prstGeom>
-          <a:noFill/>
-        </p:spPr>
-        <p:txBody>
-          <a:bodyPr wrap="square">
-            <a:spAutoFit/>
-          </a:bodyPr>
-          <a:lstStyle/>
-          <a:p>
-            <a:pPr algn="ctr">
-              <a:defRPr sz="1000" b="1">
-                <a:solidFill>
-                  <a:srgbClr val="1A365D"/>
-                </a:solidFill>
-                <a:latin typeface="Calibri"/>
-              </a:defRPr>
-            </a:pPr>
-            <a:r>
-              <a:t>Final Report</a:t>
-            </a:r>
-            <a:br/>
-            <a:r>
-              <a:t>&amp; Scale Plan</a:t>
-            </a:r>
-          </a:p>
-        </p:txBody>
-      </p:sp>
-      <p:sp>
-        <p:nvSpPr>
-          <p:cNvPr id="29" name="TextBox 28"/>
-          <p:cNvSpPr txBox="1"/>
-          <p:nvPr/>
-        </p:nvSpPr>
-        <p:spPr>
-          <a:xfrm>
-            <a:off x="7452360" y="2560320"/>
-            <a:ext cx="1371600" cy="640080"/>
-          </a:xfrm>
-          <a:prstGeom prst="rect">
-            <a:avLst/>
-          </a:prstGeom>
-          <a:noFill/>
-        </p:spPr>
-        <p:txBody>
-          <a:bodyPr wrap="square">
-            <a:spAutoFit/>
-          </a:bodyPr>
-          <a:lstStyle/>
-          <a:p>
-            <a:pPr algn="ctr">
-              <a:defRPr sz="800" b="0">
-                <a:solidFill>
-                  <a:srgbClr val="64748B"/>
-                </a:solidFill>
-                <a:latin typeface="Calibri"/>
-              </a:defRPr>
-            </a:pPr>
-            <a:r>
-              <a:t>Findings, commercialisation</a:t>
-            </a:r>
-            <a:br/>
-            <a:r>
               <a:t>roadmap, ECDA presentation</a:t>
             </a:r>
           </a:p>
@@ -15235,7 +13248,7 @@
       </p:sp>
       <p:sp>
         <p:nvSpPr>
-          <p:cNvPr id="30" name="TextBox 29"/>
+          <p:cNvPr id="22" name="TextBox 21"/>
           <p:cNvSpPr txBox="1"/>
           <p:nvPr/>
         </p:nvSpPr>
@@ -15258,9 +13271,9 @@
             <a:pPr algn="l">
               <a:defRPr sz="1200" b="1">
                 <a:solidFill>
-                  <a:srgbClr val="1A365D"/>
-                </a:solidFill>
-                <a:latin typeface="Calibri"/>
+                  <a:srgbClr val="2D2A5E"/>
+                </a:solidFill>
+                <a:latin typeface="Arial"/>
               </a:defRPr>
             </a:pPr>
             <a:r>
@@ -15271,7 +13284,7 @@
       </p:sp>
       <p:sp>
         <p:nvSpPr>
-          <p:cNvPr id="31" name="TextBox 30"/>
+          <p:cNvPr id="23" name="TextBox 22"/>
           <p:cNvSpPr txBox="1"/>
           <p:nvPr/>
         </p:nvSpPr>
@@ -15294,9 +13307,9 @@
             <a:pPr algn="l">
               <a:defRPr sz="900" b="0">
                 <a:solidFill>
-                  <a:srgbClr val="64748B"/>
-                </a:solidFill>
-                <a:latin typeface="Calibri"/>
+                  <a:srgbClr val="6B7280"/>
+                </a:solidFill>
+                <a:latin typeface="Arial"/>
               </a:defRPr>
             </a:pPr>
             <a:r>
@@ -15307,7 +13320,7 @@
       </p:sp>
       <p:sp>
         <p:nvSpPr>
-          <p:cNvPr id="32" name="TextBox 31"/>
+          <p:cNvPr id="24" name="TextBox 23"/>
           <p:cNvSpPr txBox="1"/>
           <p:nvPr/>
         </p:nvSpPr>
@@ -15330,20 +13343,20 @@
             <a:pPr algn="l">
               <a:defRPr sz="900" b="0">
                 <a:solidFill>
-                  <a:srgbClr val="64748B"/>
-                </a:solidFill>
-                <a:latin typeface="Calibri"/>
-              </a:defRPr>
-            </a:pPr>
-            <a:r>
-              <a:t>✓  Month 5: First educators onboarded with training</a:t>
-            </a:r>
-          </a:p>
-        </p:txBody>
-      </p:sp>
-      <p:sp>
-        <p:nvSpPr>
-          <p:cNvPr id="33" name="TextBox 32"/>
+                  <a:srgbClr val="6B7280"/>
+                </a:solidFill>
+                <a:latin typeface="Arial"/>
+              </a:defRPr>
+            </a:pPr>
+            <a:r>
+              <a:t>✓  Month 3: First educators onboarded with training</a:t>
+            </a:r>
+          </a:p>
+        </p:txBody>
+      </p:sp>
+      <p:sp>
+        <p:nvSpPr>
+          <p:cNvPr id="25" name="TextBox 24"/>
           <p:cNvSpPr txBox="1"/>
           <p:nvPr/>
         </p:nvSpPr>
@@ -15366,20 +13379,20 @@
             <a:pPr algn="l">
               <a:defRPr sz="900" b="0">
                 <a:solidFill>
-                  <a:srgbClr val="64748B"/>
-                </a:solidFill>
-                <a:latin typeface="Calibri"/>
-              </a:defRPr>
-            </a:pPr>
-            <a:r>
-              <a:t>✓  Month 9: First SFw-aligned IDPs auto-generated</a:t>
-            </a:r>
-          </a:p>
-        </p:txBody>
-      </p:sp>
-      <p:sp>
-        <p:nvSpPr>
-          <p:cNvPr id="34" name="TextBox 33"/>
+                  <a:srgbClr val="6B7280"/>
+                </a:solidFill>
+                <a:latin typeface="Arial"/>
+              </a:defRPr>
+            </a:pPr>
+            <a:r>
+              <a:t>✓  Month 5: First SFw-aligned IDPs auto-generated</a:t>
+            </a:r>
+          </a:p>
+        </p:txBody>
+      </p:sp>
+      <p:sp>
+        <p:nvSpPr>
+          <p:cNvPr id="26" name="TextBox 25"/>
           <p:cNvSpPr txBox="1"/>
           <p:nvPr/>
         </p:nvSpPr>
@@ -15402,13 +13415,13 @@
             <a:pPr algn="l">
               <a:defRPr sz="900" b="0">
                 <a:solidFill>
-                  <a:srgbClr val="64748B"/>
-                </a:solidFill>
-                <a:latin typeface="Calibri"/>
-              </a:defRPr>
-            </a:pPr>
-            <a:r>
-              <a:t>✓  Month 12: Final impact report to ECDA</a:t>
+                  <a:srgbClr val="6B7280"/>
+                </a:solidFill>
+                <a:latin typeface="Arial"/>
+              </a:defRPr>
+            </a:pPr>
+            <a:r>
+              <a:t>✓  Month 6: Final impact report to ECDA</a:t>
             </a:r>
           </a:p>
         </p:txBody>
@@ -15454,7 +13467,7 @@
             <a:avLst/>
           </a:prstGeom>
           <a:solidFill>
-            <a:srgbClr val="0E7C6B"/>
+            <a:srgbClr val="01ABAA"/>
           </a:solidFill>
           <a:ln>
             <a:noFill/>
@@ -15507,9 +13520,9 @@
             <a:pPr algn="l">
               <a:defRPr sz="1000" b="1">
                 <a:solidFill>
-                  <a:srgbClr val="0E7C6B"/>
-                </a:solidFill>
-                <a:latin typeface="Calibri"/>
+                  <a:srgbClr val="01ABAA"/>
+                </a:solidFill>
+                <a:latin typeface="Arial"/>
               </a:defRPr>
             </a:pPr>
             <a:r>
@@ -15543,9 +13556,9 @@
             <a:pPr algn="l">
               <a:defRPr sz="2600" b="1">
                 <a:solidFill>
-                  <a:srgbClr val="1A365D"/>
-                </a:solidFill>
-                <a:latin typeface="Calibri"/>
+                  <a:srgbClr val="2D2A5E"/>
+                </a:solidFill>
+                <a:latin typeface="Arial"/>
               </a:defRPr>
             </a:pPr>
             <a:r>
@@ -15569,7 +13582,7 @@
             <a:avLst/>
           </a:prstGeom>
           <a:solidFill>
-            <a:srgbClr val="F7F9FC"/>
+            <a:srgbClr val="FAF6F0"/>
           </a:solidFill>
           <a:ln>
             <a:noFill/>
@@ -15606,13 +13619,13 @@
         <p:spPr>
           <a:xfrm>
             <a:off x="548640" y="1188720"/>
-            <a:ext cx="2916936" cy="502920"/>
+            <a:ext cx="2464308" cy="502920"/>
           </a:xfrm>
           <a:prstGeom prst="rect">
             <a:avLst/>
           </a:prstGeom>
           <a:solidFill>
-            <a:srgbClr val="0E7C6B"/>
+            <a:srgbClr val="01ABAA"/>
           </a:solidFill>
           <a:ln>
             <a:noFill/>
@@ -15667,11 +13680,11 @@
                 <a:solidFill>
                   <a:srgbClr val="FFFFFF"/>
                 </a:solidFill>
-                <a:latin typeface="Calibri"/>
-              </a:defRPr>
-            </a:pPr>
-            <a:r>
-              <a:t>Phase 1: Architecture &amp; AI</a:t>
+                <a:latin typeface="Arial"/>
+              </a:defRPr>
+            </a:pPr>
+            <a:r>
+              <a:t>Development &amp; Infrastructure</a:t>
             </a:r>
           </a:p>
         </p:txBody>
@@ -15701,13 +13714,13 @@
             <a:pPr algn="r">
               <a:defRPr sz="1200" b="1">
                 <a:solidFill>
-                  <a:srgbClr val="1A365D"/>
-                </a:solidFill>
-                <a:latin typeface="Calibri"/>
-              </a:defRPr>
-            </a:pPr>
-            <a:r>
-              <a:t>$72,000</a:t>
+                  <a:srgbClr val="2D2A5E"/>
+                </a:solidFill>
+                <a:latin typeface="Arial"/>
+              </a:defRPr>
+            </a:pPr>
+            <a:r>
+              <a:t>$9,800</a:t>
             </a:r>
           </a:p>
         </p:txBody>
@@ -15737,13 +13750,13 @@
             <a:pPr algn="l">
               <a:defRPr sz="1000" b="0">
                 <a:solidFill>
-                  <a:srgbClr val="64748B"/>
-                </a:solidFill>
-                <a:latin typeface="Calibri"/>
-              </a:defRPr>
-            </a:pPr>
-            <a:r>
-              <a:t>58%</a:t>
+                  <a:srgbClr val="6B7280"/>
+                </a:solidFill>
+                <a:latin typeface="Arial"/>
+              </a:defRPr>
+            </a:pPr>
+            <a:r>
+              <a:t>49%</a:t>
             </a:r>
           </a:p>
         </p:txBody>
@@ -15763,7 +13776,7 @@
             <a:avLst/>
           </a:prstGeom>
           <a:solidFill>
-            <a:srgbClr val="F7F9FC"/>
+            <a:srgbClr val="FAF6F0"/>
           </a:solidFill>
           <a:ln>
             <a:noFill/>
@@ -15800,7 +13813,7 @@
         <p:spPr>
           <a:xfrm>
             <a:off x="548640" y="1874519"/>
-            <a:ext cx="653796" cy="502920"/>
+            <a:ext cx="804672" cy="502920"/>
           </a:xfrm>
           <a:prstGeom prst="rect">
             <a:avLst/>
@@ -15861,11 +13874,11 @@
                 <a:solidFill>
                   <a:srgbClr val="FFFFFF"/>
                 </a:solidFill>
-                <a:latin typeface="Calibri"/>
-              </a:defRPr>
-            </a:pPr>
-            <a:r>
-              <a:t>Phase 2: Security &amp; Compliance</a:t>
+                <a:latin typeface="Arial"/>
+              </a:defRPr>
+            </a:pPr>
+            <a:r>
+              <a:t>Security &amp; Compliance</a:t>
             </a:r>
           </a:p>
         </p:txBody>
@@ -15895,13 +13908,13 @@
             <a:pPr algn="r">
               <a:defRPr sz="1200" b="1">
                 <a:solidFill>
-                  <a:srgbClr val="1A365D"/>
-                </a:solidFill>
-                <a:latin typeface="Calibri"/>
-              </a:defRPr>
-            </a:pPr>
-            <a:r>
-              <a:t>$16,000</a:t>
+                  <a:srgbClr val="2D2A5E"/>
+                </a:solidFill>
+                <a:latin typeface="Arial"/>
+              </a:defRPr>
+            </a:pPr>
+            <a:r>
+              <a:t>$3,200</a:t>
             </a:r>
           </a:p>
         </p:txBody>
@@ -15931,13 +13944,13 @@
             <a:pPr algn="l">
               <a:defRPr sz="1000" b="0">
                 <a:solidFill>
-                  <a:srgbClr val="64748B"/>
-                </a:solidFill>
-                <a:latin typeface="Calibri"/>
-              </a:defRPr>
-            </a:pPr>
-            <a:r>
-              <a:t>13%</a:t>
+                  <a:srgbClr val="6B7280"/>
+                </a:solidFill>
+                <a:latin typeface="Arial"/>
+              </a:defRPr>
+            </a:pPr>
+            <a:r>
+              <a:t>16%</a:t>
             </a:r>
           </a:p>
         </p:txBody>
@@ -15957,7 +13970,7 @@
             <a:avLst/>
           </a:prstGeom>
           <a:solidFill>
-            <a:srgbClr val="F7F9FC"/>
+            <a:srgbClr val="FAF6F0"/>
           </a:solidFill>
           <a:ln>
             <a:noFill/>
@@ -15994,13 +14007,13 @@
         <p:spPr>
           <a:xfrm>
             <a:off x="548640" y="2560320"/>
-            <a:ext cx="704088" cy="502920"/>
+            <a:ext cx="1106424" cy="502920"/>
           </a:xfrm>
           <a:prstGeom prst="rect">
             <a:avLst/>
           </a:prstGeom>
           <a:solidFill>
-            <a:srgbClr val="F0A500"/>
+            <a:srgbClr val="FECD1B"/>
           </a:solidFill>
           <a:ln>
             <a:noFill/>
@@ -16055,11 +14068,11 @@
                 <a:solidFill>
                   <a:srgbClr val="FFFFFF"/>
                 </a:solidFill>
-                <a:latin typeface="Calibri"/>
-              </a:defRPr>
-            </a:pPr>
-            <a:r>
-              <a:t>Phase 3: Change Management</a:t>
+                <a:latin typeface="Arial"/>
+              </a:defRPr>
+            </a:pPr>
+            <a:r>
+              <a:t>Change Management</a:t>
             </a:r>
           </a:p>
         </p:txBody>
@@ -16089,13 +14102,13 @@
             <a:pPr algn="r">
               <a:defRPr sz="1200" b="1">
                 <a:solidFill>
-                  <a:srgbClr val="1A365D"/>
-                </a:solidFill>
-                <a:latin typeface="Calibri"/>
-              </a:defRPr>
-            </a:pPr>
-            <a:r>
-              <a:t>$18,000</a:t>
+                  <a:srgbClr val="2D2A5E"/>
+                </a:solidFill>
+                <a:latin typeface="Arial"/>
+              </a:defRPr>
+            </a:pPr>
+            <a:r>
+              <a:t>$4,400</a:t>
             </a:r>
           </a:p>
         </p:txBody>
@@ -16125,13 +14138,13 @@
             <a:pPr algn="l">
               <a:defRPr sz="1000" b="0">
                 <a:solidFill>
-                  <a:srgbClr val="64748B"/>
-                </a:solidFill>
-                <a:latin typeface="Calibri"/>
-              </a:defRPr>
-            </a:pPr>
-            <a:r>
-              <a:t>14%</a:t>
+                  <a:srgbClr val="6B7280"/>
+                </a:solidFill>
+                <a:latin typeface="Arial"/>
+              </a:defRPr>
+            </a:pPr>
+            <a:r>
+              <a:t>22%</a:t>
             </a:r>
           </a:p>
         </p:txBody>
@@ -16151,7 +14164,7 @@
             <a:avLst/>
           </a:prstGeom>
           <a:solidFill>
-            <a:srgbClr val="F7F9FC"/>
+            <a:srgbClr val="FAF6F0"/>
           </a:solidFill>
           <a:ln>
             <a:noFill/>
@@ -16188,7 +14201,7 @@
         <p:spPr>
           <a:xfrm>
             <a:off x="548640" y="3246120"/>
-            <a:ext cx="754380" cy="502920"/>
+            <a:ext cx="653796" cy="502920"/>
           </a:xfrm>
           <a:prstGeom prst="rect">
             <a:avLst/>
@@ -16249,11 +14262,11 @@
                 <a:solidFill>
                   <a:srgbClr val="FFFFFF"/>
                 </a:solidFill>
-                <a:latin typeface="Calibri"/>
-              </a:defRPr>
-            </a:pPr>
-            <a:r>
-              <a:t>Phase 4: Project Management</a:t>
+                <a:latin typeface="Arial"/>
+              </a:defRPr>
+            </a:pPr>
+            <a:r>
+              <a:t>Evaluation &amp; Reporting</a:t>
             </a:r>
           </a:p>
         </p:txBody>
@@ -16283,13 +14296,13 @@
             <a:pPr algn="r">
               <a:defRPr sz="1200" b="1">
                 <a:solidFill>
-                  <a:srgbClr val="1A365D"/>
-                </a:solidFill>
-                <a:latin typeface="Calibri"/>
-              </a:defRPr>
-            </a:pPr>
-            <a:r>
-              <a:t>$19,000</a:t>
+                  <a:srgbClr val="2D2A5E"/>
+                </a:solidFill>
+                <a:latin typeface="Arial"/>
+              </a:defRPr>
+            </a:pPr>
+            <a:r>
+              <a:t>$2,600</a:t>
             </a:r>
           </a:p>
         </p:txBody>
@@ -16319,13 +14332,13 @@
             <a:pPr algn="l">
               <a:defRPr sz="1000" b="0">
                 <a:solidFill>
-                  <a:srgbClr val="64748B"/>
-                </a:solidFill>
-                <a:latin typeface="Calibri"/>
-              </a:defRPr>
-            </a:pPr>
-            <a:r>
-              <a:t>15%</a:t>
+                  <a:srgbClr val="6B7280"/>
+                </a:solidFill>
+                <a:latin typeface="Arial"/>
+              </a:defRPr>
+            </a:pPr>
+            <a:r>
+              <a:t>13%</a:t>
             </a:r>
           </a:p>
         </p:txBody>
@@ -16345,7 +14358,7 @@
             <a:avLst/>
           </a:prstGeom>
           <a:solidFill>
-            <a:srgbClr val="1A365D"/>
+            <a:srgbClr val="2D2A5E"/>
           </a:solidFill>
           <a:ln>
             <a:noFill/>
@@ -16400,11 +14413,11 @@
                 <a:solidFill>
                   <a:srgbClr val="FFFFFF"/>
                 </a:solidFill>
-                <a:latin typeface="Calibri"/>
-              </a:defRPr>
-            </a:pPr>
-            <a:r>
-              <a:t>Total Seed Funding Required</a:t>
+                <a:latin typeface="Arial"/>
+              </a:defRPr>
+            </a:pPr>
+            <a:r>
+              <a:t>Total Sandbox Funding Required</a:t>
             </a:r>
           </a:p>
         </p:txBody>
@@ -16434,13 +14447,13 @@
             <a:pPr algn="r">
               <a:defRPr sz="2000" b="1">
                 <a:solidFill>
-                  <a:srgbClr val="F0A500"/>
-                </a:solidFill>
-                <a:latin typeface="Calibri"/>
-              </a:defRPr>
-            </a:pPr>
-            <a:r>
-              <a:t>SGD $125,000</a:t>
+                  <a:srgbClr val="FECD1B"/>
+                </a:solidFill>
+                <a:latin typeface="Arial"/>
+              </a:defRPr>
+            </a:pPr>
+            <a:r>
+              <a:t>SGD $20,000</a:t>
             </a:r>
           </a:p>
         </p:txBody>
@@ -16470,13 +14483,13 @@
             <a:pPr algn="l">
               <a:defRPr sz="800" b="0">
                 <a:solidFill>
-                  <a:srgbClr val="64748B"/>
-                </a:solidFill>
-                <a:latin typeface="Calibri"/>
-              </a:defRPr>
-            </a:pPr>
-            <a:r>
-              <a:t>Senior Full-Stack Developer: $700/day x 40 days</a:t>
+                  <a:srgbClr val="6B7280"/>
+                </a:solidFill>
+                <a:latin typeface="Arial"/>
+              </a:defRPr>
+            </a:pPr>
+            <a:r>
+              <a:t>Full-Stack + AI Dev: $500/day x 16 days</a:t>
             </a:r>
           </a:p>
         </p:txBody>
@@ -16506,13 +14519,13 @@
             <a:pPr algn="l">
               <a:defRPr sz="800" b="0">
                 <a:solidFill>
-                  <a:srgbClr val="64748B"/>
-                </a:solidFill>
-                <a:latin typeface="Calibri"/>
-              </a:defRPr>
-            </a:pPr>
-            <a:r>
-              <a:t>AI/Prompt Engineer: $650/day x 30 days</a:t>
+                  <a:srgbClr val="6B7280"/>
+                </a:solidFill>
+                <a:latin typeface="Arial"/>
+              </a:defRPr>
+            </a:pPr>
+            <a:r>
+              <a:t>Azure Hosting: $200/month x 6 months</a:t>
             </a:r>
           </a:p>
         </p:txBody>
@@ -16542,13 +14555,13 @@
             <a:pPr algn="l">
               <a:defRPr sz="800" b="0">
                 <a:solidFill>
-                  <a:srgbClr val="64748B"/>
-                </a:solidFill>
-                <a:latin typeface="Calibri"/>
-              </a:defRPr>
-            </a:pPr>
-            <a:r>
-              <a:t>UI/UX Designer: $500/day x 20 days</a:t>
+                  <a:srgbClr val="6B7280"/>
+                </a:solidFill>
+                <a:latin typeface="Arial"/>
+              </a:defRPr>
+            </a:pPr>
+            <a:r>
+              <a:t>Claude Haiku via Azure AI Foundry: $100/month x 6 months</a:t>
             </a:r>
           </a:p>
         </p:txBody>
@@ -16561,7 +14574,7 @@
         </p:nvSpPr>
         <p:spPr>
           <a:xfrm>
-            <a:off x="548640" y="5266944"/>
+            <a:off x="4663440" y="4663440"/>
             <a:ext cx="3840480" cy="182880"/>
           </a:xfrm>
           <a:prstGeom prst="rect">
@@ -16578,13 +14591,13 @@
             <a:pPr algn="l">
               <a:defRPr sz="800" b="0">
                 <a:solidFill>
-                  <a:srgbClr val="64748B"/>
-                </a:solidFill>
-                <a:latin typeface="Calibri"/>
-              </a:defRPr>
-            </a:pPr>
-            <a:r>
-              <a:t>Cloud + AI API: $1,200/month x 12 months</a:t>
+                  <a:srgbClr val="6B7280"/>
+                </a:solidFill>
+                <a:latin typeface="Arial"/>
+              </a:defRPr>
+            </a:pPr>
+            <a:r>
+              <a:t>PDPA + Security: $3,200</a:t>
             </a:r>
           </a:p>
         </p:txBody>
@@ -16597,7 +14610,7 @@
         </p:nvSpPr>
         <p:spPr>
           <a:xfrm>
-            <a:off x="4663440" y="4663440"/>
+            <a:off x="4663440" y="4864608"/>
             <a:ext cx="3840480" cy="182880"/>
           </a:xfrm>
           <a:prstGeom prst="rect">
@@ -16614,13 +14627,13 @@
             <a:pPr algn="l">
               <a:defRPr sz="800" b="0">
                 <a:solidFill>
-                  <a:srgbClr val="64748B"/>
-                </a:solidFill>
-                <a:latin typeface="Calibri"/>
-              </a:defRPr>
-            </a:pPr>
-            <a:r>
-              <a:t>VAPT + PDPA Audit: $16,000</a:t>
+                  <a:srgbClr val="6B7280"/>
+                </a:solidFill>
+                <a:latin typeface="Arial"/>
+              </a:defRPr>
+            </a:pPr>
+            <a:r>
+              <a:t>Pedagogical Consultant: $600/day x 4 days</a:t>
             </a:r>
           </a:p>
         </p:txBody>
@@ -16633,7 +14646,7 @@
         </p:nvSpPr>
         <p:spPr>
           <a:xfrm>
-            <a:off x="4663440" y="4864608"/>
+            <a:off x="4663440" y="5065776"/>
             <a:ext cx="3840480" cy="182880"/>
           </a:xfrm>
           <a:prstGeom prst="rect">
@@ -16650,13 +14663,13 @@
             <a:pPr algn="l">
               <a:defRPr sz="800" b="0">
                 <a:solidFill>
-                  <a:srgbClr val="64748B"/>
-                </a:solidFill>
-                <a:latin typeface="Calibri"/>
-              </a:defRPr>
-            </a:pPr>
-            <a:r>
-              <a:t>Pedagogical Consultant: $800/day x 12 days</a:t>
+                  <a:srgbClr val="6B7280"/>
+                </a:solidFill>
+                <a:latin typeface="Arial"/>
+              </a:defRPr>
+            </a:pPr>
+            <a:r>
+              <a:t>Educator Workshops: $2,000</a:t>
             </a:r>
           </a:p>
         </p:txBody>
@@ -16669,7 +14682,7 @@
         </p:nvSpPr>
         <p:spPr>
           <a:xfrm>
-            <a:off x="4663440" y="5065776"/>
+            <a:off x="4663440" y="5266944"/>
             <a:ext cx="3840480" cy="182880"/>
           </a:xfrm>
           <a:prstGeom prst="rect">
@@ -16686,49 +14699,13 @@
             <a:pPr algn="l">
               <a:defRPr sz="800" b="0">
                 <a:solidFill>
-                  <a:srgbClr val="64748B"/>
-                </a:solidFill>
-                <a:latin typeface="Calibri"/>
-              </a:defRPr>
-            </a:pPr>
-            <a:r>
-              <a:t>Educator Workshops: $8,400</a:t>
-            </a:r>
-          </a:p>
-        </p:txBody>
-      </p:sp>
-      <p:sp>
-        <p:nvSpPr>
-          <p:cNvPr id="35" name="TextBox 34"/>
-          <p:cNvSpPr txBox="1"/>
-          <p:nvPr/>
-        </p:nvSpPr>
-        <p:spPr>
-          <a:xfrm>
-            <a:off x="4663440" y="5266944"/>
-            <a:ext cx="3840480" cy="182880"/>
-          </a:xfrm>
-          <a:prstGeom prst="rect">
-            <a:avLst/>
-          </a:prstGeom>
-          <a:noFill/>
-        </p:spPr>
-        <p:txBody>
-          <a:bodyPr wrap="square">
-            <a:spAutoFit/>
-          </a:bodyPr>
-          <a:lstStyle/>
-          <a:p>
-            <a:pPr algn="l">
-              <a:defRPr sz="800" b="0">
-                <a:solidFill>
-                  <a:srgbClr val="64748B"/>
-                </a:solidFill>
-                <a:latin typeface="Calibri"/>
-              </a:defRPr>
-            </a:pPr>
-            <a:r>
-              <a:t>PM + Evaluation: $19,000</a:t>
+                  <a:srgbClr val="6B7280"/>
+                </a:solidFill>
+                <a:latin typeface="Arial"/>
+              </a:defRPr>
+            </a:pPr>
+            <a:r>
+              <a:t>Evaluation + Reporting: $2,600</a:t>
             </a:r>
           </a:p>
         </p:txBody>

--- a/slides/PedaForge_Proposal.pptx
+++ b/slides/PedaForge_Proposal.pptx
@@ -3165,7 +3165,7 @@
             <a:avLst/>
           </a:prstGeom>
           <a:solidFill>
-            <a:srgbClr val="01ABAA"/>
+            <a:srgbClr val="E8063C"/>
           </a:solidFill>
           <a:ln>
             <a:noFill/>
@@ -3372,7 +3372,7 @@
               </a:defRPr>
             </a:pPr>
             <a:r>
-              <a:t>Duration: 6 Months  |  Budget: SGD $20,000</a:t>
+              <a:t>Duration: 12 Months  |  Budget: SGD $21,000</a:t>
             </a:r>
           </a:p>
         </p:txBody>
@@ -3454,7 +3454,7 @@
             <a:avLst/>
           </a:prstGeom>
           <a:solidFill>
-            <a:srgbClr val="01ABAA"/>
+            <a:srgbClr val="E8063C"/>
           </a:solidFill>
           <a:ln>
             <a:noFill/>
@@ -3507,7 +3507,7 @@
             <a:pPr algn="l">
               <a:defRPr sz="1000" b="1">
                 <a:solidFill>
-                  <a:srgbClr val="01ABAA"/>
+                  <a:srgbClr val="E8063C"/>
                 </a:solidFill>
                 <a:latin typeface="Arial"/>
               </a:defRPr>
@@ -3612,7 +3612,7 @@
             <a:avLst/>
           </a:prstGeom>
           <a:solidFill>
-            <a:srgbClr val="01ABAA"/>
+            <a:srgbClr val="E8063C"/>
           </a:solidFill>
           <a:ln>
             <a:noFill/>
@@ -3701,7 +3701,7 @@
             <a:pPr algn="ctr">
               <a:defRPr sz="900" b="0">
                 <a:solidFill>
-                  <a:srgbClr val="01ABAA"/>
+                  <a:srgbClr val="E8063C"/>
                 </a:solidFill>
                 <a:latin typeface="Arial"/>
               </a:defRPr>
@@ -4189,7 +4189,7 @@
             <a:avLst/>
           </a:prstGeom>
           <a:solidFill>
-            <a:srgbClr val="01ABAA"/>
+            <a:srgbClr val="E8063C"/>
           </a:solidFill>
           <a:ln>
             <a:noFill/>
@@ -4242,7 +4242,7 @@
             <a:pPr algn="l">
               <a:defRPr sz="1000" b="1">
                 <a:solidFill>
-                  <a:srgbClr val="01ABAA"/>
+                  <a:srgbClr val="E8063C"/>
                 </a:solidFill>
                 <a:latin typeface="Arial"/>
               </a:defRPr>
@@ -4393,7 +4393,7 @@
             <a:pPr algn="l">
               <a:defRPr sz="900" b="1">
                 <a:solidFill>
-                  <a:srgbClr val="01ABAA"/>
+                  <a:srgbClr val="E8063C"/>
                 </a:solidFill>
                 <a:latin typeface="Arial"/>
               </a:defRPr>
@@ -5279,7 +5279,7 @@
             <a:avLst/>
           </a:prstGeom>
           <a:solidFill>
-            <a:srgbClr val="01ABAA"/>
+            <a:srgbClr val="E8063C"/>
           </a:solidFill>
           <a:ln>
             <a:noFill/>
@@ -5538,7 +5538,7 @@
             <a:avLst/>
           </a:prstGeom>
           <a:solidFill>
-            <a:srgbClr val="01ABAA"/>
+            <a:srgbClr val="E8063C"/>
           </a:solidFill>
           <a:ln>
             <a:noFill/>
@@ -5597,7 +5597,7 @@
               </a:defRPr>
             </a:pPr>
             <a:r>
-              <a:t>SGD $20,000  |  6 Months  |  IDP 2.0 Aligned</a:t>
+              <a:t>SGD $21,000  |  12 Months  |  IDP 2.0 Aligned</a:t>
             </a:r>
           </a:p>
         </p:txBody>
@@ -5643,7 +5643,7 @@
             <a:avLst/>
           </a:prstGeom>
           <a:solidFill>
-            <a:srgbClr val="01ABAA"/>
+            <a:srgbClr val="E8063C"/>
           </a:solidFill>
           <a:ln>
             <a:noFill/>
@@ -5696,7 +5696,7 @@
             <a:pPr algn="l">
               <a:defRPr sz="1000" b="1">
                 <a:solidFill>
-                  <a:srgbClr val="01ABAA"/>
+                  <a:srgbClr val="E8063C"/>
                 </a:solidFill>
                 <a:latin typeface="Arial"/>
               </a:defRPr>
@@ -6417,7 +6417,7 @@
             <a:avLst/>
           </a:prstGeom>
           <a:solidFill>
-            <a:srgbClr val="01ABAA"/>
+            <a:srgbClr val="E8063C"/>
           </a:solidFill>
           <a:ln>
             <a:noFill/>
@@ -6470,7 +6470,7 @@
             <a:pPr algn="l">
               <a:defRPr sz="1000" b="1">
                 <a:solidFill>
-                  <a:srgbClr val="01ABAA"/>
+                  <a:srgbClr val="E8063C"/>
                 </a:solidFill>
                 <a:latin typeface="Arial"/>
               </a:defRPr>
@@ -6657,7 +6657,7 @@
             <a:pPr algn="l">
               <a:defRPr sz="800" b="1">
                 <a:solidFill>
-                  <a:srgbClr val="01ABAA"/>
+                  <a:srgbClr val="E8063C"/>
                 </a:solidFill>
                 <a:latin typeface="Arial"/>
               </a:defRPr>
@@ -8779,7 +8779,7 @@
             <a:avLst/>
           </a:prstGeom>
           <a:solidFill>
-            <a:srgbClr val="01ABAA"/>
+            <a:srgbClr val="E8063C"/>
           </a:solidFill>
           <a:ln>
             <a:noFill/>
@@ -8832,7 +8832,7 @@
             <a:pPr algn="l">
               <a:defRPr sz="1000" b="1">
                 <a:solidFill>
-                  <a:srgbClr val="01ABAA"/>
+                  <a:srgbClr val="E8063C"/>
                 </a:solidFill>
                 <a:latin typeface="Arial"/>
               </a:defRPr>
@@ -8894,7 +8894,7 @@
             <a:avLst/>
           </a:prstGeom>
           <a:solidFill>
-            <a:srgbClr val="01ABAA"/>
+            <a:srgbClr val="E8063C"/>
           </a:solidFill>
           <a:ln>
             <a:noFill/>
@@ -10117,7 +10117,7 @@
             <a:pPr algn="ctr">
               <a:defRPr sz="1300" b="1">
                 <a:solidFill>
-                  <a:srgbClr val="01ABAA"/>
+                  <a:srgbClr val="E8063C"/>
                 </a:solidFill>
                 <a:latin typeface="Arial"/>
               </a:defRPr>
@@ -10169,7 +10169,7 @@
             <a:avLst/>
           </a:prstGeom>
           <a:solidFill>
-            <a:srgbClr val="01ABAA"/>
+            <a:srgbClr val="E8063C"/>
           </a:solidFill>
           <a:ln>
             <a:noFill/>
@@ -10222,7 +10222,7 @@
             <a:pPr algn="l">
               <a:defRPr sz="1000" b="1">
                 <a:solidFill>
-                  <a:srgbClr val="01ABAA"/>
+                  <a:srgbClr val="E8063C"/>
                 </a:solidFill>
                 <a:latin typeface="Arial"/>
               </a:defRPr>
@@ -11020,7 +11020,7 @@
             <a:pPr algn="l">
               <a:defRPr sz="1000" b="1">
                 <a:solidFill>
-                  <a:srgbClr val="01ABAA"/>
+                  <a:srgbClr val="E8063C"/>
                 </a:solidFill>
                 <a:latin typeface="Arial"/>
               </a:defRPr>
@@ -11092,7 +11092,7 @@
             <a:pPr algn="l">
               <a:defRPr sz="1000" b="1">
                 <a:solidFill>
-                  <a:srgbClr val="01ABAA"/>
+                  <a:srgbClr val="E8063C"/>
                 </a:solidFill>
                 <a:latin typeface="Arial"/>
               </a:defRPr>
@@ -11164,7 +11164,7 @@
             <a:pPr algn="l">
               <a:defRPr sz="1000" b="1">
                 <a:solidFill>
-                  <a:srgbClr val="01ABAA"/>
+                  <a:srgbClr val="E8063C"/>
                 </a:solidFill>
                 <a:latin typeface="Arial"/>
               </a:defRPr>
@@ -11236,7 +11236,7 @@
             <a:pPr algn="l">
               <a:defRPr sz="1000" b="1">
                 <a:solidFill>
-                  <a:srgbClr val="01ABAA"/>
+                  <a:srgbClr val="E8063C"/>
                 </a:solidFill>
                 <a:latin typeface="Arial"/>
               </a:defRPr>
@@ -11308,7 +11308,7 @@
             <a:pPr algn="l">
               <a:defRPr sz="1000" b="1">
                 <a:solidFill>
-                  <a:srgbClr val="01ABAA"/>
+                  <a:srgbClr val="E8063C"/>
                 </a:solidFill>
                 <a:latin typeface="Arial"/>
               </a:defRPr>
@@ -11396,7 +11396,7 @@
             <a:avLst/>
           </a:prstGeom>
           <a:solidFill>
-            <a:srgbClr val="01ABAA"/>
+            <a:srgbClr val="E8063C"/>
           </a:solidFill>
           <a:ln>
             <a:noFill/>
@@ -11449,7 +11449,7 @@
             <a:pPr algn="l">
               <a:defRPr sz="1000" b="1">
                 <a:solidFill>
-                  <a:srgbClr val="01ABAA"/>
+                  <a:srgbClr val="E8063C"/>
                 </a:solidFill>
                 <a:latin typeface="Arial"/>
               </a:defRPr>
@@ -11564,7 +11564,7 @@
             <a:pPr algn="ctr">
               <a:defRPr sz="3600" b="1">
                 <a:solidFill>
-                  <a:srgbClr val="01ABAA"/>
+                  <a:srgbClr val="E8063C"/>
                 </a:solidFill>
                 <a:latin typeface="Arial"/>
               </a:defRPr>
@@ -12467,7 +12467,7 @@
             <a:avLst/>
           </a:prstGeom>
           <a:solidFill>
-            <a:srgbClr val="01ABAA"/>
+            <a:srgbClr val="E8063C"/>
           </a:solidFill>
           <a:ln>
             <a:noFill/>
@@ -12520,13 +12520,13 @@
             <a:pPr algn="l">
               <a:defRPr sz="1000" b="1">
                 <a:solidFill>
-                  <a:srgbClr val="01ABAA"/>
-                </a:solidFill>
-                <a:latin typeface="Arial"/>
-              </a:defRPr>
-            </a:pPr>
-            <a:r>
-              <a:t>6-MONTH ROADMAP</a:t>
+                  <a:srgbClr val="E8063C"/>
+                </a:solidFill>
+                <a:latin typeface="Arial"/>
+              </a:defRPr>
+            </a:pPr>
+            <a:r>
+              <a:t>12-MONTH ROADMAP</a:t>
             </a:r>
           </a:p>
         </p:txBody>
@@ -12625,7 +12625,7 @@
             <a:avLst/>
           </a:prstGeom>
           <a:solidFill>
-            <a:srgbClr val="01ABAA"/>
+            <a:srgbClr val="E8063C"/>
           </a:solidFill>
           <a:ln>
             <a:noFill/>
@@ -12678,13 +12678,13 @@
             <a:pPr algn="ctr">
               <a:defRPr sz="800" b="1">
                 <a:solidFill>
-                  <a:srgbClr val="01ABAA"/>
-                </a:solidFill>
-                <a:latin typeface="Arial"/>
-              </a:defRPr>
-            </a:pPr>
-            <a:r>
-              <a:t>Months 1–2</a:t>
+                  <a:srgbClr val="E8063C"/>
+                </a:solidFill>
+                <a:latin typeface="Arial"/>
+              </a:defRPr>
+            </a:pPr>
+            <a:r>
+              <a:t>Months 1–3</a:t>
             </a:r>
           </a:p>
         </p:txBody>
@@ -12760,11 +12760,11 @@
               </a:defRPr>
             </a:pPr>
             <a:r>
-              <a:t>Infrastructure, AI prompts,</a:t>
+              <a:t>Azure infrastructure,</a:t>
             </a:r>
             <a:br/>
             <a:r>
-              <a:t>platform build, PDPA</a:t>
+              <a:t>core modules, AI prompts</a:t>
             </a:r>
           </a:p>
         </p:txBody>
@@ -12843,7 +12843,7 @@
               </a:defRPr>
             </a:pPr>
             <a:r>
-              <a:t>Month 3</a:t>
+              <a:t>Months 4–5</a:t>
             </a:r>
           </a:p>
         </p:txBody>
@@ -12879,11 +12879,11 @@
               </a:defRPr>
             </a:pPr>
             <a:r>
-              <a:t>Pilot</a:t>
+              <a:t>Pilot Deployment</a:t>
             </a:r>
             <a:br/>
             <a:r>
-              <a:t>Deployment</a:t>
+              <a:t>&amp; Onboarding</a:t>
             </a:r>
           </a:p>
         </p:txBody>
@@ -13002,7 +13002,7 @@
               </a:defRPr>
             </a:pPr>
             <a:r>
-              <a:t>Months 4–5</a:t>
+              <a:t>Months 6–9</a:t>
             </a:r>
           </a:p>
         </p:txBody>
@@ -13038,11 +13038,11 @@
               </a:defRPr>
             </a:pPr>
             <a:r>
-              <a:t>Active</a:t>
+              <a:t>Active Usage</a:t>
             </a:r>
             <a:br/>
             <a:r>
-              <a:t>Execution</a:t>
+              <a:t>&amp; Iteration</a:t>
             </a:r>
           </a:p>
         </p:txBody>
@@ -13082,7 +13082,7 @@
             </a:r>
             <a:br/>
             <a:r>
-              <a:t>first IDPs generated</a:t>
+              <a:t>IDPs, AI coaching</a:t>
             </a:r>
           </a:p>
         </p:txBody>
@@ -13161,7 +13161,7 @@
               </a:defRPr>
             </a:pPr>
             <a:r>
-              <a:t>Month 6</a:t>
+              <a:t>Months 10–12</a:t>
             </a:r>
           </a:p>
         </p:txBody>
@@ -13197,11 +13197,11 @@
               </a:defRPr>
             </a:pPr>
             <a:r>
-              <a:t>Impact Assessment</a:t>
+              <a:t>Assessment</a:t>
             </a:r>
             <a:br/>
             <a:r>
-              <a:t>&amp; Reporting</a:t>
+              <a:t>&amp; Scaling</a:t>
             </a:r>
           </a:p>
         </p:txBody>
@@ -13237,11 +13237,11 @@
               </a:defRPr>
             </a:pPr>
             <a:r>
-              <a:t>Findings, commercialisation</a:t>
+              <a:t>Impact report, ECDA</a:t>
             </a:r>
             <a:br/>
             <a:r>
-              <a:t>roadmap, ECDA presentation</a:t>
+              <a:t>presentation, scale plan</a:t>
             </a:r>
           </a:p>
         </p:txBody>
@@ -13313,7 +13313,7 @@
               </a:defRPr>
             </a:pPr>
             <a:r>
-              <a:t>✓  Month 2: AI prompts validated against QTT rubric</a:t>
+              <a:t>✓  Month 3: AI prompts validated against QTT rubric</a:t>
             </a:r>
           </a:p>
         </p:txBody>
@@ -13349,7 +13349,7 @@
               </a:defRPr>
             </a:pPr>
             <a:r>
-              <a:t>✓  Month 3: First educators onboarded with training</a:t>
+              <a:t>✓  Month 5: First educators onboarded with training</a:t>
             </a:r>
           </a:p>
         </p:txBody>
@@ -13385,7 +13385,7 @@
               </a:defRPr>
             </a:pPr>
             <a:r>
-              <a:t>✓  Month 5: First SFw-aligned IDPs auto-generated</a:t>
+              <a:t>✓  Month 9: First SFw-aligned IDPs auto-generated</a:t>
             </a:r>
           </a:p>
         </p:txBody>
@@ -13421,7 +13421,7 @@
               </a:defRPr>
             </a:pPr>
             <a:r>
-              <a:t>✓  Month 6: Final impact report to ECDA</a:t>
+              <a:t>✓  Month 12: Final impact report to ECDA</a:t>
             </a:r>
           </a:p>
         </p:txBody>
@@ -13467,7 +13467,7 @@
             <a:avLst/>
           </a:prstGeom>
           <a:solidFill>
-            <a:srgbClr val="01ABAA"/>
+            <a:srgbClr val="E8063C"/>
           </a:solidFill>
           <a:ln>
             <a:noFill/>
@@ -13520,7 +13520,7 @@
             <a:pPr algn="l">
               <a:defRPr sz="1000" b="1">
                 <a:solidFill>
-                  <a:srgbClr val="01ABAA"/>
+                  <a:srgbClr val="E8063C"/>
                 </a:solidFill>
                 <a:latin typeface="Arial"/>
               </a:defRPr>
@@ -13619,13 +13619,13 @@
         <p:spPr>
           <a:xfrm>
             <a:off x="548640" y="1188720"/>
-            <a:ext cx="2464308" cy="502920"/>
+            <a:ext cx="2564892" cy="502920"/>
           </a:xfrm>
           <a:prstGeom prst="rect">
             <a:avLst/>
           </a:prstGeom>
           <a:solidFill>
-            <a:srgbClr val="01ABAA"/>
+            <a:srgbClr val="E8063C"/>
           </a:solidFill>
           <a:ln>
             <a:noFill/>
@@ -13720,7 +13720,7 @@
               </a:defRPr>
             </a:pPr>
             <a:r>
-              <a:t>$9,800</a:t>
+              <a:t>$10,800</a:t>
             </a:r>
           </a:p>
         </p:txBody>
@@ -13756,7 +13756,7 @@
               </a:defRPr>
             </a:pPr>
             <a:r>
-              <a:t>49%</a:t>
+              <a:t>51%</a:t>
             </a:r>
           </a:p>
         </p:txBody>
@@ -13813,7 +13813,7 @@
         <p:spPr>
           <a:xfrm>
             <a:off x="548640" y="1874519"/>
-            <a:ext cx="804672" cy="502920"/>
+            <a:ext cx="754380" cy="502920"/>
           </a:xfrm>
           <a:prstGeom prst="rect">
             <a:avLst/>
@@ -13950,7 +13950,7 @@
               </a:defRPr>
             </a:pPr>
             <a:r>
-              <a:t>16%</a:t>
+              <a:t>15%</a:t>
             </a:r>
           </a:p>
         </p:txBody>
@@ -14007,7 +14007,7 @@
         <p:spPr>
           <a:xfrm>
             <a:off x="548640" y="2560320"/>
-            <a:ext cx="1106424" cy="502920"/>
+            <a:ext cx="1056132" cy="502920"/>
           </a:xfrm>
           <a:prstGeom prst="rect">
             <a:avLst/>
@@ -14144,7 +14144,7 @@
               </a:defRPr>
             </a:pPr>
             <a:r>
-              <a:t>22%</a:t>
+              <a:t>21%</a:t>
             </a:r>
           </a:p>
         </p:txBody>
@@ -14453,7 +14453,7 @@
               </a:defRPr>
             </a:pPr>
             <a:r>
-              <a:t>SGD $20,000</a:t>
+              <a:t>SGD $21,000</a:t>
             </a:r>
           </a:p>
         </p:txBody>
@@ -14525,7 +14525,7 @@
               </a:defRPr>
             </a:pPr>
             <a:r>
-              <a:t>Azure Hosting: $200/month x 6 months</a:t>
+              <a:t>Azure Hosting: $150/month x 12 months</a:t>
             </a:r>
           </a:p>
         </p:txBody>
@@ -14561,7 +14561,7 @@
               </a:defRPr>
             </a:pPr>
             <a:r>
-              <a:t>Claude Haiku via Azure AI Foundry: $100/month x 6 months</a:t>
+              <a:t>Claude Haiku via Azure AI Foundry: $85/month x 12 months</a:t>
             </a:r>
           </a:p>
         </p:txBody>

--- a/slides/PedaForge_Proposal.pptx
+++ b/slides/PedaForge_Proposal.pptx
@@ -3945,7 +3945,7 @@
             </a:r>
             <a:br/>
             <a:r>
-              <a:t>via Azure AI Foundry, deployment</a:t>
+              <a:t>via Azure OpenAI, deployment</a:t>
             </a:r>
           </a:p>
         </p:txBody>
@@ -10379,7 +10379,7 @@
               </a:defRPr>
             </a:pPr>
             <a:r>
-              <a:t>React / Next.js, TypeScript, TailwindCSS</a:t>
+              <a:t>Angular, TypeScript, TailwindCSS</a:t>
             </a:r>
           </a:p>
         </p:txBody>
@@ -10609,7 +10609,7 @@
               </a:defRPr>
             </a:pPr>
             <a:r>
-              <a:t>Claude Haiku 4.5 via Azure AI Foundry</a:t>
+              <a:t>GPT-4o-mini via Azure OpenAI</a:t>
             </a:r>
           </a:p>
         </p:txBody>
@@ -14561,7 +14561,7 @@
               </a:defRPr>
             </a:pPr>
             <a:r>
-              <a:t>Claude Haiku via Azure AI Foundry: $85/month x 12 months</a:t>
+              <a:t>GPT-4o-mini via Azure OpenAI: $85/month x 12 months</a:t>
             </a:r>
           </a:p>
         </p:txBody>

--- a/slides/PedaForge_Proposal.pptx
+++ b/slides/PedaForge_Proposal.pptx
@@ -10609,7 +10609,7 @@
               </a:defRPr>
             </a:pPr>
             <a:r>
-              <a:t>GPT-4o-mini via Azure OpenAI</a:t>
+              <a:t>GPT-4.1-mini via Azure OpenAI</a:t>
             </a:r>
           </a:p>
         </p:txBody>
@@ -14561,7 +14561,7 @@
               </a:defRPr>
             </a:pPr>
             <a:r>
-              <a:t>GPT-4o-mini via Azure OpenAI: $85/month x 12 months</a:t>
+              <a:t>GPT-4.1-mini via Azure OpenAI: $85/month x 12 months</a:t>
             </a:r>
           </a:p>
         </p:txBody>
